--- a/JammuKhoj_Pitch_Deck.pptx
+++ b/JammuKhoj_Pitch_Deck.pptx
@@ -3112,7 +3112,7 @@
             <a:avLst/>
           </a:prstGeom>
           <a:solidFill>
-            <a:srgbClr val="085444"/>
+            <a:srgbClr val="0B3D33"/>
           </a:solidFill>
           <a:ln>
             <a:noFill/>
@@ -3148,18 +3148,18 @@
         </p:nvSpPr>
         <p:spPr>
           <a:xfrm>
-            <a:off x="731520" y="731520"/>
-            <a:ext cx="10728655" cy="5394960"/>
+            <a:off x="640080" y="548640"/>
+            <a:ext cx="10911535" cy="5760720"/>
           </a:xfrm>
           <a:prstGeom prst="roundRect">
             <a:avLst/>
           </a:prstGeom>
           <a:solidFill>
-            <a:srgbClr val="123E38"/>
+            <a:srgbClr val="07241E"/>
           </a:solidFill>
           <a:ln w="19050">
             <a:solidFill>
-              <a:srgbClr val="D97706"/>
+              <a:srgbClr val="D98210"/>
             </a:solidFill>
           </a:ln>
         </p:spPr>
@@ -3185,16 +3185,40 @@
           </a:p>
         </p:txBody>
       </p:sp>
-      <p:sp>
-        <p:nvSpPr>
-          <p:cNvPr id="4" name="TextBox 3"/>
+      <p:pic>
+        <p:nvPicPr>
+          <p:cNvPr id="4" name="Picture 3" descr="app_logo.png"/>
+          <p:cNvPicPr>
+            <a:picLocks noChangeAspect="1"/>
+          </p:cNvPicPr>
+          <p:nvPr/>
+        </p:nvPicPr>
+        <p:blipFill>
+          <a:blip r:embed="rId2"/>
+          <a:stretch>
+            <a:fillRect/>
+          </a:stretch>
+        </p:blipFill>
+        <p:spPr>
+          <a:xfrm>
+            <a:off x="5272887" y="960120"/>
+            <a:ext cx="1645920" cy="1645920"/>
+          </a:xfrm>
+          <a:prstGeom prst="rect">
+            <a:avLst/>
+          </a:prstGeom>
+        </p:spPr>
+      </p:pic>
+      <p:sp>
+        <p:nvSpPr>
+          <p:cNvPr id="5" name="TextBox 4"/>
           <p:cNvSpPr txBox="1"/>
           <p:nvPr/>
         </p:nvSpPr>
         <p:spPr>
           <a:xfrm>
-            <a:off x="1097280" y="1097280"/>
-            <a:ext cx="9144000" cy="365760"/>
+            <a:off x="1371600" y="2697480"/>
+            <a:ext cx="9448495" cy="320040"/>
           </a:xfrm>
           <a:prstGeom prst="rect">
             <a:avLst/>
@@ -3202,15 +3226,15 @@
           <a:noFill/>
         </p:spPr>
         <p:txBody>
-          <a:bodyPr wrap="none">
+          <a:bodyPr wrap="square">
             <a:spAutoFit/>
           </a:bodyPr>
           <a:lstStyle/>
           <a:p>
-            <a:pPr>
-              <a:defRPr sz="1100" b="1">
-                <a:solidFill>
-                  <a:srgbClr val="D97706"/>
+            <a:pPr algn="ctr">
+              <a:defRPr sz="1050" b="1">
+                <a:solidFill>
+                  <a:srgbClr val="D98210"/>
                 </a:solidFill>
                 <a:latin typeface="Arial"/>
               </a:defRPr>
@@ -3223,14 +3247,14 @@
       </p:sp>
       <p:sp>
         <p:nvSpPr>
-          <p:cNvPr id="5" name="TextBox 4"/>
+          <p:cNvPr id="6" name="TextBox 5"/>
           <p:cNvSpPr txBox="1"/>
           <p:nvPr/>
         </p:nvSpPr>
         <p:spPr>
           <a:xfrm>
-            <a:off x="1097280" y="1554480"/>
-            <a:ext cx="9601200" cy="1280160"/>
+            <a:off x="1371600" y="3017520"/>
+            <a:ext cx="9448495" cy="1051560"/>
           </a:xfrm>
           <a:prstGeom prst="rect">
             <a:avLst/>
@@ -3238,12 +3262,12 @@
           <a:noFill/>
         </p:spPr>
         <p:txBody>
-          <a:bodyPr wrap="none">
+          <a:bodyPr wrap="square">
             <a:spAutoFit/>
           </a:bodyPr>
           <a:lstStyle/>
           <a:p>
-            <a:pPr>
+            <a:pPr algn="ctr">
               <a:defRPr sz="4600" b="1">
                 <a:solidFill>
                   <a:srgbClr val="FFFFFF"/>
@@ -3256,10 +3280,10 @@
             </a:r>
           </a:p>
           <a:p>
-            <a:pPr>
-              <a:defRPr sz="2000">
-                <a:solidFill>
-                  <a:srgbClr val="D97706"/>
+            <a:pPr algn="ctr">
+              <a:defRPr sz="1650">
+                <a:solidFill>
+                  <a:srgbClr val="D98210"/>
                 </a:solidFill>
                 <a:latin typeface="Arial"/>
               </a:defRPr>
@@ -3272,14 +3296,14 @@
       </p:sp>
       <p:sp>
         <p:nvSpPr>
-          <p:cNvPr id="6" name="TextBox 5"/>
+          <p:cNvPr id="7" name="TextBox 6"/>
           <p:cNvSpPr txBox="1"/>
           <p:nvPr/>
         </p:nvSpPr>
         <p:spPr>
           <a:xfrm>
-            <a:off x="1097280" y="3017520"/>
-            <a:ext cx="9601200" cy="1097280"/>
+            <a:off x="1828800" y="4160520"/>
+            <a:ext cx="8534095" cy="685800"/>
           </a:xfrm>
           <a:prstGeom prst="rect">
             <a:avLst/>
@@ -3287,13 +3311,13 @@
           <a:noFill/>
         </p:spPr>
         <p:txBody>
-          <a:bodyPr wrap="none">
+          <a:bodyPr wrap="square">
             <a:spAutoFit/>
           </a:bodyPr>
           <a:lstStyle/>
           <a:p>
-            <a:pPr>
-              <a:defRPr sz="1400">
+            <a:pPr algn="ctr">
+              <a:defRPr sz="1200">
                 <a:solidFill>
                   <a:srgbClr val="FFFFFF"/>
                 </a:solidFill>
@@ -3301,31 +3325,31 @@
               </a:defRPr>
             </a:pPr>
             <a:r>
-              <a:t>A smart, privacy-centric tourism and pilgrimage companion engineered for visitors, transit layovers, and Mata Vaishno Devi pilgrims across the Jammu Division. 100% offline-ready with conservative train/flight safety buffers, transparent transport benchmarks, and verified civic assistance.</a:t>
-            </a:r>
-          </a:p>
-        </p:txBody>
-      </p:sp>
-      <p:sp>
-        <p:nvSpPr>
-          <p:cNvPr id="7" name="Rounded Rectangle 6"/>
+              <a:t>A production-ready progressive web app &amp; Android platform engineered for transit layovers and Mata Vaishno Devi pilgrims. 100% offline-ready with conservative train/flight safety buffers, transparent transport fare matrices, step-free senior guidance, and zero-tracking privacy.</a:t>
+            </a:r>
+          </a:p>
+        </p:txBody>
+      </p:sp>
+      <p:sp>
+        <p:nvSpPr>
+          <p:cNvPr id="8" name="Rounded Rectangle 7"/>
           <p:cNvSpPr/>
           <p:nvPr/>
         </p:nvSpPr>
         <p:spPr>
           <a:xfrm>
-            <a:off x="1097280" y="4297680"/>
-            <a:ext cx="2286000" cy="1371600"/>
+            <a:off x="1051560" y="4937760"/>
+            <a:ext cx="2423160" cy="749808"/>
           </a:xfrm>
           <a:prstGeom prst="roundRect">
             <a:avLst/>
           </a:prstGeom>
           <a:solidFill>
-            <a:srgbClr val="085444"/>
+            <a:srgbClr val="0B3D33"/>
           </a:solidFill>
           <a:ln w="12700">
             <a:solidFill>
-              <a:srgbClr val="D97706"/>
+              <a:srgbClr val="D98210"/>
             </a:solidFill>
           </a:ln>
         </p:spPr>
@@ -3353,14 +3377,14 @@
       </p:sp>
       <p:sp>
         <p:nvSpPr>
-          <p:cNvPr id="8" name="TextBox 7"/>
+          <p:cNvPr id="9" name="TextBox 8"/>
           <p:cNvSpPr txBox="1"/>
           <p:nvPr/>
         </p:nvSpPr>
         <p:spPr>
           <a:xfrm>
-            <a:off x="1188720" y="4389120"/>
-            <a:ext cx="2103120" cy="1188720"/>
+            <a:off x="1124712" y="4992624"/>
+            <a:ext cx="2286000" cy="640080"/>
           </a:xfrm>
           <a:prstGeom prst="rect">
             <a:avLst/>
@@ -3373,53 +3397,51 @@
           </a:bodyPr>
           <a:lstStyle/>
           <a:p>
-            <a:pPr>
-              <a:defRPr sz="1150" b="1">
-                <a:solidFill>
-                  <a:srgbClr val="D97706"/>
-                </a:solidFill>
-                <a:latin typeface="Georgia"/>
-              </a:defRPr>
-            </a:pPr>
-            <a:r>
-              <a:t>⚡ 1-Tap Buffer-Safe Planner</a:t>
-            </a:r>
-          </a:p>
-          <a:p>
-            <a:pPr>
-              <a:defRPr sz="950">
+            <a:pPr algn="ctr">
+              <a:defRPr sz="1000" b="1">
+                <a:solidFill>
+                  <a:srgbClr val="D98210"/>
+                </a:solidFill>
+              </a:defRPr>
+            </a:pPr>
+            <a:r>
+              <a:t>⚡ 1-Tap Buffer Planner</a:t>
+            </a:r>
+          </a:p>
+          <a:p>
+            <a:pPr algn="ctr">
+              <a:defRPr sz="850">
                 <a:solidFill>
                   <a:srgbClr val="FFFFFF"/>
                 </a:solidFill>
-                <a:latin typeface="Arial"/>
-              </a:defRPr>
-            </a:pPr>
-            <a:r>
-              <a:t>Express 4h, 8h &amp; 24h circuits preserving departure safety buffers</a:t>
-            </a:r>
-          </a:p>
-        </p:txBody>
-      </p:sp>
-      <p:sp>
-        <p:nvSpPr>
-          <p:cNvPr id="9" name="Rounded Rectangle 8"/>
+              </a:defRPr>
+            </a:pPr>
+            <a:r>
+              <a:t>4h, 8h &amp; 24h layover circuits</a:t>
+            </a:r>
+          </a:p>
+        </p:txBody>
+      </p:sp>
+      <p:sp>
+        <p:nvSpPr>
+          <p:cNvPr id="10" name="Rounded Rectangle 9"/>
           <p:cNvSpPr/>
           <p:nvPr/>
         </p:nvSpPr>
         <p:spPr>
           <a:xfrm>
-            <a:off x="3566160" y="4297680"/>
-            <a:ext cx="2286000" cy="1371600"/>
+            <a:off x="3593591" y="4937760"/>
+            <a:ext cx="2423160" cy="749808"/>
           </a:xfrm>
           <a:prstGeom prst="roundRect">
             <a:avLst/>
           </a:prstGeom>
           <a:solidFill>
-            <a:srgbClr val="085444"/>
+            <a:srgbClr val="0B3D33"/>
           </a:solidFill>
           <a:ln w="12700">
             <a:solidFill>
-              <a:srgbClr val="D97706"/>
+              <a:srgbClr val="D98210"/>
             </a:solidFill>
           </a:ln>
         </p:spPr>
@@ -3447,14 +3469,14 @@
       </p:sp>
       <p:sp>
         <p:nvSpPr>
-          <p:cNvPr id="10" name="TextBox 9"/>
+          <p:cNvPr id="11" name="TextBox 10"/>
           <p:cNvSpPr txBox="1"/>
           <p:nvPr/>
         </p:nvSpPr>
         <p:spPr>
           <a:xfrm>
-            <a:off x="3657600" y="4389120"/>
-            <a:ext cx="2103120" cy="1188720"/>
+            <a:off x="3666743" y="4992624"/>
+            <a:ext cx="2286000" cy="640080"/>
           </a:xfrm>
           <a:prstGeom prst="rect">
             <a:avLst/>
@@ -3467,12 +3489,11 @@
           </a:bodyPr>
           <a:lstStyle/>
           <a:p>
-            <a:pPr>
-              <a:defRPr sz="1150" b="1">
-                <a:solidFill>
-                  <a:srgbClr val="D97706"/>
-                </a:solidFill>
-                <a:latin typeface="Georgia"/>
+            <a:pPr algn="ctr">
+              <a:defRPr sz="1000" b="1">
+                <a:solidFill>
+                  <a:srgbClr val="D98210"/>
+                </a:solidFill>
               </a:defRPr>
             </a:pPr>
             <a:r>
@@ -3480,40 +3501,39 @@
             </a:r>
           </a:p>
           <a:p>
-            <a:pPr>
-              <a:defRPr sz="950">
+            <a:pPr algn="ctr">
+              <a:defRPr sz="850">
                 <a:solidFill>
                   <a:srgbClr val="FFFFFF"/>
                 </a:solidFill>
-                <a:latin typeface="Arial"/>
-              </a:defRPr>
-            </a:pPr>
-            <a:r>
-              <a:t>Complete on-device vector maps, guides &amp; emergency dialer</a:t>
-            </a:r>
-          </a:p>
-        </p:txBody>
-      </p:sp>
-      <p:sp>
-        <p:nvSpPr>
-          <p:cNvPr id="11" name="Rounded Rectangle 10"/>
+              </a:defRPr>
+            </a:pPr>
+            <a:r>
+              <a:t>Vector maps &amp; full routing offline</a:t>
+            </a:r>
+          </a:p>
+        </p:txBody>
+      </p:sp>
+      <p:sp>
+        <p:nvSpPr>
+          <p:cNvPr id="12" name="Rounded Rectangle 11"/>
           <p:cNvSpPr/>
           <p:nvPr/>
         </p:nvSpPr>
         <p:spPr>
           <a:xfrm>
-            <a:off x="6035040" y="4297680"/>
-            <a:ext cx="2286000" cy="1371600"/>
+            <a:off x="6135623" y="4937760"/>
+            <a:ext cx="2423160" cy="749808"/>
           </a:xfrm>
           <a:prstGeom prst="roundRect">
             <a:avLst/>
           </a:prstGeom>
           <a:solidFill>
-            <a:srgbClr val="085444"/>
+            <a:srgbClr val="0B3D33"/>
           </a:solidFill>
           <a:ln w="12700">
             <a:solidFill>
-              <a:srgbClr val="D97706"/>
+              <a:srgbClr val="D98210"/>
             </a:solidFill>
           </a:ln>
         </p:spPr>
@@ -3541,14 +3561,14 @@
       </p:sp>
       <p:sp>
         <p:nvSpPr>
-          <p:cNvPr id="12" name="TextBox 11"/>
+          <p:cNvPr id="13" name="TextBox 12"/>
           <p:cNvSpPr txBox="1"/>
           <p:nvPr/>
         </p:nvSpPr>
         <p:spPr>
           <a:xfrm>
-            <a:off x="6126480" y="4389120"/>
-            <a:ext cx="2103120" cy="1188720"/>
+            <a:off x="6208775" y="4992624"/>
+            <a:ext cx="2286000" cy="640080"/>
           </a:xfrm>
           <a:prstGeom prst="rect">
             <a:avLst/>
@@ -3561,53 +3581,51 @@
           </a:bodyPr>
           <a:lstStyle/>
           <a:p>
-            <a:pPr>
-              <a:defRPr sz="1150" b="1">
-                <a:solidFill>
-                  <a:srgbClr val="D97706"/>
-                </a:solidFill>
-                <a:latin typeface="Georgia"/>
-              </a:defRPr>
-            </a:pPr>
-            <a:r>
-              <a:t>🚌 Transparent Transit Matrix</a:t>
-            </a:r>
-          </a:p>
-          <a:p>
-            <a:pPr>
-              <a:defRPr sz="950">
+            <a:pPr algn="ctr">
+              <a:defRPr sz="1000" b="1">
+                <a:solidFill>
+                  <a:srgbClr val="D98210"/>
+                </a:solidFill>
+              </a:defRPr>
+            </a:pPr>
+            <a:r>
+              <a:t>🚌 Transparent Transit</a:t>
+            </a:r>
+          </a:p>
+          <a:p>
+            <a:pPr algn="ctr">
+              <a:defRPr sz="850">
                 <a:solidFill>
                   <a:srgbClr val="FFFFFF"/>
                 </a:solidFill>
-                <a:latin typeface="Arial"/>
-              </a:defRPr>
-            </a:pPr>
-            <a:r>
-              <a:t>Surveyed fares for Matadors (₹10-25), Autos &amp; Prepaid Taxis</a:t>
-            </a:r>
-          </a:p>
-        </p:txBody>
-      </p:sp>
-      <p:sp>
-        <p:nvSpPr>
-          <p:cNvPr id="13" name="Rounded Rectangle 12"/>
+              </a:defRPr>
+            </a:pPr>
+            <a:r>
+              <a:t>Matadors (₹10-25), Autos &amp; Taxis</a:t>
+            </a:r>
+          </a:p>
+        </p:txBody>
+      </p:sp>
+      <p:sp>
+        <p:nvSpPr>
+          <p:cNvPr id="14" name="Rounded Rectangle 13"/>
           <p:cNvSpPr/>
           <p:nvPr/>
         </p:nvSpPr>
         <p:spPr>
           <a:xfrm>
-            <a:off x="8503920" y="4297680"/>
-            <a:ext cx="2286000" cy="1371600"/>
+            <a:off x="8677656" y="4937760"/>
+            <a:ext cx="2423160" cy="749808"/>
           </a:xfrm>
           <a:prstGeom prst="roundRect">
             <a:avLst/>
           </a:prstGeom>
           <a:solidFill>
-            <a:srgbClr val="085444"/>
+            <a:srgbClr val="0B3D33"/>
           </a:solidFill>
           <a:ln w="12700">
             <a:solidFill>
-              <a:srgbClr val="D97706"/>
+              <a:srgbClr val="D98210"/>
             </a:solidFill>
           </a:ln>
         </p:spPr>
@@ -3635,14 +3653,14 @@
       </p:sp>
       <p:sp>
         <p:nvSpPr>
-          <p:cNvPr id="14" name="TextBox 13"/>
+          <p:cNvPr id="15" name="TextBox 14"/>
           <p:cNvSpPr txBox="1"/>
           <p:nvPr/>
         </p:nvSpPr>
         <p:spPr>
           <a:xfrm>
-            <a:off x="8595360" y="4389120"/>
-            <a:ext cx="2103120" cy="1188720"/>
+            <a:off x="8750808" y="4992624"/>
+            <a:ext cx="2286000" cy="640080"/>
           </a:xfrm>
           <a:prstGeom prst="rect">
             <a:avLst/>
@@ -3655,29 +3673,62 @@
           </a:bodyPr>
           <a:lstStyle/>
           <a:p>
-            <a:pPr>
-              <a:defRPr sz="1150" b="1">
-                <a:solidFill>
-                  <a:srgbClr val="D97706"/>
-                </a:solidFill>
-                <a:latin typeface="Georgia"/>
-              </a:defRPr>
-            </a:pPr>
-            <a:r>
-              <a:t>🧓 Senior &amp; Pilgrim Ease Mode</a:t>
-            </a:r>
-          </a:p>
-          <a:p>
-            <a:pPr>
+            <a:pPr algn="ctr">
+              <a:defRPr sz="1000" b="1">
+                <a:solidFill>
+                  <a:srgbClr val="D98210"/>
+                </a:solidFill>
+              </a:defRPr>
+            </a:pPr>
+            <a:r>
+              <a:t>🧓 Senior &amp; Pilgrim Ease</a:t>
+            </a:r>
+          </a:p>
+          <a:p>
+            <a:pPr algn="ctr">
+              <a:defRPr sz="850">
+                <a:solidFill>
+                  <a:srgbClr val="FFFFFF"/>
+                </a:solidFill>
+              </a:defRPr>
+            </a:pPr>
+            <a:r>
+              <a:t>Step-free, battery cars &amp; 112 SOS</a:t>
+            </a:r>
+          </a:p>
+        </p:txBody>
+      </p:sp>
+      <p:sp>
+        <p:nvSpPr>
+          <p:cNvPr id="16" name="TextBox 15"/>
+          <p:cNvSpPr txBox="1"/>
+          <p:nvPr/>
+        </p:nvSpPr>
+        <p:spPr>
+          <a:xfrm>
+            <a:off x="1371600" y="5833872"/>
+            <a:ext cx="9448495" cy="320040"/>
+          </a:xfrm>
+          <a:prstGeom prst="rect">
+            <a:avLst/>
+          </a:prstGeom>
+          <a:noFill/>
+        </p:spPr>
+        <p:txBody>
+          <a:bodyPr wrap="none">
+            <a:spAutoFit/>
+          </a:bodyPr>
+          <a:lstStyle/>
+          <a:p>
+            <a:pPr algn="ctr">
               <a:defRPr sz="950">
                 <a:solidFill>
-                  <a:srgbClr val="FFFFFF"/>
-                </a:solidFill>
-                <a:latin typeface="Arial"/>
-              </a:defRPr>
-            </a:pPr>
-            <a:r>
-              <a:t>Step-free routing, battery cars, wheelchairs &amp; ERSS 112 SOS</a:t>
+                  <a:srgbClr val="B4C8C0"/>
+                </a:solidFill>
+              </a:defRPr>
+            </a:pPr>
+            <a:r>
+              <a:t>Production Release • October 2026 • Live Demo: https://jammukhoj.in • 44/44 Verified High-Level Tests Passing</a:t>
             </a:r>
           </a:p>
         </p:txBody>
@@ -3715,7 +3766,7 @@
             <a:avLst/>
           </a:prstGeom>
           <a:solidFill>
-            <a:srgbClr val="085444"/>
+            <a:srgbClr val="0B3D33"/>
           </a:solidFill>
           <a:ln>
             <a:noFill/>
@@ -3751,18 +3802,18 @@
         </p:nvSpPr>
         <p:spPr>
           <a:xfrm>
-            <a:off x="731520" y="731520"/>
-            <a:ext cx="10728655" cy="5394960"/>
+            <a:off x="640080" y="548640"/>
+            <a:ext cx="10911535" cy="5760720"/>
           </a:xfrm>
           <a:prstGeom prst="roundRect">
             <a:avLst/>
           </a:prstGeom>
           <a:solidFill>
-            <a:srgbClr val="123E38"/>
+            <a:srgbClr val="07241E"/>
           </a:solidFill>
           <a:ln w="19050">
             <a:solidFill>
-              <a:srgbClr val="D97706"/>
+              <a:srgbClr val="D98210"/>
             </a:solidFill>
           </a:ln>
         </p:spPr>
@@ -3796,8 +3847,8 @@
         </p:nvSpPr>
         <p:spPr>
           <a:xfrm>
-            <a:off x="1097280" y="1005840"/>
-            <a:ext cx="9144000" cy="365760"/>
+            <a:off x="1097280" y="822960"/>
+            <a:ext cx="9601200" cy="320040"/>
           </a:xfrm>
           <a:prstGeom prst="rect">
             <a:avLst/>
@@ -3811,9 +3862,9 @@
           <a:lstStyle/>
           <a:p>
             <a:pPr>
-              <a:defRPr sz="1100" b="1">
-                <a:solidFill>
-                  <a:srgbClr val="D97706"/>
+              <a:defRPr sz="1050" b="1">
+                <a:solidFill>
+                  <a:srgbClr val="D98210"/>
                 </a:solidFill>
               </a:defRPr>
             </a:pPr>
@@ -3831,8 +3882,8 @@
         </p:nvSpPr>
         <p:spPr>
           <a:xfrm>
-            <a:off x="1097280" y="1371600"/>
-            <a:ext cx="9601200" cy="1097280"/>
+            <a:off x="1097280" y="1143000"/>
+            <a:ext cx="9601200" cy="1051560"/>
           </a:xfrm>
           <a:prstGeom prst="rect">
             <a:avLst/>
@@ -3859,14 +3910,14 @@
           </a:p>
           <a:p>
             <a:pPr>
-              <a:defRPr sz="1600">
-                <a:solidFill>
-                  <a:srgbClr val="D97706"/>
-                </a:solidFill>
-              </a:defRPr>
-            </a:pPr>
-            <a:r>
-              <a:t>Let's turn a hurried 2-hour transit rush into an enriching, safe cultural gateway.</a:t>
+              <a:defRPr sz="1400">
+                <a:solidFill>
+                  <a:srgbClr val="D98210"/>
+                </a:solidFill>
+              </a:defRPr>
+            </a:pPr>
+            <a:r>
+              <a:t>Turn a hurried 2-hour transit rush into an enriching, safe cultural gateway for 10 million yatris.</a:t>
             </a:r>
           </a:p>
         </p:txBody>
@@ -3879,18 +3930,18 @@
         </p:nvSpPr>
         <p:spPr>
           <a:xfrm>
-            <a:off x="1097280" y="2651760"/>
-            <a:ext cx="3154680" cy="2103120"/>
+            <a:off x="1097280" y="2423160"/>
+            <a:ext cx="3154680" cy="2194560"/>
           </a:xfrm>
           <a:prstGeom prst="roundRect">
             <a:avLst/>
           </a:prstGeom>
           <a:solidFill>
-            <a:srgbClr val="085444"/>
+            <a:srgbClr val="0B3D33"/>
           </a:solidFill>
           <a:ln w="12700">
             <a:solidFill>
-              <a:srgbClr val="D97706"/>
+              <a:srgbClr val="D98210"/>
             </a:solidFill>
           </a:ln>
         </p:spPr>
@@ -3924,8 +3975,8 @@
         </p:nvSpPr>
         <p:spPr>
           <a:xfrm>
-            <a:off x="1234440" y="2788920"/>
-            <a:ext cx="2880360" cy="1828800"/>
+            <a:off x="1234440" y="2560320"/>
+            <a:ext cx="2880360" cy="1920240"/>
           </a:xfrm>
           <a:prstGeom prst="rect">
             <a:avLst/>
@@ -3942,9 +3993,9 @@
               <a:spcAft>
                 <a:spcPts val="600"/>
               </a:spcAft>
-              <a:defRPr sz="1400" b="1">
-                <a:solidFill>
-                  <a:srgbClr val="D97706"/>
+              <a:defRPr sz="1300" b="1">
+                <a:solidFill>
+                  <a:srgbClr val="D98210"/>
                 </a:solidFill>
                 <a:latin typeface="Georgia"/>
               </a:defRPr>
@@ -3955,7 +4006,7 @@
           </a:p>
           <a:p>
             <a:pPr>
-              <a:defRPr sz="1050">
+              <a:defRPr sz="980">
                 <a:solidFill>
                   <a:srgbClr val="FFFFFF"/>
                 </a:solidFill>
@@ -3976,18 +4027,18 @@
         </p:nvSpPr>
         <p:spPr>
           <a:xfrm>
-            <a:off x="4434840" y="2651760"/>
-            <a:ext cx="3154680" cy="2103120"/>
+            <a:off x="4434840" y="2423160"/>
+            <a:ext cx="3154680" cy="2194560"/>
           </a:xfrm>
           <a:prstGeom prst="roundRect">
             <a:avLst/>
           </a:prstGeom>
           <a:solidFill>
-            <a:srgbClr val="085444"/>
+            <a:srgbClr val="0B3D33"/>
           </a:solidFill>
           <a:ln w="12700">
             <a:solidFill>
-              <a:srgbClr val="D97706"/>
+              <a:srgbClr val="D98210"/>
             </a:solidFill>
           </a:ln>
         </p:spPr>
@@ -4021,8 +4072,8 @@
         </p:nvSpPr>
         <p:spPr>
           <a:xfrm>
-            <a:off x="4572000" y="2788920"/>
-            <a:ext cx="2880360" cy="1828800"/>
+            <a:off x="4572000" y="2560320"/>
+            <a:ext cx="2880360" cy="1920240"/>
           </a:xfrm>
           <a:prstGeom prst="rect">
             <a:avLst/>
@@ -4039,9 +4090,9 @@
               <a:spcAft>
                 <a:spcPts val="600"/>
               </a:spcAft>
-              <a:defRPr sz="1400" b="1">
-                <a:solidFill>
-                  <a:srgbClr val="D97706"/>
+              <a:defRPr sz="1300" b="1">
+                <a:solidFill>
+                  <a:srgbClr val="D98210"/>
                 </a:solidFill>
                 <a:latin typeface="Georgia"/>
               </a:defRPr>
@@ -4052,7 +4103,7 @@
           </a:p>
           <a:p>
             <a:pPr>
-              <a:defRPr sz="1050">
+              <a:defRPr sz="980">
                 <a:solidFill>
                   <a:srgbClr val="FFFFFF"/>
                 </a:solidFill>
@@ -4073,18 +4124,18 @@
         </p:nvSpPr>
         <p:spPr>
           <a:xfrm>
-            <a:off x="7772400" y="2651760"/>
-            <a:ext cx="3154680" cy="2103120"/>
+            <a:off x="7772400" y="2423160"/>
+            <a:ext cx="3154680" cy="2194560"/>
           </a:xfrm>
           <a:prstGeom prst="roundRect">
             <a:avLst/>
           </a:prstGeom>
           <a:solidFill>
-            <a:srgbClr val="085444"/>
+            <a:srgbClr val="0B3D33"/>
           </a:solidFill>
           <a:ln w="12700">
             <a:solidFill>
-              <a:srgbClr val="D97706"/>
+              <a:srgbClr val="D98210"/>
             </a:solidFill>
           </a:ln>
         </p:spPr>
@@ -4118,8 +4169,8 @@
         </p:nvSpPr>
         <p:spPr>
           <a:xfrm>
-            <a:off x="7909560" y="2788920"/>
-            <a:ext cx="2880360" cy="1828800"/>
+            <a:off x="7909560" y="2560320"/>
+            <a:ext cx="2880360" cy="1920240"/>
           </a:xfrm>
           <a:prstGeom prst="rect">
             <a:avLst/>
@@ -4136,9 +4187,9 @@
               <a:spcAft>
                 <a:spcPts val="600"/>
               </a:spcAft>
-              <a:defRPr sz="1400" b="1">
-                <a:solidFill>
-                  <a:srgbClr val="D97706"/>
+              <a:defRPr sz="1300" b="1">
+                <a:solidFill>
+                  <a:srgbClr val="D98210"/>
                 </a:solidFill>
                 <a:latin typeface="Georgia"/>
               </a:defRPr>
@@ -4149,7 +4200,7 @@
           </a:p>
           <a:p>
             <a:pPr>
-              <a:defRPr sz="1050">
+              <a:defRPr sz="980">
                 <a:solidFill>
                   <a:srgbClr val="FFFFFF"/>
                 </a:solidFill>
@@ -4170,8 +4221,8 @@
         </p:nvSpPr>
         <p:spPr>
           <a:xfrm>
-            <a:off x="1097280" y="4937760"/>
-            <a:ext cx="9601200" cy="914400"/>
+            <a:off x="1097280" y="4800600"/>
+            <a:ext cx="9601200" cy="1005840"/>
           </a:xfrm>
           <a:prstGeom prst="rect">
             <a:avLst/>
@@ -4192,19 +4243,19 @@
               </a:defRPr>
             </a:pPr>
             <a:r>
-              <a:t>Live Web App: https://jammukhoj.in  •  Contact: support@jammukhoj.in</a:t>
+              <a:t>🌐 Live Application: https://jammukhoj.in   •   ✉️ Contact: support@jammukhoj.in</a:t>
             </a:r>
           </a:p>
           <a:p>
             <a:pPr algn="ctr">
-              <a:defRPr sz="1100">
-                <a:solidFill>
-                  <a:srgbClr val="D97706"/>
-                </a:solidFill>
-              </a:defRPr>
-            </a:pPr>
-            <a:r>
-              <a:t>Open Source • 100% Offline Progressive Web App &amp; Android Ready • Thank You!</a:t>
+              <a:defRPr sz="1050">
+                <a:solidFill>
+                  <a:srgbClr val="D98210"/>
+                </a:solidFill>
+              </a:defRPr>
+            </a:pPr>
+            <a:r>
+              <a:t>Open Source • 100% Offline Progressive Web App &amp; Android Ready • Built with Pride for Jammu</a:t>
             </a:r>
           </a:p>
         </p:txBody>
@@ -4242,7 +4293,7 @@
             <a:avLst/>
           </a:prstGeom>
           <a:solidFill>
-            <a:srgbClr val="FBF9F5"/>
+            <a:srgbClr val="FAF7F2"/>
           </a:solidFill>
           <a:ln>
             <a:noFill/>
@@ -4278,8 +4329,8 @@
         </p:nvSpPr>
         <p:spPr>
           <a:xfrm>
-            <a:off x="731520" y="411480"/>
-            <a:ext cx="9144000" cy="365760"/>
+            <a:off x="731520" y="384048"/>
+            <a:ext cx="9144000" cy="320040"/>
           </a:xfrm>
           <a:prstGeom prst="rect">
             <a:avLst/>
@@ -4293,15 +4344,15 @@
           <a:lstStyle/>
           <a:p>
             <a:pPr>
-              <a:defRPr sz="1100" b="1">
-                <a:solidFill>
-                  <a:srgbClr val="9E4A0C"/>
+              <a:defRPr sz="1050" b="1">
+                <a:solidFill>
+                  <a:srgbClr val="A84D0E"/>
                 </a:solidFill>
                 <a:latin typeface="Arial"/>
               </a:defRPr>
             </a:pPr>
             <a:r>
-              <a:t>02 | PROBLEM STATEMENT</a:t>
+              <a:t>02 • PROBLEM STATEMENT</a:t>
             </a:r>
           </a:p>
         </p:txBody>
@@ -4314,8 +4365,8 @@
         </p:nvSpPr>
         <p:spPr>
           <a:xfrm>
-            <a:off x="731520" y="731520"/>
-            <a:ext cx="10515600" cy="594360"/>
+            <a:off x="731520" y="676656"/>
+            <a:ext cx="10698480" cy="594360"/>
           </a:xfrm>
           <a:prstGeom prst="rect">
             <a:avLst/>
@@ -4329,9 +4380,9 @@
           <a:lstStyle/>
           <a:p>
             <a:pPr>
-              <a:defRPr sz="2400" b="1">
-                <a:solidFill>
-                  <a:srgbClr val="085444"/>
+              <a:defRPr sz="2300" b="1">
+                <a:solidFill>
+                  <a:srgbClr val="0B3D33"/>
                 </a:solidFill>
                 <a:latin typeface="Georgia"/>
               </a:defRPr>
@@ -4350,8 +4401,8 @@
         </p:nvSpPr>
         <p:spPr>
           <a:xfrm>
-            <a:off x="731520" y="1298448"/>
-            <a:ext cx="10515600" cy="365760"/>
+            <a:off x="731520" y="1243584"/>
+            <a:ext cx="10698480" cy="365760"/>
           </a:xfrm>
           <a:prstGeom prst="rect">
             <a:avLst/>
@@ -4365,9 +4416,9 @@
           <a:lstStyle/>
           <a:p>
             <a:pPr>
-              <a:defRPr sz="1300">
-                <a:solidFill>
-                  <a:srgbClr val="64746C"/>
+              <a:defRPr sz="1150">
+                <a:solidFill>
+                  <a:srgbClr val="5F6E67"/>
                 </a:solidFill>
                 <a:latin typeface="Arial"/>
               </a:defRPr>
@@ -4386,8 +4437,100 @@
         </p:nvSpPr>
         <p:spPr>
           <a:xfrm>
-            <a:off x="731520" y="1737360"/>
-            <a:ext cx="3429000" cy="4297680"/>
+            <a:off x="731520" y="1691640"/>
+            <a:ext cx="10728655" cy="685800"/>
+          </a:xfrm>
+          <a:prstGeom prst="roundRect">
+            <a:avLst/>
+          </a:prstGeom>
+          <a:solidFill>
+            <a:srgbClr val="F3EEE6"/>
+          </a:solidFill>
+          <a:ln w="12700">
+            <a:solidFill>
+              <a:srgbClr val="D98210"/>
+            </a:solidFill>
+          </a:ln>
+        </p:spPr>
+        <p:style>
+          <a:lnRef idx="1">
+            <a:schemeClr val="accent1"/>
+          </a:lnRef>
+          <a:fillRef idx="3">
+            <a:schemeClr val="accent1"/>
+          </a:fillRef>
+          <a:effectRef idx="2">
+            <a:schemeClr val="accent1"/>
+          </a:effectRef>
+          <a:fontRef idx="minor">
+            <a:schemeClr val="lt1"/>
+          </a:fontRef>
+        </p:style>
+        <p:txBody>
+          <a:bodyPr rtlCol="0" anchor="ctr"/>
+          <a:lstStyle/>
+          <a:p>
+            <a:pPr algn="ctr"/>
+          </a:p>
+        </p:txBody>
+      </p:sp>
+      <p:sp>
+        <p:nvSpPr>
+          <p:cNvPr id="7" name="TextBox 6"/>
+          <p:cNvSpPr txBox="1"/>
+          <p:nvPr/>
+        </p:nvSpPr>
+        <p:spPr>
+          <a:xfrm>
+            <a:off x="868680" y="1737360"/>
+            <a:ext cx="10424160" cy="594360"/>
+          </a:xfrm>
+          <a:prstGeom prst="rect">
+            <a:avLst/>
+          </a:prstGeom>
+          <a:noFill/>
+        </p:spPr>
+        <p:txBody>
+          <a:bodyPr wrap="square">
+            <a:spAutoFit/>
+          </a:bodyPr>
+          <a:lstStyle/>
+          <a:p>
+            <a:pPr>
+              <a:defRPr sz="1100" b="1">
+                <a:solidFill>
+                  <a:srgbClr val="0B3D33"/>
+                </a:solidFill>
+              </a:defRPr>
+            </a:pPr>
+            <a:r>
+              <a:t>THE CORE DILEMMA: Jammu is treated as a high-friction railway transfer point rather than a cultural destination.</a:t>
+            </a:r>
+          </a:p>
+          <a:p>
+            <a:pPr>
+              <a:defRPr sz="950">
+                <a:solidFill>
+                  <a:srgbClr val="5F6E67"/>
+                </a:solidFill>
+              </a:defRPr>
+            </a:pPr>
+            <a:r>
+              <a:t>Over 10 Million yatris enter annually, yet fear of missing departures keeps them trapped on waiting platforms without guidance.</a:t>
+            </a:r>
+          </a:p>
+        </p:txBody>
+      </p:sp>
+      <p:sp>
+        <p:nvSpPr>
+          <p:cNvPr id="8" name="Rounded Rectangle 7"/>
+          <p:cNvSpPr/>
+          <p:nvPr/>
+        </p:nvSpPr>
+        <p:spPr>
+          <a:xfrm>
+            <a:off x="731520" y="2514600"/>
+            <a:ext cx="3504895" cy="3703320"/>
           </a:xfrm>
           <a:prstGeom prst="roundRect">
             <a:avLst/>
@@ -4397,7 +4540,7 @@
           </a:solidFill>
           <a:ln w="12700">
             <a:solidFill>
-              <a:srgbClr val="EBE4DC"/>
+              <a:srgbClr val="E4DCD2"/>
             </a:solidFill>
           </a:ln>
         </p:spPr>
@@ -4425,14 +4568,14 @@
       </p:sp>
       <p:sp>
         <p:nvSpPr>
-          <p:cNvPr id="7" name="TextBox 6"/>
+          <p:cNvPr id="9" name="TextBox 8"/>
           <p:cNvSpPr txBox="1"/>
           <p:nvPr/>
         </p:nvSpPr>
         <p:spPr>
           <a:xfrm>
-            <a:off x="914400" y="1874519"/>
-            <a:ext cx="3063240" cy="4023360"/>
+            <a:off x="896112" y="2651760"/>
+            <a:ext cx="3172968" cy="3429000"/>
           </a:xfrm>
           <a:prstGeom prst="rect">
             <a:avLst/>
@@ -4446,31 +4589,15 @@
           <a:lstStyle/>
           <a:p>
             <a:pPr>
-              <a:defRPr sz="1500" b="1">
-                <a:solidFill>
-                  <a:srgbClr val="9E4A0C"/>
+              <a:defRPr sz="1350" b="1">
+                <a:solidFill>
+                  <a:srgbClr val="A84D0E"/>
                 </a:solidFill>
                 <a:latin typeface="Georgia"/>
               </a:defRPr>
             </a:pPr>
             <a:r>
-              <a:t>🚨 Transit Anxiety &amp; Time Fear</a:t>
-            </a:r>
-          </a:p>
-          <a:p>
-            <a:pPr>
-              <a:spcAft>
-                <a:spcPts val="1200"/>
-              </a:spcAft>
-              <a:defRPr sz="1100" b="1">
-                <a:solidFill>
-                  <a:srgbClr val="1C2923"/>
-                </a:solidFill>
-                <a:latin typeface="Arial"/>
-              </a:defRPr>
-            </a:pPr>
-            <a:r>
-              <a:t>Fear of Missing Onward Trains / Flights</a:t>
+              <a:t>🚨 01. The Transit Panic</a:t>
             </a:r>
           </a:p>
           <a:p>
@@ -4478,61 +4605,88 @@
               <a:spcAft>
                 <a:spcPts val="800"/>
               </a:spcAft>
-              <a:defRPr sz="1100">
-                <a:solidFill>
-                  <a:srgbClr val="64746C"/>
-                </a:solidFill>
-                <a:latin typeface="Arial"/>
-              </a:defRPr>
-            </a:pPr>
-            <a:r>
-              <a:t>•  Pilgrims face 4 to 12 hour layovers at Jammu Tawi or Airport.</a:t>
+              <a:defRPr sz="1050" b="1">
+                <a:solidFill>
+                  <a:srgbClr val="18221E"/>
+                </a:solidFill>
+              </a:defRPr>
+            </a:pPr>
+            <a:r>
+              <a:t>Fear of Missing Onward Trains / Flights</a:t>
             </a:r>
           </a:p>
           <a:p>
             <a:pPr>
               <a:spcAft>
-                <a:spcPts val="800"/>
+                <a:spcPts val="500"/>
               </a:spcAft>
-              <a:defRPr sz="1100">
-                <a:solidFill>
-                  <a:srgbClr val="64746C"/>
-                </a:solidFill>
-                <a:latin typeface="Arial"/>
-              </a:defRPr>
-            </a:pPr>
-            <a:r>
-              <a:t>•  Fear of getting stuck in traffic traps pilgrims at station platforms.</a:t>
+              <a:defRPr sz="950">
+                <a:solidFill>
+                  <a:srgbClr val="5F6E67"/>
+                </a:solidFill>
+              </a:defRPr>
+            </a:pPr>
+            <a:r>
+              <a:t>•  Pilgrims face 4 to 12 hour layovers at Jammu Tawi or IXJ Airport.</a:t>
             </a:r>
           </a:p>
           <a:p>
             <a:pPr>
               <a:spcAft>
-                <a:spcPts val="800"/>
+                <a:spcPts val="500"/>
               </a:spcAft>
-              <a:defRPr sz="1100">
-                <a:solidFill>
-                  <a:srgbClr val="64746C"/>
-                </a:solidFill>
-                <a:latin typeface="Arial"/>
-              </a:defRPr>
-            </a:pPr>
-            <a:r>
-              <a:t>•  No existing map tool calculates conservative safety return buffers.</a:t>
-            </a:r>
-          </a:p>
-        </p:txBody>
-      </p:sp>
-      <p:sp>
-        <p:nvSpPr>
-          <p:cNvPr id="8" name="Rounded Rectangle 7"/>
+              <a:defRPr sz="950">
+                <a:solidFill>
+                  <a:srgbClr val="5F6E67"/>
+                </a:solidFill>
+              </a:defRPr>
+            </a:pPr>
+            <a:r>
+              <a:t>•  Fear of mountain highway bottlenecks traps families on railway platforms.</a:t>
+            </a:r>
+          </a:p>
+          <a:p>
+            <a:pPr>
+              <a:spcAft>
+                <a:spcPts val="500"/>
+              </a:spcAft>
+              <a:defRPr sz="950">
+                <a:solidFill>
+                  <a:srgbClr val="5F6E67"/>
+                </a:solidFill>
+              </a:defRPr>
+            </a:pPr>
+            <a:r>
+              <a:t>•  Zero existing tools compute guaranteed conservative safety return buffers.</a:t>
+            </a:r>
+          </a:p>
+          <a:p>
+            <a:pPr>
+              <a:spcAft>
+                <a:spcPts val="500"/>
+              </a:spcAft>
+              <a:defRPr sz="950">
+                <a:solidFill>
+                  <a:srgbClr val="5F6E67"/>
+                </a:solidFill>
+              </a:defRPr>
+            </a:pPr>
+            <a:r>
+              <a:t>•  Result: Over 85% of visitors never step outside the station compound.</a:t>
+            </a:r>
+          </a:p>
+        </p:txBody>
+      </p:sp>
+      <p:sp>
+        <p:nvSpPr>
+          <p:cNvPr id="10" name="Rounded Rectangle 9"/>
           <p:cNvSpPr/>
           <p:nvPr/>
         </p:nvSpPr>
         <p:spPr>
           <a:xfrm>
-            <a:off x="4343400" y="1737360"/>
-            <a:ext cx="3429000" cy="4297680"/>
+            <a:off x="4343400" y="2514600"/>
+            <a:ext cx="3504895" cy="3703320"/>
           </a:xfrm>
           <a:prstGeom prst="roundRect">
             <a:avLst/>
@@ -4542,7 +4696,7 @@
           </a:solidFill>
           <a:ln w="12700">
             <a:solidFill>
-              <a:srgbClr val="EBE4DC"/>
+              <a:srgbClr val="E4DCD2"/>
             </a:solidFill>
           </a:ln>
         </p:spPr>
@@ -4570,14 +4724,14 @@
       </p:sp>
       <p:sp>
         <p:nvSpPr>
-          <p:cNvPr id="9" name="TextBox 8"/>
+          <p:cNvPr id="11" name="TextBox 10"/>
           <p:cNvSpPr txBox="1"/>
           <p:nvPr/>
         </p:nvSpPr>
         <p:spPr>
           <a:xfrm>
-            <a:off x="4526280" y="1874519"/>
-            <a:ext cx="3063240" cy="4023360"/>
+            <a:off x="4507992" y="2651760"/>
+            <a:ext cx="3172968" cy="3429000"/>
           </a:xfrm>
           <a:prstGeom prst="rect">
             <a:avLst/>
@@ -4591,31 +4745,15 @@
           <a:lstStyle/>
           <a:p>
             <a:pPr>
-              <a:defRPr sz="1500" b="1">
-                <a:solidFill>
-                  <a:srgbClr val="9E4A0C"/>
+              <a:defRPr sz="1350" b="1">
+                <a:solidFill>
+                  <a:srgbClr val="A84D0E"/>
                 </a:solidFill>
                 <a:latin typeface="Georgia"/>
               </a:defRPr>
             </a:pPr>
             <a:r>
-              <a:t>💸 Transport Gouging &amp; Haggling</a:t>
-            </a:r>
-          </a:p>
-          <a:p>
-            <a:pPr>
-              <a:spcAft>
-                <a:spcPts val="1200"/>
-              </a:spcAft>
-              <a:defRPr sz="1100" b="1">
-                <a:solidFill>
-                  <a:srgbClr val="1C2923"/>
-                </a:solidFill>
-                <a:latin typeface="Arial"/>
-              </a:defRPr>
-            </a:pPr>
-            <a:r>
-              <a:t>Unregulated Fares &amp; Commuter Harassment</a:t>
+              <a:t>💸 02. The ₹1,200 Haggling Tax</a:t>
             </a:r>
           </a:p>
           <a:p>
@@ -4623,61 +4761,88 @@
               <a:spcAft>
                 <a:spcPts val="800"/>
               </a:spcAft>
-              <a:defRPr sz="1100">
-                <a:solidFill>
-                  <a:srgbClr val="64746C"/>
-                </a:solidFill>
-                <a:latin typeface="Arial"/>
-              </a:defRPr>
-            </a:pPr>
-            <a:r>
-              <a:t>•  Unsuspecting travelers charged ₹800–₹1,500 for a ₹150 taxi ride.</a:t>
+              <a:defRPr sz="1050" b="1">
+                <a:solidFill>
+                  <a:srgbClr val="18221E"/>
+                </a:solidFill>
+              </a:defRPr>
+            </a:pPr>
+            <a:r>
+              <a:t>Unregulated Fares &amp; Commuter Harassment</a:t>
             </a:r>
           </a:p>
           <a:p>
             <a:pPr>
               <a:spcAft>
-                <a:spcPts val="800"/>
+                <a:spcPts val="500"/>
               </a:spcAft>
-              <a:defRPr sz="1100">
-                <a:solidFill>
-                  <a:srgbClr val="64746C"/>
-                </a:solidFill>
-                <a:latin typeface="Arial"/>
-              </a:defRPr>
-            </a:pPr>
-            <a:r>
-              <a:t>•  Matador mini-bus routes and stage tariffs are opaque to outsiders.</a:t>
+              <a:defRPr sz="950">
+                <a:solidFill>
+                  <a:srgbClr val="5F6E67"/>
+                </a:solidFill>
+              </a:defRPr>
+            </a:pPr>
+            <a:r>
+              <a:t>•  Unsuspecting yatris routinely charged ₹800–₹1,500 for a ₹150 taxi ride.</a:t>
             </a:r>
           </a:p>
           <a:p>
             <a:pPr>
               <a:spcAft>
-                <a:spcPts val="800"/>
+                <a:spcPts val="500"/>
               </a:spcAft>
-              <a:defRPr sz="1100">
-                <a:solidFill>
-                  <a:srgbClr val="64746C"/>
-                </a:solidFill>
-                <a:latin typeface="Arial"/>
-              </a:defRPr>
-            </a:pPr>
-            <a:r>
-              <a:t>•  Zero transparency on official prepaid union rates.</a:t>
-            </a:r>
-          </a:p>
-        </p:txBody>
-      </p:sp>
-      <p:sp>
-        <p:nvSpPr>
-          <p:cNvPr id="10" name="Rounded Rectangle 9"/>
+              <a:defRPr sz="950">
+                <a:solidFill>
+                  <a:srgbClr val="5F6E67"/>
+                </a:solidFill>
+              </a:defRPr>
+            </a:pPr>
+            <a:r>
+              <a:t>•  Matador mini-bus stages and route numbers are completely opaque to outsiders.</a:t>
+            </a:r>
+          </a:p>
+          <a:p>
+            <a:pPr>
+              <a:spcAft>
+                <a:spcPts val="500"/>
+              </a:spcAft>
+              <a:defRPr sz="950">
+                <a:solidFill>
+                  <a:srgbClr val="5F6E67"/>
+                </a:solidFill>
+              </a:defRPr>
+            </a:pPr>
+            <a:r>
+              <a:t>•  Zero visibility into official prepaid auto/taxi union rate cards.</a:t>
+            </a:r>
+          </a:p>
+          <a:p>
+            <a:pPr>
+              <a:spcAft>
+                <a:spcPts val="500"/>
+              </a:spcAft>
+              <a:defRPr sz="950">
+                <a:solidFill>
+                  <a:srgbClr val="5F6E67"/>
+                </a:solidFill>
+              </a:defRPr>
+            </a:pPr>
+            <a:r>
+              <a:t>•  Result: Tourists feel exploited within their first hour in Jammu.</a:t>
+            </a:r>
+          </a:p>
+        </p:txBody>
+      </p:sp>
+      <p:sp>
+        <p:nvSpPr>
+          <p:cNvPr id="12" name="Rounded Rectangle 11"/>
           <p:cNvSpPr/>
           <p:nvPr/>
         </p:nvSpPr>
         <p:spPr>
           <a:xfrm>
-            <a:off x="7955280" y="1737360"/>
-            <a:ext cx="3429000" cy="4297680"/>
+            <a:off x="7955280" y="2514600"/>
+            <a:ext cx="3504895" cy="3703320"/>
           </a:xfrm>
           <a:prstGeom prst="roundRect">
             <a:avLst/>
@@ -4687,7 +4852,7 @@
           </a:solidFill>
           <a:ln w="12700">
             <a:solidFill>
-              <a:srgbClr val="EBE4DC"/>
+              <a:srgbClr val="E4DCD2"/>
             </a:solidFill>
           </a:ln>
         </p:spPr>
@@ -4715,14 +4880,14 @@
       </p:sp>
       <p:sp>
         <p:nvSpPr>
-          <p:cNvPr id="11" name="TextBox 10"/>
+          <p:cNvPr id="13" name="TextBox 12"/>
           <p:cNvSpPr txBox="1"/>
           <p:nvPr/>
         </p:nvSpPr>
         <p:spPr>
           <a:xfrm>
-            <a:off x="8138160" y="1874519"/>
-            <a:ext cx="3063240" cy="4023360"/>
+            <a:off x="8119872" y="2651760"/>
+            <a:ext cx="3172968" cy="3429000"/>
           </a:xfrm>
           <a:prstGeom prst="rect">
             <a:avLst/>
@@ -4736,31 +4901,15 @@
           <a:lstStyle/>
           <a:p>
             <a:pPr>
-              <a:defRPr sz="1500" b="1">
-                <a:solidFill>
-                  <a:srgbClr val="9E4A0C"/>
+              <a:defRPr sz="1350" b="1">
+                <a:solidFill>
+                  <a:srgbClr val="A84D0E"/>
                 </a:solidFill>
                 <a:latin typeface="Georgia"/>
               </a:defRPr>
             </a:pPr>
             <a:r>
-              <a:t>📴 Cellular Blackouts &amp; Accessibility</a:t>
-            </a:r>
-          </a:p>
-          <a:p>
-            <a:pPr>
-              <a:spcAft>
-                <a:spcPts val="1200"/>
-              </a:spcAft>
-              <a:defRPr sz="1100" b="1">
-                <a:solidFill>
-                  <a:srgbClr val="1C2923"/>
-                </a:solidFill>
-                <a:latin typeface="Arial"/>
-              </a:defRPr>
-            </a:pPr>
-            <a:r>
-              <a:t>Mountain Dead Zones &amp; Elder Strain</a:t>
+              <a:t>📴 03. The Mountain Blackout</a:t>
             </a:r>
           </a:p>
           <a:p>
@@ -4768,54 +4917,81 @@
               <a:spcAft>
                 <a:spcPts val="800"/>
               </a:spcAft>
-              <a:defRPr sz="1100">
-                <a:solidFill>
-                  <a:srgbClr val="64746C"/>
-                </a:solidFill>
-                <a:latin typeface="Arial"/>
-              </a:defRPr>
-            </a:pPr>
-            <a:r>
-              <a:t>•  Cloud-based apps crash in mountain valleys and tunnel corridors.</a:t>
+              <a:defRPr sz="1050" b="1">
+                <a:solidFill>
+                  <a:srgbClr val="18221E"/>
+                </a:solidFill>
+              </a:defRPr>
+            </a:pPr>
+            <a:r>
+              <a:t>Cellular Dead Zones &amp; Elder Strain</a:t>
             </a:r>
           </a:p>
           <a:p>
             <a:pPr>
               <a:spcAft>
-                <a:spcPts val="800"/>
+                <a:spcPts val="500"/>
               </a:spcAft>
-              <a:defRPr sz="1100">
-                <a:solidFill>
-                  <a:srgbClr val="64746C"/>
-                </a:solidFill>
-                <a:latin typeface="Arial"/>
-              </a:defRPr>
-            </a:pPr>
-            <a:r>
-              <a:t>•  Elderly pilgrims lack verified walking load, stair counts, and battery car tips.</a:t>
+              <a:defRPr sz="950">
+                <a:solidFill>
+                  <a:srgbClr val="5F6E67"/>
+                </a:solidFill>
+              </a:defRPr>
+            </a:pPr>
+            <a:r>
+              <a:t>•  Cloud-based travel apps crash in Shivalik foothill tunnels and dead zones.</a:t>
             </a:r>
           </a:p>
           <a:p>
             <a:pPr>
               <a:spcAft>
-                <a:spcPts val="800"/>
+                <a:spcPts val="500"/>
               </a:spcAft>
-              <a:defRPr sz="1100">
-                <a:solidFill>
-                  <a:srgbClr val="64746C"/>
-                </a:solidFill>
-                <a:latin typeface="Arial"/>
-              </a:defRPr>
-            </a:pPr>
-            <a:r>
-              <a:t>•  Safety hotlines and ERSS 112 are hard to locate during distress.</a:t>
-            </a:r>
-          </a:p>
-        </p:txBody>
-      </p:sp>
-      <p:sp>
-        <p:nvSpPr>
-          <p:cNvPr id="12" name="TextBox 11"/>
+              <a:defRPr sz="950">
+                <a:solidFill>
+                  <a:srgbClr val="5F6E67"/>
+                </a:solidFill>
+              </a:defRPr>
+            </a:pPr>
+            <a:r>
+              <a:t>•  Senior citizens face unexpected steep stairs without wheelchair/battery-car guidance.</a:t>
+            </a:r>
+          </a:p>
+          <a:p>
+            <a:pPr>
+              <a:spcAft>
+                <a:spcPts val="500"/>
+              </a:spcAft>
+              <a:defRPr sz="950">
+                <a:solidFill>
+                  <a:srgbClr val="5F6E67"/>
+                </a:solidFill>
+              </a:defRPr>
+            </a:pPr>
+            <a:r>
+              <a:t>•  Emergency hotlines and National ERSS 112 are scattered across fragmented websites.</a:t>
+            </a:r>
+          </a:p>
+          <a:p>
+            <a:pPr>
+              <a:spcAft>
+                <a:spcPts val="500"/>
+              </a:spcAft>
+              <a:defRPr sz="950">
+                <a:solidFill>
+                  <a:srgbClr val="5F6E67"/>
+                </a:solidFill>
+              </a:defRPr>
+            </a:pPr>
+            <a:r>
+              <a:t>•  Result: Families with elders experience high physical and mental stress.</a:t>
+            </a:r>
+          </a:p>
+        </p:txBody>
+      </p:sp>
+      <p:sp>
+        <p:nvSpPr>
+          <p:cNvPr id="14" name="TextBox 13"/>
           <p:cNvSpPr txBox="1"/>
           <p:nvPr/>
         </p:nvSpPr>
@@ -4836,15 +5012,15 @@
           <a:lstStyle/>
           <a:p>
             <a:pPr>
-              <a:defRPr sz="950">
-                <a:solidFill>
-                  <a:srgbClr val="64746C"/>
+              <a:defRPr sz="900">
+                <a:solidFill>
+                  <a:srgbClr val="5F6E67"/>
                 </a:solidFill>
                 <a:latin typeface="Arial"/>
               </a:defRPr>
             </a:pPr>
             <a:r>
-              <a:t>JammuKhoj • Smart Tourism &amp; Pilgrim Companion • https://jammukhoj.in</a:t>
+              <a:t>JammuKhoj • Smart Tourism &amp; Pilgrim Companion • Live App: https://jammukhoj.in</a:t>
             </a:r>
           </a:p>
         </p:txBody>
@@ -4882,7 +5058,7 @@
             <a:avLst/>
           </a:prstGeom>
           <a:solidFill>
-            <a:srgbClr val="FBF9F5"/>
+            <a:srgbClr val="FAF7F2"/>
           </a:solidFill>
           <a:ln>
             <a:noFill/>
@@ -4918,8 +5094,8 @@
         </p:nvSpPr>
         <p:spPr>
           <a:xfrm>
-            <a:off x="731520" y="411480"/>
-            <a:ext cx="9144000" cy="365760"/>
+            <a:off x="731520" y="384048"/>
+            <a:ext cx="9144000" cy="320040"/>
           </a:xfrm>
           <a:prstGeom prst="rect">
             <a:avLst/>
@@ -4933,15 +5109,15 @@
           <a:lstStyle/>
           <a:p>
             <a:pPr>
-              <a:defRPr sz="1100" b="1">
-                <a:solidFill>
-                  <a:srgbClr val="9E4A0C"/>
+              <a:defRPr sz="1050" b="1">
+                <a:solidFill>
+                  <a:srgbClr val="A84D0E"/>
                 </a:solidFill>
                 <a:latin typeface="Arial"/>
               </a:defRPr>
             </a:pPr>
             <a:r>
-              <a:t>03 | ECONOMIC &amp; CULTURAL GAP</a:t>
+              <a:t>03 • ECONOMIC &amp; CULTURAL GAP</a:t>
             </a:r>
           </a:p>
         </p:txBody>
@@ -4954,8 +5130,8 @@
         </p:nvSpPr>
         <p:spPr>
           <a:xfrm>
-            <a:off x="731520" y="731520"/>
-            <a:ext cx="10515600" cy="594360"/>
+            <a:off x="731520" y="676656"/>
+            <a:ext cx="10698480" cy="594360"/>
           </a:xfrm>
           <a:prstGeom prst="rect">
             <a:avLst/>
@@ -4969,9 +5145,9 @@
           <a:lstStyle/>
           <a:p>
             <a:pPr>
-              <a:defRPr sz="2400" b="1">
-                <a:solidFill>
-                  <a:srgbClr val="085444"/>
+              <a:defRPr sz="2300" b="1">
+                <a:solidFill>
+                  <a:srgbClr val="0B3D33"/>
                 </a:solidFill>
                 <a:latin typeface="Georgia"/>
               </a:defRPr>
@@ -4990,8 +5166,8 @@
         </p:nvSpPr>
         <p:spPr>
           <a:xfrm>
-            <a:off x="731520" y="1298448"/>
-            <a:ext cx="10515600" cy="365760"/>
+            <a:off x="731520" y="1243584"/>
+            <a:ext cx="10698480" cy="365760"/>
           </a:xfrm>
           <a:prstGeom prst="rect">
             <a:avLst/>
@@ -5005,9 +5181,9 @@
           <a:lstStyle/>
           <a:p>
             <a:pPr>
-              <a:defRPr sz="1300">
-                <a:solidFill>
-                  <a:srgbClr val="64746C"/>
+              <a:defRPr sz="1150">
+                <a:solidFill>
+                  <a:srgbClr val="5F6E67"/>
                 </a:solidFill>
                 <a:latin typeface="Arial"/>
               </a:defRPr>
@@ -5026,18 +5202,18 @@
         </p:nvSpPr>
         <p:spPr>
           <a:xfrm>
-            <a:off x="731520" y="1737360"/>
-            <a:ext cx="4114800" cy="4297680"/>
+            <a:off x="731520" y="1691640"/>
+            <a:ext cx="4114800" cy="4480560"/>
           </a:xfrm>
           <a:prstGeom prst="roundRect">
             <a:avLst/>
           </a:prstGeom>
           <a:solidFill>
-            <a:srgbClr val="085444"/>
+            <a:srgbClr val="0B3D33"/>
           </a:solidFill>
           <a:ln w="12700">
             <a:solidFill>
-              <a:srgbClr val="EBE4DC"/>
+              <a:srgbClr val="E4DCD2"/>
             </a:solidFill>
           </a:ln>
         </p:spPr>
@@ -5071,8 +5247,8 @@
         </p:nvSpPr>
         <p:spPr>
           <a:xfrm>
-            <a:off x="914400" y="1920240"/>
-            <a:ext cx="3749039" cy="3931920"/>
+            <a:off x="914400" y="1874519"/>
+            <a:ext cx="3749039" cy="4114800"/>
           </a:xfrm>
           <a:prstGeom prst="rect">
             <a:avLst/>
@@ -5088,7 +5264,7 @@
             <a:pPr>
               <a:defRPr sz="4000" b="1">
                 <a:solidFill>
-                  <a:srgbClr val="D97706"/>
+                  <a:srgbClr val="D98210"/>
                 </a:solidFill>
                 <a:latin typeface="Georgia"/>
               </a:defRPr>
@@ -5100,9 +5276,9 @@
           <a:p>
             <a:pPr>
               <a:spcAft>
-                <a:spcPts val="2000"/>
+                <a:spcPts val="1800"/>
               </a:spcAft>
-              <a:defRPr sz="1300">
+              <a:defRPr sz="1200">
                 <a:solidFill>
                   <a:srgbClr val="FFFFFF"/>
                 </a:solidFill>
@@ -5114,27 +5290,55 @@
           </a:p>
           <a:p>
             <a:pPr>
-              <a:defRPr sz="1800" b="1">
-                <a:solidFill>
-                  <a:srgbClr val="D97706"/>
+              <a:defRPr sz="3200" b="1">
+                <a:solidFill>
+                  <a:srgbClr val="D98210"/>
                 </a:solidFill>
                 <a:latin typeface="Georgia"/>
               </a:defRPr>
             </a:pPr>
             <a:r>
-              <a:t>&lt; 2 Hours Average Dwell Time</a:t>
-            </a:r>
-          </a:p>
-          <a:p>
-            <a:pPr>
-              <a:defRPr sz="1250">
+              <a:t>&lt; 2 Hours</a:t>
+            </a:r>
+          </a:p>
+          <a:p>
+            <a:pPr>
+              <a:spcAft>
+                <a:spcPts val="1600"/>
+              </a:spcAft>
+              <a:defRPr sz="1150">
                 <a:solidFill>
                   <a:srgbClr val="FFFFFF"/>
                 </a:solidFill>
               </a:defRPr>
             </a:pPr>
             <a:r>
-              <a:t>Over 85% of yatris treat Jammu as a mere train-to-bus transit hallway, unaware of rich Dogra heritage minutes away.</a:t>
+              <a:t>Average transit dwell in Jammu City. Over 85% of yatris treat Jammu as a mere train-to-bus transit hallway.</a:t>
+            </a:r>
+          </a:p>
+          <a:p>
+            <a:pPr>
+              <a:defRPr sz="2800" b="1">
+                <a:solidFill>
+                  <a:srgbClr val="D98210"/>
+                </a:solidFill>
+                <a:latin typeface="Georgia"/>
+              </a:defRPr>
+            </a:pPr>
+            <a:r>
+              <a:t>₹300+ Crores</a:t>
+            </a:r>
+          </a:p>
+          <a:p>
+            <a:pPr>
+              <a:defRPr sz="1100">
+                <a:solidFill>
+                  <a:srgbClr val="FFFFFF"/>
+                </a:solidFill>
+              </a:defRPr>
+            </a:pPr>
+            <a:r>
+              <a:t>Estimated annual municipal revenue lost in local hospitality, authentic craft, and cultural transit.</a:t>
             </a:r>
           </a:p>
         </p:txBody>
@@ -5147,8 +5351,8 @@
         </p:nvSpPr>
         <p:spPr>
           <a:xfrm>
-            <a:off x="5120640" y="1737360"/>
-            <a:ext cx="6309360" cy="4297680"/>
+            <a:off x="5120640" y="1691640"/>
+            <a:ext cx="6339535" cy="4480560"/>
           </a:xfrm>
           <a:prstGeom prst="roundRect">
             <a:avLst/>
@@ -5158,7 +5362,7 @@
           </a:solidFill>
           <a:ln w="12700">
             <a:solidFill>
-              <a:srgbClr val="EBE4DC"/>
+              <a:srgbClr val="E4DCD2"/>
             </a:solidFill>
           </a:ln>
         </p:spPr>
@@ -5192,8 +5396,8 @@
         </p:nvSpPr>
         <p:spPr>
           <a:xfrm>
-            <a:off x="5303520" y="1920240"/>
-            <a:ext cx="5943600" cy="3931920"/>
+            <a:off x="5303520" y="1874519"/>
+            <a:ext cx="5943600" cy="4114800"/>
           </a:xfrm>
           <a:prstGeom prst="rect">
             <a:avLst/>
@@ -5208,24 +5412,24 @@
           <a:p>
             <a:pPr>
               <a:spcAft>
-                <a:spcPts val="1400"/>
+                <a:spcPts val="1000"/>
               </a:spcAft>
-              <a:defRPr sz="1800" b="1">
-                <a:solidFill>
-                  <a:srgbClr val="085444"/>
+              <a:defRPr sz="1700" b="1">
+                <a:solidFill>
+                  <a:srgbClr val="0B3D33"/>
                 </a:solidFill>
                 <a:latin typeface="Georgia"/>
               </a:defRPr>
             </a:pPr>
             <a:r>
-              <a:t>Three Costly Gaps in Jammu Tourism</a:t>
-            </a:r>
-          </a:p>
-          <a:p>
-            <a:pPr>
-              <a:defRPr sz="1250" b="1">
-                <a:solidFill>
-                  <a:srgbClr val="9E4A0C"/>
+              <a:t>Where the Visitor Value Is Lost</a:t>
+            </a:r>
+          </a:p>
+          <a:p>
+            <a:pPr>
+              <a:defRPr sz="1150" b="1">
+                <a:solidFill>
+                  <a:srgbClr val="A84D0E"/>
                 </a:solidFill>
               </a:defRPr>
             </a:pPr>
@@ -5236,23 +5440,23 @@
           <a:p>
             <a:pPr>
               <a:spcAft>
-                <a:spcPts val="800"/>
+                <a:spcPts val="600"/>
               </a:spcAft>
-              <a:defRPr sz="1100">
-                <a:solidFill>
-                  <a:srgbClr val="64746C"/>
-                </a:solidFill>
-              </a:defRPr>
-            </a:pPr>
-            <a:r>
-              <a:t>World-class monuments like Mubarak Mandi Palace, Bahu Fort (3000 yrs old), and Amar Mahal witness only a fraction of their potential footfall.</a:t>
-            </a:r>
-          </a:p>
-          <a:p>
-            <a:pPr>
-              <a:defRPr sz="1250" b="1">
-                <a:solidFill>
-                  <a:srgbClr val="9E4A0C"/>
+              <a:defRPr sz="1000">
+                <a:solidFill>
+                  <a:srgbClr val="5F6E67"/>
+                </a:solidFill>
+              </a:defRPr>
+            </a:pPr>
+            <a:r>
+              <a:t>Mubarak Mandi Palace (seat of Dogra dynasty), Bahu Fort (3000-yr landmark), and Amar Mahal witness &lt;5% of pilgrim footfall due to missing structured half-day circuits.</a:t>
+            </a:r>
+          </a:p>
+          <a:p>
+            <a:pPr>
+              <a:defRPr sz="1150" b="1">
+                <a:solidFill>
+                  <a:srgbClr val="A84D0E"/>
                 </a:solidFill>
               </a:defRPr>
             </a:pPr>
@@ -5263,23 +5467,23 @@
           <a:p>
             <a:pPr>
               <a:spcAft>
-                <a:spcPts val="800"/>
+                <a:spcPts val="600"/>
               </a:spcAft>
-              <a:defRPr sz="1100">
-                <a:solidFill>
-                  <a:srgbClr val="64746C"/>
-                </a:solidFill>
-              </a:defRPr>
-            </a:pPr>
-            <a:r>
-              <a:t>Authentic Dogra crafts (Basohli Paintings, Pashmina, Basohli Tweed, Bhaderwah Rajmash) lose sales to roadside counterfeits with no verified seller guidance.</a:t>
-            </a:r>
-          </a:p>
-          <a:p>
-            <a:pPr>
-              <a:defRPr sz="1250" b="1">
-                <a:solidFill>
-                  <a:srgbClr val="9E4A0C"/>
+              <a:defRPr sz="1000">
+                <a:solidFill>
+                  <a:srgbClr val="5F6E67"/>
+                </a:solidFill>
+              </a:defRPr>
+            </a:pPr>
+            <a:r>
+              <a:t>Authentic Dogra crafts (Basohli Paintings, Pashmina, Basohli Tweed, Bhaderwah Rajmash) lose sales to roadside counterfeit stalls because visitors lack a verified artisan directory.</a:t>
+            </a:r>
+          </a:p>
+          <a:p>
+            <a:pPr>
+              <a:defRPr sz="1150" b="1">
+                <a:solidFill>
+                  <a:srgbClr val="A84D0E"/>
                 </a:solidFill>
               </a:defRPr>
             </a:pPr>
@@ -5290,43 +5494,43 @@
           <a:p>
             <a:pPr>
               <a:spcAft>
-                <a:spcPts val="800"/>
+                <a:spcPts val="600"/>
               </a:spcAft>
-              <a:defRPr sz="1100">
-                <a:solidFill>
-                  <a:srgbClr val="64746C"/>
-                </a:solidFill>
-              </a:defRPr>
-            </a:pPr>
-            <a:r>
-              <a:t>Indigenous nutritious Dogra delicacies (Kaladi Kulcha, Dogra Dham, Sund Panjeeri) lose out to generic fast-food stalls.</a:t>
-            </a:r>
-          </a:p>
-          <a:p>
-            <a:pPr>
-              <a:defRPr sz="1250" b="1">
-                <a:solidFill>
-                  <a:srgbClr val="9E4A0C"/>
-                </a:solidFill>
-              </a:defRPr>
-            </a:pPr>
-            <a:r>
-              <a:t>📉 Lost Municipal Revenue</a:t>
+              <a:defRPr sz="1000">
+                <a:solidFill>
+                  <a:srgbClr val="5F6E67"/>
+                </a:solidFill>
+              </a:defRPr>
+            </a:pPr>
+            <a:r>
+              <a:t>Indigenous nutritious Dogra delicacies (Kaladi Kulcha, Dogra Dham, Sund Panjeeri) lose out to generic highway fast food due to lack of hygienic, verified food trails.</a:t>
+            </a:r>
+          </a:p>
+          <a:p>
+            <a:pPr>
+              <a:defRPr sz="1150" b="1">
+                <a:solidFill>
+                  <a:srgbClr val="A84D0E"/>
+                </a:solidFill>
+              </a:defRPr>
+            </a:pPr>
+            <a:r>
+              <a:t>📉 Transit Inefficiency</a:t>
             </a:r>
           </a:p>
           <a:p>
             <a:pPr>
               <a:spcAft>
-                <a:spcPts val="800"/>
+                <a:spcPts val="600"/>
               </a:spcAft>
-              <a:defRPr sz="1100">
-                <a:solidFill>
-                  <a:srgbClr val="64746C"/>
-                </a:solidFill>
-              </a:defRPr>
-            </a:pPr>
-            <a:r>
-              <a:t>Estimates show Jammu City loses over ₹300 Crores annually in potential local hospitality, craft, and transportation income.</a:t>
+              <a:defRPr sz="1000">
+                <a:solidFill>
+                  <a:srgbClr val="5F6E67"/>
+                </a:solidFill>
+              </a:defRPr>
+            </a:pPr>
+            <a:r>
+              <a:t>Public Matador mini-buses and E-buses run with irregular passenger loads while private touts crowd station gates, driving congestion and commuter dissatisfaction.</a:t>
             </a:r>
           </a:p>
         </p:txBody>
@@ -5354,15 +5558,15 @@
           <a:lstStyle/>
           <a:p>
             <a:pPr>
-              <a:defRPr sz="950">
-                <a:solidFill>
-                  <a:srgbClr val="64746C"/>
+              <a:defRPr sz="900">
+                <a:solidFill>
+                  <a:srgbClr val="5F6E67"/>
                 </a:solidFill>
                 <a:latin typeface="Arial"/>
               </a:defRPr>
             </a:pPr>
             <a:r>
-              <a:t>JammuKhoj • Smart Tourism &amp; Pilgrim Companion • https://jammukhoj.in</a:t>
+              <a:t>JammuKhoj • Smart Tourism &amp; Pilgrim Companion • Live App: https://jammukhoj.in</a:t>
             </a:r>
           </a:p>
         </p:txBody>
@@ -5400,7 +5604,7 @@
             <a:avLst/>
           </a:prstGeom>
           <a:solidFill>
-            <a:srgbClr val="FBF9F5"/>
+            <a:srgbClr val="FAF7F2"/>
           </a:solidFill>
           <a:ln>
             <a:noFill/>
@@ -5436,8 +5640,8 @@
         </p:nvSpPr>
         <p:spPr>
           <a:xfrm>
-            <a:off x="731520" y="411480"/>
-            <a:ext cx="9144000" cy="365760"/>
+            <a:off x="731520" y="384048"/>
+            <a:ext cx="9144000" cy="320040"/>
           </a:xfrm>
           <a:prstGeom prst="rect">
             <a:avLst/>
@@ -5451,15 +5655,15 @@
           <a:lstStyle/>
           <a:p>
             <a:pPr>
-              <a:defRPr sz="1100" b="1">
-                <a:solidFill>
-                  <a:srgbClr val="9E4A0C"/>
+              <a:defRPr sz="1050" b="1">
+                <a:solidFill>
+                  <a:srgbClr val="A84D0E"/>
                 </a:solidFill>
                 <a:latin typeface="Arial"/>
               </a:defRPr>
             </a:pPr>
             <a:r>
-              <a:t>04 | THE SOLUTION ARCHITECTURE</a:t>
+              <a:t>04 • THE SOLUTION ARCHITECTURE</a:t>
             </a:r>
           </a:p>
         </p:txBody>
@@ -5472,8 +5676,8 @@
         </p:nvSpPr>
         <p:spPr>
           <a:xfrm>
-            <a:off x="731520" y="731520"/>
-            <a:ext cx="10515600" cy="594360"/>
+            <a:off x="731520" y="676656"/>
+            <a:ext cx="10698480" cy="594360"/>
           </a:xfrm>
           <a:prstGeom prst="rect">
             <a:avLst/>
@@ -5487,9 +5691,9 @@
           <a:lstStyle/>
           <a:p>
             <a:pPr>
-              <a:defRPr sz="2400" b="1">
-                <a:solidFill>
-                  <a:srgbClr val="085444"/>
+              <a:defRPr sz="2300" b="1">
+                <a:solidFill>
+                  <a:srgbClr val="0B3D33"/>
                 </a:solidFill>
                 <a:latin typeface="Georgia"/>
               </a:defRPr>
@@ -5508,8 +5712,8 @@
         </p:nvSpPr>
         <p:spPr>
           <a:xfrm>
-            <a:off x="731520" y="1298448"/>
-            <a:ext cx="10515600" cy="365760"/>
+            <a:off x="731520" y="1243584"/>
+            <a:ext cx="10698480" cy="365760"/>
           </a:xfrm>
           <a:prstGeom prst="rect">
             <a:avLst/>
@@ -5523,9 +5727,9 @@
           <a:lstStyle/>
           <a:p>
             <a:pPr>
-              <a:defRPr sz="1300">
-                <a:solidFill>
-                  <a:srgbClr val="64746C"/>
+              <a:defRPr sz="1150">
+                <a:solidFill>
+                  <a:srgbClr val="5F6E67"/>
                 </a:solidFill>
                 <a:latin typeface="Arial"/>
               </a:defRPr>
@@ -5544,8 +5748,8 @@
         </p:nvSpPr>
         <p:spPr>
           <a:xfrm>
-            <a:off x="731520" y="1737360"/>
-            <a:ext cx="5257800" cy="2057400"/>
+            <a:off x="731520" y="1691640"/>
+            <a:ext cx="3931920" cy="2148840"/>
           </a:xfrm>
           <a:prstGeom prst="roundRect">
             <a:avLst/>
@@ -5555,7 +5759,7 @@
           </a:solidFill>
           <a:ln w="12700">
             <a:solidFill>
-              <a:srgbClr val="EBE4DC"/>
+              <a:srgbClr val="E4DCD2"/>
             </a:solidFill>
           </a:ln>
         </p:spPr>
@@ -5589,8 +5793,8 @@
         </p:nvSpPr>
         <p:spPr>
           <a:xfrm>
-            <a:off x="960120" y="1920240"/>
-            <a:ext cx="4800600" cy="1691640"/>
+            <a:off x="868680" y="1856232"/>
+            <a:ext cx="3657600" cy="1828800"/>
           </a:xfrm>
           <a:prstGeom prst="rect">
             <a:avLst/>
@@ -5605,30 +5809,29 @@
           <a:p>
             <a:pPr>
               <a:spcAft>
-                <a:spcPts val="600"/>
+                <a:spcPts val="400"/>
               </a:spcAft>
-              <a:defRPr sz="1600" b="1">
-                <a:solidFill>
-                  <a:srgbClr val="085444"/>
+              <a:defRPr sz="1350" b="1">
+                <a:solidFill>
+                  <a:srgbClr val="0B3D33"/>
                 </a:solidFill>
                 <a:latin typeface="Georgia"/>
               </a:defRPr>
             </a:pPr>
             <a:r>
-              <a:t>⚡ 1-Tap Circuit Engine</a:t>
-            </a:r>
-          </a:p>
-          <a:p>
-            <a:pPr>
-              <a:defRPr sz="1150">
-                <a:solidFill>
-                  <a:srgbClr val="64746C"/>
-                </a:solidFill>
-                <a:latin typeface="Arial"/>
-              </a:defRPr>
-            </a:pPr>
-            <a:r>
-              <a:t>Deterministic, buffer-safe itinerary generator that plans realistic circuits tailored to user's exact available layover (4h, 8h, 24h) with guaranteed station return buffers (45m rail / 150m air).</a:t>
+              <a:t>⚡ 1-Tap Buffer-Safe Engine</a:t>
+            </a:r>
+          </a:p>
+          <a:p>
+            <a:pPr>
+              <a:defRPr sz="1000">
+                <a:solidFill>
+                  <a:srgbClr val="5F6E67"/>
+                </a:solidFill>
+              </a:defRPr>
+            </a:pPr>
+            <a:r>
+              <a:t>Deterministic layover itinerary engine tailored to traveler's exact departure deadline (4h Express, 8h Cultural, 24h Valley trail). Enforces a strict 45-min rail buffer &amp; 150-min air buffer, eliminating missed departures.</a:t>
             </a:r>
           </a:p>
         </p:txBody>
@@ -5641,8 +5844,8 @@
         </p:nvSpPr>
         <p:spPr>
           <a:xfrm>
-            <a:off x="6172200" y="1737360"/>
-            <a:ext cx="5257800" cy="2057400"/>
+            <a:off x="731520" y="3977639"/>
+            <a:ext cx="3931920" cy="2148840"/>
           </a:xfrm>
           <a:prstGeom prst="roundRect">
             <a:avLst/>
@@ -5652,7 +5855,7 @@
           </a:solidFill>
           <a:ln w="12700">
             <a:solidFill>
-              <a:srgbClr val="EBE4DC"/>
+              <a:srgbClr val="E4DCD2"/>
             </a:solidFill>
           </a:ln>
         </p:spPr>
@@ -5686,8 +5889,8 @@
         </p:nvSpPr>
         <p:spPr>
           <a:xfrm>
-            <a:off x="6400800" y="1920240"/>
-            <a:ext cx="4800600" cy="1691640"/>
+            <a:off x="868680" y="4142231"/>
+            <a:ext cx="3657600" cy="1828800"/>
           </a:xfrm>
           <a:prstGeom prst="rect">
             <a:avLst/>
@@ -5702,11 +5905,11 @@
           <a:p>
             <a:pPr>
               <a:spcAft>
-                <a:spcPts val="600"/>
+                <a:spcPts val="400"/>
               </a:spcAft>
-              <a:defRPr sz="1600" b="1">
-                <a:solidFill>
-                  <a:srgbClr val="085444"/>
+              <a:defRPr sz="1350" b="1">
+                <a:solidFill>
+                  <a:srgbClr val="0B3D33"/>
                 </a:solidFill>
                 <a:latin typeface="Georgia"/>
               </a:defRPr>
@@ -5717,15 +5920,14 @@
           </a:p>
           <a:p>
             <a:pPr>
-              <a:defRPr sz="1150">
-                <a:solidFill>
-                  <a:srgbClr val="64746C"/>
-                </a:solidFill>
-                <a:latin typeface="Arial"/>
-              </a:defRPr>
-            </a:pPr>
-            <a:r>
-              <a:t>Entire knowledge graph (36+ attractions, road topologies, timetables, dialer hotlines) bundled in local IndexedDB. Zero cloud telemetry dependency.</a:t>
+              <a:defRPr sz="1000">
+                <a:solidFill>
+                  <a:srgbClr val="5F6E67"/>
+                </a:solidFill>
+              </a:defRPr>
+            </a:pPr>
+            <a:r>
+              <a:t>Entire knowledge graph (36+ attractions, road topologies, timetables, dialer hotlines) bundled in local IndexedDB. Operates with zero SIM or data roaming in mountain valleys.</a:t>
             </a:r>
           </a:p>
         </p:txBody>
@@ -5738,8 +5940,77 @@
         </p:nvSpPr>
         <p:spPr>
           <a:xfrm>
-            <a:off x="731520" y="3977639"/>
-            <a:ext cx="5257800" cy="2057400"/>
+            <a:off x="4846320" y="1691640"/>
+            <a:ext cx="2468880" cy="4480560"/>
+          </a:xfrm>
+          <a:prstGeom prst="roundRect">
+            <a:avLst/>
+          </a:prstGeom>
+          <a:solidFill>
+            <a:srgbClr val="141A18"/>
+          </a:solidFill>
+          <a:ln w="19050">
+            <a:solidFill>
+              <a:srgbClr val="D98210"/>
+            </a:solidFill>
+          </a:ln>
+        </p:spPr>
+        <p:style>
+          <a:lnRef idx="1">
+            <a:schemeClr val="accent1"/>
+          </a:lnRef>
+          <a:fillRef idx="3">
+            <a:schemeClr val="accent1"/>
+          </a:fillRef>
+          <a:effectRef idx="2">
+            <a:schemeClr val="accent1"/>
+          </a:effectRef>
+          <a:fontRef idx="minor">
+            <a:schemeClr val="lt1"/>
+          </a:fontRef>
+        </p:style>
+        <p:txBody>
+          <a:bodyPr rtlCol="0" anchor="ctr"/>
+          <a:lstStyle/>
+          <a:p>
+            <a:pPr algn="ctr"/>
+          </a:p>
+        </p:txBody>
+      </p:sp>
+      <p:pic>
+        <p:nvPicPr>
+          <p:cNvPr id="11" name="Picture 10" descr="app_home_planner.png"/>
+          <p:cNvPicPr>
+            <a:picLocks noChangeAspect="1"/>
+          </p:cNvPicPr>
+          <p:nvPr/>
+        </p:nvPicPr>
+        <p:blipFill>
+          <a:blip r:embed="rId2"/>
+          <a:stretch>
+            <a:fillRect/>
+          </a:stretch>
+        </p:blipFill>
+        <p:spPr>
+          <a:xfrm>
+            <a:off x="4919472" y="1764792"/>
+            <a:ext cx="2322576" cy="4334256"/>
+          </a:xfrm>
+          <a:prstGeom prst="rect">
+            <a:avLst/>
+          </a:prstGeom>
+        </p:spPr>
+      </p:pic>
+      <p:sp>
+        <p:nvSpPr>
+          <p:cNvPr id="12" name="Rounded Rectangle 11"/>
+          <p:cNvSpPr/>
+          <p:nvPr/>
+        </p:nvSpPr>
+        <p:spPr>
+          <a:xfrm>
+            <a:off x="7498079" y="1691640"/>
+            <a:ext cx="3962095" cy="2148840"/>
           </a:xfrm>
           <a:prstGeom prst="roundRect">
             <a:avLst/>
@@ -5749,7 +6020,7 @@
           </a:solidFill>
           <a:ln w="12700">
             <a:solidFill>
-              <a:srgbClr val="EBE4DC"/>
+              <a:srgbClr val="E4DCD2"/>
             </a:solidFill>
           </a:ln>
         </p:spPr>
@@ -5777,14 +6048,14 @@
       </p:sp>
       <p:sp>
         <p:nvSpPr>
-          <p:cNvPr id="11" name="TextBox 10"/>
+          <p:cNvPr id="13" name="TextBox 12"/>
           <p:cNvSpPr txBox="1"/>
           <p:nvPr/>
         </p:nvSpPr>
         <p:spPr>
           <a:xfrm>
-            <a:off x="960120" y="4160519"/>
-            <a:ext cx="4800600" cy="1691640"/>
+            <a:off x="7635240" y="1856232"/>
+            <a:ext cx="3657600" cy="1828800"/>
           </a:xfrm>
           <a:prstGeom prst="rect">
             <a:avLst/>
@@ -5799,11 +6070,11 @@
           <a:p>
             <a:pPr>
               <a:spcAft>
-                <a:spcPts val="600"/>
+                <a:spcPts val="400"/>
               </a:spcAft>
-              <a:defRPr sz="1600" b="1">
-                <a:solidFill>
-                  <a:srgbClr val="085444"/>
+              <a:defRPr sz="1350" b="1">
+                <a:solidFill>
+                  <a:srgbClr val="0B3D33"/>
                 </a:solidFill>
                 <a:latin typeface="Georgia"/>
               </a:defRPr>
@@ -5814,11 +6085,10 @@
           </a:p>
           <a:p>
             <a:pPr>
-              <a:defRPr sz="1150">
-                <a:solidFill>
-                  <a:srgbClr val="64746C"/>
-                </a:solidFill>
-                <a:latin typeface="Arial"/>
+              <a:defRPr sz="1000">
+                <a:solidFill>
+                  <a:srgbClr val="5F6E67"/>
+                </a:solidFill>
               </a:defRPr>
             </a:pPr>
             <a:r>
@@ -5829,14 +6099,14 @@
       </p:sp>
       <p:sp>
         <p:nvSpPr>
-          <p:cNvPr id="12" name="Rounded Rectangle 11"/>
+          <p:cNvPr id="14" name="Rounded Rectangle 13"/>
           <p:cNvSpPr/>
           <p:nvPr/>
         </p:nvSpPr>
         <p:spPr>
           <a:xfrm>
-            <a:off x="6172200" y="3977639"/>
-            <a:ext cx="5257800" cy="2057400"/>
+            <a:off x="7498079" y="3977639"/>
+            <a:ext cx="3962095" cy="2148840"/>
           </a:xfrm>
           <a:prstGeom prst="roundRect">
             <a:avLst/>
@@ -5846,7 +6116,7 @@
           </a:solidFill>
           <a:ln w="12700">
             <a:solidFill>
-              <a:srgbClr val="EBE4DC"/>
+              <a:srgbClr val="E4DCD2"/>
             </a:solidFill>
           </a:ln>
         </p:spPr>
@@ -5874,14 +6144,14 @@
       </p:sp>
       <p:sp>
         <p:nvSpPr>
-          <p:cNvPr id="13" name="TextBox 12"/>
+          <p:cNvPr id="15" name="TextBox 14"/>
           <p:cNvSpPr txBox="1"/>
           <p:nvPr/>
         </p:nvSpPr>
         <p:spPr>
           <a:xfrm>
-            <a:off x="6400800" y="4160519"/>
-            <a:ext cx="4800600" cy="1691640"/>
+            <a:off x="7635240" y="4142231"/>
+            <a:ext cx="3657600" cy="1828800"/>
           </a:xfrm>
           <a:prstGeom prst="rect">
             <a:avLst/>
@@ -5896,37 +6166,36 @@
           <a:p>
             <a:pPr>
               <a:spcAft>
-                <a:spcPts val="600"/>
+                <a:spcPts val="400"/>
               </a:spcAft>
-              <a:defRPr sz="1600" b="1">
-                <a:solidFill>
-                  <a:srgbClr val="085444"/>
+              <a:defRPr sz="1350" b="1">
+                <a:solidFill>
+                  <a:srgbClr val="0B3D33"/>
                 </a:solidFill>
                 <a:latin typeface="Georgia"/>
               </a:defRPr>
             </a:pPr>
             <a:r>
-              <a:t>🧓 Senior &amp; Accessibility First</a:t>
-            </a:r>
-          </a:p>
-          <a:p>
-            <a:pPr>
-              <a:defRPr sz="1150">
-                <a:solidFill>
-                  <a:srgbClr val="64746C"/>
-                </a:solidFill>
-                <a:latin typeface="Arial"/>
-              </a:defRPr>
-            </a:pPr>
-            <a:r>
-              <a:t>Dedicated walking-load ratings (Low/Med/High), wheelchair step-free indicators, SMVDSB battery car guidance, and WCAG 2.1 AA senior contrast modes.</a:t>
-            </a:r>
-          </a:p>
-        </p:txBody>
-      </p:sp>
-      <p:sp>
-        <p:nvSpPr>
-          <p:cNvPr id="14" name="TextBox 13"/>
+              <a:t>🧓 Elder &amp; Accessibility Care</a:t>
+            </a:r>
+          </a:p>
+          <a:p>
+            <a:pPr>
+              <a:defRPr sz="1000">
+                <a:solidFill>
+                  <a:srgbClr val="5F6E67"/>
+                </a:solidFill>
+              </a:defRPr>
+            </a:pPr>
+            <a:r>
+              <a:t>Step-free badges, walking load indicators (Low/Med/High), verified Vaishno Devi 5-stage trek manual, battery-car regulations, and 1-tap ERSS 112 WhatsApp location SOS.</a:t>
+            </a:r>
+          </a:p>
+        </p:txBody>
+      </p:sp>
+      <p:sp>
+        <p:nvSpPr>
+          <p:cNvPr id="16" name="TextBox 15"/>
           <p:cNvSpPr txBox="1"/>
           <p:nvPr/>
         </p:nvSpPr>
@@ -5947,15 +6216,15 @@
           <a:lstStyle/>
           <a:p>
             <a:pPr>
-              <a:defRPr sz="950">
-                <a:solidFill>
-                  <a:srgbClr val="64746C"/>
+              <a:defRPr sz="900">
+                <a:solidFill>
+                  <a:srgbClr val="5F6E67"/>
                 </a:solidFill>
                 <a:latin typeface="Arial"/>
               </a:defRPr>
             </a:pPr>
             <a:r>
-              <a:t>JammuKhoj • Smart Tourism &amp; Pilgrim Companion • https://jammukhoj.in</a:t>
+              <a:t>JammuKhoj • Smart Tourism &amp; Pilgrim Companion • Live App: https://jammukhoj.in</a:t>
             </a:r>
           </a:p>
         </p:txBody>
@@ -5993,7 +6262,7 @@
             <a:avLst/>
           </a:prstGeom>
           <a:solidFill>
-            <a:srgbClr val="FBF9F5"/>
+            <a:srgbClr val="FAF7F2"/>
           </a:solidFill>
           <a:ln>
             <a:noFill/>
@@ -6029,8 +6298,8 @@
         </p:nvSpPr>
         <p:spPr>
           <a:xfrm>
-            <a:off x="731520" y="411480"/>
-            <a:ext cx="9144000" cy="365760"/>
+            <a:off x="731520" y="384048"/>
+            <a:ext cx="9144000" cy="320040"/>
           </a:xfrm>
           <a:prstGeom prst="rect">
             <a:avLst/>
@@ -6044,15 +6313,15 @@
           <a:lstStyle/>
           <a:p>
             <a:pPr>
-              <a:defRPr sz="1100" b="1">
-                <a:solidFill>
-                  <a:srgbClr val="9E4A0C"/>
+              <a:defRPr sz="1050" b="1">
+                <a:solidFill>
+                  <a:srgbClr val="A84D0E"/>
                 </a:solidFill>
                 <a:latin typeface="Arial"/>
               </a:defRPr>
             </a:pPr>
             <a:r>
-              <a:t>05 | SEAMLESS USER JOURNEY</a:t>
+              <a:t>05 • SEAMLESS USER JOURNEY</a:t>
             </a:r>
           </a:p>
         </p:txBody>
@@ -6065,8 +6334,8 @@
         </p:nvSpPr>
         <p:spPr>
           <a:xfrm>
-            <a:off x="731520" y="731520"/>
-            <a:ext cx="10515600" cy="594360"/>
+            <a:off x="731520" y="676656"/>
+            <a:ext cx="10698480" cy="594360"/>
           </a:xfrm>
           <a:prstGeom prst="rect">
             <a:avLst/>
@@ -6080,9 +6349,9 @@
           <a:lstStyle/>
           <a:p>
             <a:pPr>
-              <a:defRPr sz="2400" b="1">
-                <a:solidFill>
-                  <a:srgbClr val="085444"/>
+              <a:defRPr sz="2300" b="1">
+                <a:solidFill>
+                  <a:srgbClr val="0B3D33"/>
                 </a:solidFill>
                 <a:latin typeface="Georgia"/>
               </a:defRPr>
@@ -6101,8 +6370,8 @@
         </p:nvSpPr>
         <p:spPr>
           <a:xfrm>
-            <a:off x="731520" y="1298448"/>
-            <a:ext cx="10515600" cy="365760"/>
+            <a:off x="731520" y="1243584"/>
+            <a:ext cx="10698480" cy="365760"/>
           </a:xfrm>
           <a:prstGeom prst="rect">
             <a:avLst/>
@@ -6116,9 +6385,9 @@
           <a:lstStyle/>
           <a:p>
             <a:pPr>
-              <a:defRPr sz="1300">
-                <a:solidFill>
-                  <a:srgbClr val="64746C"/>
+              <a:defRPr sz="1150">
+                <a:solidFill>
+                  <a:srgbClr val="5F6E67"/>
                 </a:solidFill>
                 <a:latin typeface="Arial"/>
               </a:defRPr>
@@ -6137,8 +6406,8 @@
         </p:nvSpPr>
         <p:spPr>
           <a:xfrm>
-            <a:off x="731520" y="1737360"/>
-            <a:ext cx="2057400" cy="4297680"/>
+            <a:off x="731520" y="1691640"/>
+            <a:ext cx="7772400" cy="4480560"/>
           </a:xfrm>
           <a:prstGeom prst="roundRect">
             <a:avLst/>
@@ -6148,7 +6417,7 @@
           </a:solidFill>
           <a:ln w="12700">
             <a:solidFill>
-              <a:srgbClr val="EBE4DC"/>
+              <a:srgbClr val="E4DCD2"/>
             </a:solidFill>
           </a:ln>
         </p:spPr>
@@ -6176,23 +6445,183 @@
       </p:sp>
       <p:sp>
         <p:nvSpPr>
-          <p:cNvPr id="7" name="Rounded Rectangle 6"/>
+          <p:cNvPr id="7" name="TextBox 6"/>
+          <p:cNvSpPr txBox="1"/>
+          <p:nvPr/>
+        </p:nvSpPr>
+        <p:spPr>
+          <a:xfrm>
+            <a:off x="914400" y="1783080"/>
+            <a:ext cx="7406640" cy="4297680"/>
+          </a:xfrm>
+          <a:prstGeom prst="rect">
+            <a:avLst/>
+          </a:prstGeom>
+          <a:noFill/>
+        </p:spPr>
+        <p:txBody>
+          <a:bodyPr wrap="square">
+            <a:spAutoFit/>
+          </a:bodyPr>
+          <a:lstStyle/>
+          <a:p>
+            <a:pPr>
+              <a:defRPr sz="1100" b="1">
+                <a:solidFill>
+                  <a:srgbClr val="A84D0E"/>
+                </a:solidFill>
+              </a:defRPr>
+            </a:pPr>
+            <a:r>
+              <a:t>STEP 1: 1. ARRIVAL AT STATION / AIRPORT</a:t>
+            </a:r>
+          </a:p>
+          <a:p>
+            <a:pPr>
+              <a:spcAft>
+                <a:spcPts val="600"/>
+              </a:spcAft>
+              <a:defRPr sz="950">
+                <a:solidFill>
+                  <a:srgbClr val="18221E"/>
+                </a:solidFill>
+              </a:defRPr>
+            </a:pPr>
+            <a:r>
+              <a:t>Yatri steps off train at Jammu Tawi (JAT) or IXJ Airport. Opens jammukhoj.in directly with 1 tap. Zero mandatory app-store download or login wall.</a:t>
+            </a:r>
+          </a:p>
+          <a:p>
+            <a:pPr>
+              <a:defRPr sz="1100" b="1">
+                <a:solidFill>
+                  <a:srgbClr val="A84D0E"/>
+                </a:solidFill>
+              </a:defRPr>
+            </a:pPr>
+            <a:r>
+              <a:t>STEP 2: 2. 1-TAP ITINERARY GENERATION</a:t>
+            </a:r>
+          </a:p>
+          <a:p>
+            <a:pPr>
+              <a:spcAft>
+                <a:spcPts val="600"/>
+              </a:spcAft>
+              <a:defRPr sz="950">
+                <a:solidFill>
+                  <a:srgbClr val="18221E"/>
+                </a:solidFill>
+              </a:defRPr>
+            </a:pPr>
+            <a:r>
+              <a:t>Selects layover: '4-Hour Express' from station. App automatically reserves 45-min departure buffer and crafts a 2.5-hr curated temple circuit.</a:t>
+            </a:r>
+          </a:p>
+          <a:p>
+            <a:pPr>
+              <a:defRPr sz="1100" b="1">
+                <a:solidFill>
+                  <a:srgbClr val="A84D0E"/>
+                </a:solidFill>
+              </a:defRPr>
+            </a:pPr>
+            <a:r>
+              <a:t>STEP 3: 3. TRANSPARENT LOCAL TRANSIT</a:t>
+            </a:r>
+          </a:p>
+          <a:p>
+            <a:pPr>
+              <a:spcAft>
+                <a:spcPts val="600"/>
+              </a:spcAft>
+              <a:defRPr sz="950">
+                <a:solidFill>
+                  <a:srgbClr val="18221E"/>
+                </a:solidFill>
+              </a:defRPr>
+            </a:pPr>
+            <a:r>
+              <a:t>Checks Matador Route #1 to Raghunath Bazaar. Boards with exact ₹15 fare; avoids cab touts quoting ₹400 for the same distance.</a:t>
+            </a:r>
+          </a:p>
+          <a:p>
+            <a:pPr>
+              <a:defRPr sz="1100" b="1">
+                <a:solidFill>
+                  <a:srgbClr val="A84D0E"/>
+                </a:solidFill>
+              </a:defRPr>
+            </a:pPr>
+            <a:r>
+              <a:t>STEP 4: 4. CULTURAL DISCOVERY &amp; PURE VEG FOOD</a:t>
+            </a:r>
+          </a:p>
+          <a:p>
+            <a:pPr>
+              <a:spcAft>
+                <a:spcPts val="600"/>
+              </a:spcAft>
+              <a:defRPr sz="950">
+                <a:solidFill>
+                  <a:srgbClr val="18221E"/>
+                </a:solidFill>
+              </a:defRPr>
+            </a:pPr>
+            <a:r>
+              <a:t>Offers prayers at Raghunath Mandir, tastes authentic Kaladi Kulcha with Jain/Pure Veg filter, and visits verified Basohli craft cooperative.</a:t>
+            </a:r>
+          </a:p>
+          <a:p>
+            <a:pPr>
+              <a:defRPr sz="1100" b="1">
+                <a:solidFill>
+                  <a:srgbClr val="A84D0E"/>
+                </a:solidFill>
+              </a:defRPr>
+            </a:pPr>
+            <a:r>
+              <a:t>STEP 5: 5. SAFE ONWARD DEPARTURE</a:t>
+            </a:r>
+          </a:p>
+          <a:p>
+            <a:pPr>
+              <a:spcAft>
+                <a:spcPts val="600"/>
+              </a:spcAft>
+              <a:defRPr sz="950">
+                <a:solidFill>
+                  <a:srgbClr val="18221E"/>
+                </a:solidFill>
+              </a:defRPr>
+            </a:pPr>
+            <a:r>
+              <a:t>Returns to station with 50 minutes to spare. Boards onward Vande Bharat Express to Katra for holy darshan with complete peace of mind.</a:t>
+            </a:r>
+          </a:p>
+        </p:txBody>
+      </p:sp>
+      <p:sp>
+        <p:nvSpPr>
+          <p:cNvPr id="8" name="Rounded Rectangle 7"/>
           <p:cNvSpPr/>
           <p:nvPr/>
         </p:nvSpPr>
         <p:spPr>
           <a:xfrm>
-            <a:off x="914400" y="1920240"/>
-            <a:ext cx="1691640" cy="411480"/>
+            <a:off x="8778240" y="1691640"/>
+            <a:ext cx="2681935" cy="4480560"/>
           </a:xfrm>
           <a:prstGeom prst="roundRect">
             <a:avLst/>
           </a:prstGeom>
           <a:solidFill>
-            <a:srgbClr val="9E4A0C"/>
+            <a:srgbClr val="141A18"/>
           </a:solidFill>
-          <a:ln>
-            <a:noFill/>
+          <a:ln w="19050">
+            <a:solidFill>
+              <a:srgbClr val="D98210"/>
+            </a:solidFill>
           </a:ln>
         </p:spPr>
         <p:style>
@@ -6213,670 +6642,37 @@
           <a:bodyPr rtlCol="0" anchor="ctr"/>
           <a:lstStyle/>
           <a:p>
-            <a:pPr algn="ctr">
-              <a:defRPr sz="1100" b="1">
-                <a:solidFill>
-                  <a:srgbClr val="FFFFFF"/>
-                </a:solidFill>
-              </a:defRPr>
-            </a:pPr>
-            <a:r>
-              <a:t>STEP 1</a:t>
-            </a:r>
-          </a:p>
-        </p:txBody>
-      </p:sp>
-      <p:sp>
-        <p:nvSpPr>
-          <p:cNvPr id="8" name="TextBox 7"/>
-          <p:cNvSpPr txBox="1"/>
-          <p:nvPr/>
-        </p:nvSpPr>
-        <p:spPr>
-          <a:xfrm>
-            <a:off x="868680" y="2468880"/>
-            <a:ext cx="1783080" cy="3383280"/>
+            <a:pPr algn="ctr"/>
+          </a:p>
+        </p:txBody>
+      </p:sp>
+      <p:pic>
+        <p:nvPicPr>
+          <p:cNvPr id="9" name="Picture 8" descr="app_itinerary_result.png"/>
+          <p:cNvPicPr>
+            <a:picLocks noChangeAspect="1"/>
+          </p:cNvPicPr>
+          <p:nvPr/>
+        </p:nvPicPr>
+        <p:blipFill>
+          <a:blip r:embed="rId2"/>
+          <a:stretch>
+            <a:fillRect/>
+          </a:stretch>
+        </p:blipFill>
+        <p:spPr>
+          <a:xfrm>
+            <a:off x="8851392" y="1764792"/>
+            <a:ext cx="2535631" cy="4334256"/>
           </a:xfrm>
           <a:prstGeom prst="rect">
             <a:avLst/>
           </a:prstGeom>
-          <a:noFill/>
-        </p:spPr>
-        <p:txBody>
-          <a:bodyPr wrap="square">
-            <a:spAutoFit/>
-          </a:bodyPr>
-          <a:lstStyle/>
-          <a:p>
-            <a:pPr>
-              <a:spcAft>
-                <a:spcPts val="800"/>
-              </a:spcAft>
-              <a:defRPr sz="1400" b="1">
-                <a:solidFill>
-                  <a:srgbClr val="085444"/>
-                </a:solidFill>
-                <a:latin typeface="Georgia"/>
-              </a:defRPr>
-            </a:pPr>
-            <a:r>
-              <a:t>1. Arrival</a:t>
-            </a:r>
-          </a:p>
-          <a:p>
-            <a:pPr>
-              <a:defRPr sz="1050">
-                <a:solidFill>
-                  <a:srgbClr val="64746C"/>
-                </a:solidFill>
-                <a:latin typeface="Arial"/>
-              </a:defRPr>
-            </a:pPr>
-            <a:r>
-              <a:t>Arrives at Jammu Tawi (JAT) or Airport. Scans QR code or opens jammukhoj.in directly in browser or PWA. Zero mandatory login barrier.</a:t>
-            </a:r>
-          </a:p>
-        </p:txBody>
-      </p:sp>
-      <p:sp>
-        <p:nvSpPr>
-          <p:cNvPr id="9" name="Rounded Rectangle 8"/>
-          <p:cNvSpPr/>
-          <p:nvPr/>
-        </p:nvSpPr>
-        <p:spPr>
-          <a:xfrm>
-            <a:off x="2898648" y="1737360"/>
-            <a:ext cx="2057400" cy="4297680"/>
-          </a:xfrm>
-          <a:prstGeom prst="roundRect">
-            <a:avLst/>
-          </a:prstGeom>
-          <a:solidFill>
-            <a:srgbClr val="FFFFFF"/>
-          </a:solidFill>
-          <a:ln w="12700">
-            <a:solidFill>
-              <a:srgbClr val="EBE4DC"/>
-            </a:solidFill>
-          </a:ln>
-        </p:spPr>
-        <p:style>
-          <a:lnRef idx="1">
-            <a:schemeClr val="accent1"/>
-          </a:lnRef>
-          <a:fillRef idx="3">
-            <a:schemeClr val="accent1"/>
-          </a:fillRef>
-          <a:effectRef idx="2">
-            <a:schemeClr val="accent1"/>
-          </a:effectRef>
-          <a:fontRef idx="minor">
-            <a:schemeClr val="lt1"/>
-          </a:fontRef>
-        </p:style>
-        <p:txBody>
-          <a:bodyPr rtlCol="0" anchor="ctr"/>
-          <a:lstStyle/>
-          <a:p>
-            <a:pPr algn="ctr"/>
-          </a:p>
-        </p:txBody>
-      </p:sp>
-      <p:sp>
-        <p:nvSpPr>
-          <p:cNvPr id="10" name="Rounded Rectangle 9"/>
-          <p:cNvSpPr/>
-          <p:nvPr/>
-        </p:nvSpPr>
-        <p:spPr>
-          <a:xfrm>
-            <a:off x="3081528" y="1920240"/>
-            <a:ext cx="1691640" cy="411480"/>
-          </a:xfrm>
-          <a:prstGeom prst="roundRect">
-            <a:avLst/>
-          </a:prstGeom>
-          <a:solidFill>
-            <a:srgbClr val="9E4A0C"/>
-          </a:solidFill>
-          <a:ln>
-            <a:noFill/>
-          </a:ln>
-        </p:spPr>
-        <p:style>
-          <a:lnRef idx="1">
-            <a:schemeClr val="accent1"/>
-          </a:lnRef>
-          <a:fillRef idx="3">
-            <a:schemeClr val="accent1"/>
-          </a:fillRef>
-          <a:effectRef idx="2">
-            <a:schemeClr val="accent1"/>
-          </a:effectRef>
-          <a:fontRef idx="minor">
-            <a:schemeClr val="lt1"/>
-          </a:fontRef>
-        </p:style>
-        <p:txBody>
-          <a:bodyPr rtlCol="0" anchor="ctr"/>
-          <a:lstStyle/>
-          <a:p>
-            <a:pPr algn="ctr">
-              <a:defRPr sz="1100" b="1">
-                <a:solidFill>
-                  <a:srgbClr val="FFFFFF"/>
-                </a:solidFill>
-              </a:defRPr>
-            </a:pPr>
-            <a:r>
-              <a:t>STEP 2</a:t>
-            </a:r>
-          </a:p>
-        </p:txBody>
-      </p:sp>
-      <p:sp>
-        <p:nvSpPr>
-          <p:cNvPr id="11" name="TextBox 10"/>
-          <p:cNvSpPr txBox="1"/>
-          <p:nvPr/>
-        </p:nvSpPr>
-        <p:spPr>
-          <a:xfrm>
-            <a:off x="3035808" y="2468880"/>
-            <a:ext cx="1783080" cy="3383280"/>
-          </a:xfrm>
-          <a:prstGeom prst="rect">
-            <a:avLst/>
-          </a:prstGeom>
-          <a:noFill/>
-        </p:spPr>
-        <p:txBody>
-          <a:bodyPr wrap="square">
-            <a:spAutoFit/>
-          </a:bodyPr>
-          <a:lstStyle/>
-          <a:p>
-            <a:pPr>
-              <a:spcAft>
-                <a:spcPts val="800"/>
-              </a:spcAft>
-              <a:defRPr sz="1400" b="1">
-                <a:solidFill>
-                  <a:srgbClr val="085444"/>
-                </a:solidFill>
-                <a:latin typeface="Georgia"/>
-              </a:defRPr>
-            </a:pPr>
-            <a:r>
-              <a:t>2. 1-Tap Plan</a:t>
-            </a:r>
-          </a:p>
-          <a:p>
-            <a:pPr>
-              <a:defRPr sz="1050">
-                <a:solidFill>
-                  <a:srgbClr val="64746C"/>
-                </a:solidFill>
-                <a:latin typeface="Arial"/>
-              </a:defRPr>
-            </a:pPr>
-            <a:r>
-              <a:t>Selects available window: '4-Hour Express' from station. App automatically reserves 45-min return buffer and computes a 2.5 hr curated circuit.</a:t>
-            </a:r>
-          </a:p>
-        </p:txBody>
-      </p:sp>
-      <p:sp>
-        <p:nvSpPr>
-          <p:cNvPr id="12" name="Rounded Rectangle 11"/>
-          <p:cNvSpPr/>
-          <p:nvPr/>
-        </p:nvSpPr>
-        <p:spPr>
-          <a:xfrm>
-            <a:off x="5065776" y="1737360"/>
-            <a:ext cx="2057400" cy="4297680"/>
-          </a:xfrm>
-          <a:prstGeom prst="roundRect">
-            <a:avLst/>
-          </a:prstGeom>
-          <a:solidFill>
-            <a:srgbClr val="FFFFFF"/>
-          </a:solidFill>
-          <a:ln w="12700">
-            <a:solidFill>
-              <a:srgbClr val="EBE4DC"/>
-            </a:solidFill>
-          </a:ln>
-        </p:spPr>
-        <p:style>
-          <a:lnRef idx="1">
-            <a:schemeClr val="accent1"/>
-          </a:lnRef>
-          <a:fillRef idx="3">
-            <a:schemeClr val="accent1"/>
-          </a:fillRef>
-          <a:effectRef idx="2">
-            <a:schemeClr val="accent1"/>
-          </a:effectRef>
-          <a:fontRef idx="minor">
-            <a:schemeClr val="lt1"/>
-          </a:fontRef>
-        </p:style>
-        <p:txBody>
-          <a:bodyPr rtlCol="0" anchor="ctr"/>
-          <a:lstStyle/>
-          <a:p>
-            <a:pPr algn="ctr"/>
-          </a:p>
-        </p:txBody>
-      </p:sp>
-      <p:sp>
-        <p:nvSpPr>
-          <p:cNvPr id="13" name="Rounded Rectangle 12"/>
-          <p:cNvSpPr/>
-          <p:nvPr/>
-        </p:nvSpPr>
-        <p:spPr>
-          <a:xfrm>
-            <a:off x="5248656" y="1920240"/>
-            <a:ext cx="1691640" cy="411480"/>
-          </a:xfrm>
-          <a:prstGeom prst="roundRect">
-            <a:avLst/>
-          </a:prstGeom>
-          <a:solidFill>
-            <a:srgbClr val="9E4A0C"/>
-          </a:solidFill>
-          <a:ln>
-            <a:noFill/>
-          </a:ln>
-        </p:spPr>
-        <p:style>
-          <a:lnRef idx="1">
-            <a:schemeClr val="accent1"/>
-          </a:lnRef>
-          <a:fillRef idx="3">
-            <a:schemeClr val="accent1"/>
-          </a:fillRef>
-          <a:effectRef idx="2">
-            <a:schemeClr val="accent1"/>
-          </a:effectRef>
-          <a:fontRef idx="minor">
-            <a:schemeClr val="lt1"/>
-          </a:fontRef>
-        </p:style>
-        <p:txBody>
-          <a:bodyPr rtlCol="0" anchor="ctr"/>
-          <a:lstStyle/>
-          <a:p>
-            <a:pPr algn="ctr">
-              <a:defRPr sz="1100" b="1">
-                <a:solidFill>
-                  <a:srgbClr val="FFFFFF"/>
-                </a:solidFill>
-              </a:defRPr>
-            </a:pPr>
-            <a:r>
-              <a:t>STEP 3</a:t>
-            </a:r>
-          </a:p>
-        </p:txBody>
-      </p:sp>
-      <p:sp>
-        <p:nvSpPr>
-          <p:cNvPr id="14" name="TextBox 13"/>
-          <p:cNvSpPr txBox="1"/>
-          <p:nvPr/>
-        </p:nvSpPr>
-        <p:spPr>
-          <a:xfrm>
-            <a:off x="5202936" y="2468880"/>
-            <a:ext cx="1783080" cy="3383280"/>
-          </a:xfrm>
-          <a:prstGeom prst="rect">
-            <a:avLst/>
-          </a:prstGeom>
-          <a:noFill/>
-        </p:spPr>
-        <p:txBody>
-          <a:bodyPr wrap="square">
-            <a:spAutoFit/>
-          </a:bodyPr>
-          <a:lstStyle/>
-          <a:p>
-            <a:pPr>
-              <a:spcAft>
-                <a:spcPts val="800"/>
-              </a:spcAft>
-              <a:defRPr sz="1400" b="1">
-                <a:solidFill>
-                  <a:srgbClr val="085444"/>
-                </a:solidFill>
-                <a:latin typeface="Georgia"/>
-              </a:defRPr>
-            </a:pPr>
-            <a:r>
-              <a:t>3. Fair Transit</a:t>
-            </a:r>
-          </a:p>
-          <a:p>
-            <a:pPr>
-              <a:defRPr sz="1050">
-                <a:solidFill>
-                  <a:srgbClr val="64746C"/>
-                </a:solidFill>
-                <a:latin typeface="Arial"/>
-              </a:defRPr>
-            </a:pPr>
-            <a:r>
-              <a:t>Checks Matador Route #1 to Raghunath Bazaar. Pays exact ₹15 fare; avoids cab touts quoting ₹400 for the same distance.</a:t>
-            </a:r>
-          </a:p>
-        </p:txBody>
-      </p:sp>
-      <p:sp>
-        <p:nvSpPr>
-          <p:cNvPr id="15" name="Rounded Rectangle 14"/>
-          <p:cNvSpPr/>
-          <p:nvPr/>
-        </p:nvSpPr>
-        <p:spPr>
-          <a:xfrm>
-            <a:off x="7232904" y="1737360"/>
-            <a:ext cx="2057400" cy="4297680"/>
-          </a:xfrm>
-          <a:prstGeom prst="roundRect">
-            <a:avLst/>
-          </a:prstGeom>
-          <a:solidFill>
-            <a:srgbClr val="FFFFFF"/>
-          </a:solidFill>
-          <a:ln w="12700">
-            <a:solidFill>
-              <a:srgbClr val="EBE4DC"/>
-            </a:solidFill>
-          </a:ln>
-        </p:spPr>
-        <p:style>
-          <a:lnRef idx="1">
-            <a:schemeClr val="accent1"/>
-          </a:lnRef>
-          <a:fillRef idx="3">
-            <a:schemeClr val="accent1"/>
-          </a:fillRef>
-          <a:effectRef idx="2">
-            <a:schemeClr val="accent1"/>
-          </a:effectRef>
-          <a:fontRef idx="minor">
-            <a:schemeClr val="lt1"/>
-          </a:fontRef>
-        </p:style>
-        <p:txBody>
-          <a:bodyPr rtlCol="0" anchor="ctr"/>
-          <a:lstStyle/>
-          <a:p>
-            <a:pPr algn="ctr"/>
-          </a:p>
-        </p:txBody>
-      </p:sp>
-      <p:sp>
-        <p:nvSpPr>
-          <p:cNvPr id="16" name="Rounded Rectangle 15"/>
-          <p:cNvSpPr/>
-          <p:nvPr/>
-        </p:nvSpPr>
-        <p:spPr>
-          <a:xfrm>
-            <a:off x="7415784" y="1920240"/>
-            <a:ext cx="1691640" cy="411480"/>
-          </a:xfrm>
-          <a:prstGeom prst="roundRect">
-            <a:avLst/>
-          </a:prstGeom>
-          <a:solidFill>
-            <a:srgbClr val="9E4A0C"/>
-          </a:solidFill>
-          <a:ln>
-            <a:noFill/>
-          </a:ln>
-        </p:spPr>
-        <p:style>
-          <a:lnRef idx="1">
-            <a:schemeClr val="accent1"/>
-          </a:lnRef>
-          <a:fillRef idx="3">
-            <a:schemeClr val="accent1"/>
-          </a:fillRef>
-          <a:effectRef idx="2">
-            <a:schemeClr val="accent1"/>
-          </a:effectRef>
-          <a:fontRef idx="minor">
-            <a:schemeClr val="lt1"/>
-          </a:fontRef>
-        </p:style>
-        <p:txBody>
-          <a:bodyPr rtlCol="0" anchor="ctr"/>
-          <a:lstStyle/>
-          <a:p>
-            <a:pPr algn="ctr">
-              <a:defRPr sz="1100" b="1">
-                <a:solidFill>
-                  <a:srgbClr val="FFFFFF"/>
-                </a:solidFill>
-              </a:defRPr>
-            </a:pPr>
-            <a:r>
-              <a:t>STEP 4</a:t>
-            </a:r>
-          </a:p>
-        </p:txBody>
-      </p:sp>
-      <p:sp>
-        <p:nvSpPr>
-          <p:cNvPr id="17" name="TextBox 16"/>
-          <p:cNvSpPr txBox="1"/>
-          <p:nvPr/>
-        </p:nvSpPr>
-        <p:spPr>
-          <a:xfrm>
-            <a:off x="7370064" y="2468880"/>
-            <a:ext cx="1783080" cy="3383280"/>
-          </a:xfrm>
-          <a:prstGeom prst="rect">
-            <a:avLst/>
-          </a:prstGeom>
-          <a:noFill/>
-        </p:spPr>
-        <p:txBody>
-          <a:bodyPr wrap="square">
-            <a:spAutoFit/>
-          </a:bodyPr>
-          <a:lstStyle/>
-          <a:p>
-            <a:pPr>
-              <a:spcAft>
-                <a:spcPts val="800"/>
-              </a:spcAft>
-              <a:defRPr sz="1400" b="1">
-                <a:solidFill>
-                  <a:srgbClr val="085444"/>
-                </a:solidFill>
-                <a:latin typeface="Georgia"/>
-              </a:defRPr>
-            </a:pPr>
-            <a:r>
-              <a:t>4. Cultural Dip</a:t>
-            </a:r>
-          </a:p>
-          <a:p>
-            <a:pPr>
-              <a:defRPr sz="1050">
-                <a:solidFill>
-                  <a:srgbClr val="64746C"/>
-                </a:solidFill>
-                <a:latin typeface="Arial"/>
-              </a:defRPr>
-            </a:pPr>
-            <a:r>
-              <a:t>Visits Raghunath Mandir, discovers verified Dogra Kaladi Kulcha with Jain/Pure Veg tag, and explores authentic Basohli handicraft shop.</a:t>
-            </a:r>
-          </a:p>
-        </p:txBody>
-      </p:sp>
-      <p:sp>
-        <p:nvSpPr>
-          <p:cNvPr id="18" name="Rounded Rectangle 17"/>
-          <p:cNvSpPr/>
-          <p:nvPr/>
-        </p:nvSpPr>
-        <p:spPr>
-          <a:xfrm>
-            <a:off x="9400032" y="1737360"/>
-            <a:ext cx="2057400" cy="4297680"/>
-          </a:xfrm>
-          <a:prstGeom prst="roundRect">
-            <a:avLst/>
-          </a:prstGeom>
-          <a:solidFill>
-            <a:srgbClr val="FFFFFF"/>
-          </a:solidFill>
-          <a:ln w="12700">
-            <a:solidFill>
-              <a:srgbClr val="EBE4DC"/>
-            </a:solidFill>
-          </a:ln>
-        </p:spPr>
-        <p:style>
-          <a:lnRef idx="1">
-            <a:schemeClr val="accent1"/>
-          </a:lnRef>
-          <a:fillRef idx="3">
-            <a:schemeClr val="accent1"/>
-          </a:fillRef>
-          <a:effectRef idx="2">
-            <a:schemeClr val="accent1"/>
-          </a:effectRef>
-          <a:fontRef idx="minor">
-            <a:schemeClr val="lt1"/>
-          </a:fontRef>
-        </p:style>
-        <p:txBody>
-          <a:bodyPr rtlCol="0" anchor="ctr"/>
-          <a:lstStyle/>
-          <a:p>
-            <a:pPr algn="ctr"/>
-          </a:p>
-        </p:txBody>
-      </p:sp>
-      <p:sp>
-        <p:nvSpPr>
-          <p:cNvPr id="19" name="Rounded Rectangle 18"/>
-          <p:cNvSpPr/>
-          <p:nvPr/>
-        </p:nvSpPr>
-        <p:spPr>
-          <a:xfrm>
-            <a:off x="9582912" y="1920240"/>
-            <a:ext cx="1691640" cy="411480"/>
-          </a:xfrm>
-          <a:prstGeom prst="roundRect">
-            <a:avLst/>
-          </a:prstGeom>
-          <a:solidFill>
-            <a:srgbClr val="9E4A0C"/>
-          </a:solidFill>
-          <a:ln>
-            <a:noFill/>
-          </a:ln>
-        </p:spPr>
-        <p:style>
-          <a:lnRef idx="1">
-            <a:schemeClr val="accent1"/>
-          </a:lnRef>
-          <a:fillRef idx="3">
-            <a:schemeClr val="accent1"/>
-          </a:fillRef>
-          <a:effectRef idx="2">
-            <a:schemeClr val="accent1"/>
-          </a:effectRef>
-          <a:fontRef idx="minor">
-            <a:schemeClr val="lt1"/>
-          </a:fontRef>
-        </p:style>
-        <p:txBody>
-          <a:bodyPr rtlCol="0" anchor="ctr"/>
-          <a:lstStyle/>
-          <a:p>
-            <a:pPr algn="ctr">
-              <a:defRPr sz="1100" b="1">
-                <a:solidFill>
-                  <a:srgbClr val="FFFFFF"/>
-                </a:solidFill>
-              </a:defRPr>
-            </a:pPr>
-            <a:r>
-              <a:t>STEP 5</a:t>
-            </a:r>
-          </a:p>
-        </p:txBody>
-      </p:sp>
-      <p:sp>
-        <p:nvSpPr>
-          <p:cNvPr id="20" name="TextBox 19"/>
-          <p:cNvSpPr txBox="1"/>
-          <p:nvPr/>
-        </p:nvSpPr>
-        <p:spPr>
-          <a:xfrm>
-            <a:off x="9537192" y="2468880"/>
-            <a:ext cx="1783080" cy="3383280"/>
-          </a:xfrm>
-          <a:prstGeom prst="rect">
-            <a:avLst/>
-          </a:prstGeom>
-          <a:noFill/>
-        </p:spPr>
-        <p:txBody>
-          <a:bodyPr wrap="square">
-            <a:spAutoFit/>
-          </a:bodyPr>
-          <a:lstStyle/>
-          <a:p>
-            <a:pPr>
-              <a:spcAft>
-                <a:spcPts val="800"/>
-              </a:spcAft>
-              <a:defRPr sz="1400" b="1">
-                <a:solidFill>
-                  <a:srgbClr val="085444"/>
-                </a:solidFill>
-                <a:latin typeface="Georgia"/>
-              </a:defRPr>
-            </a:pPr>
-            <a:r>
-              <a:t>5. Safe Transit</a:t>
-            </a:r>
-          </a:p>
-          <a:p>
-            <a:pPr>
-              <a:defRPr sz="1050">
-                <a:solidFill>
-                  <a:srgbClr val="64746C"/>
-                </a:solidFill>
-                <a:latin typeface="Arial"/>
-              </a:defRPr>
-            </a:pPr>
-            <a:r>
-              <a:t>Arrives back at Jammu Tawi with 50 minutes to spare. Smoothly boards onward Vande Bharat Express to Katra with complete peace of mind.</a:t>
-            </a:r>
-          </a:p>
-        </p:txBody>
-      </p:sp>
-      <p:sp>
-        <p:nvSpPr>
-          <p:cNvPr id="21" name="TextBox 20"/>
+        </p:spPr>
+      </p:pic>
+      <p:sp>
+        <p:nvSpPr>
+          <p:cNvPr id="10" name="TextBox 9"/>
           <p:cNvSpPr txBox="1"/>
           <p:nvPr/>
         </p:nvSpPr>
@@ -6897,15 +6693,15 @@
           <a:lstStyle/>
           <a:p>
             <a:pPr>
-              <a:defRPr sz="950">
-                <a:solidFill>
-                  <a:srgbClr val="64746C"/>
+              <a:defRPr sz="900">
+                <a:solidFill>
+                  <a:srgbClr val="5F6E67"/>
                 </a:solidFill>
                 <a:latin typeface="Arial"/>
               </a:defRPr>
             </a:pPr>
             <a:r>
-              <a:t>JammuKhoj • Smart Tourism &amp; Pilgrim Companion • https://jammukhoj.in</a:t>
+              <a:t>JammuKhoj • Smart Tourism &amp; Pilgrim Companion • Live App: https://jammukhoj.in</a:t>
             </a:r>
           </a:p>
         </p:txBody>
@@ -6943,7 +6739,7 @@
             <a:avLst/>
           </a:prstGeom>
           <a:solidFill>
-            <a:srgbClr val="FBF9F5"/>
+            <a:srgbClr val="FAF7F2"/>
           </a:solidFill>
           <a:ln>
             <a:noFill/>
@@ -6979,8 +6775,8 @@
         </p:nvSpPr>
         <p:spPr>
           <a:xfrm>
-            <a:off x="731520" y="411480"/>
-            <a:ext cx="9144000" cy="365760"/>
+            <a:off x="731520" y="384048"/>
+            <a:ext cx="9144000" cy="320040"/>
           </a:xfrm>
           <a:prstGeom prst="rect">
             <a:avLst/>
@@ -6994,15 +6790,15 @@
           <a:lstStyle/>
           <a:p>
             <a:pPr>
-              <a:defRPr sz="1100" b="1">
-                <a:solidFill>
-                  <a:srgbClr val="9E4A0C"/>
+              <a:defRPr sz="1050" b="1">
+                <a:solidFill>
+                  <a:srgbClr val="A84D0E"/>
                 </a:solidFill>
                 <a:latin typeface="Arial"/>
               </a:defRPr>
             </a:pPr>
             <a:r>
-              <a:t>06 | COMPETITIVE DIFFERENTIATION</a:t>
+              <a:t>06 • COMPETITIVE DIFFERENTIATION</a:t>
             </a:r>
           </a:p>
         </p:txBody>
@@ -7015,8 +6811,8 @@
         </p:nvSpPr>
         <p:spPr>
           <a:xfrm>
-            <a:off x="731520" y="731520"/>
-            <a:ext cx="10515600" cy="594360"/>
+            <a:off x="731520" y="676656"/>
+            <a:ext cx="10698480" cy="594360"/>
           </a:xfrm>
           <a:prstGeom prst="rect">
             <a:avLst/>
@@ -7030,15 +6826,15 @@
           <a:lstStyle/>
           <a:p>
             <a:pPr>
-              <a:defRPr sz="2400" b="1">
-                <a:solidFill>
-                  <a:srgbClr val="085444"/>
+              <a:defRPr sz="2300" b="1">
+                <a:solidFill>
+                  <a:srgbClr val="0B3D33"/>
                 </a:solidFill>
                 <a:latin typeface="Georgia"/>
               </a:defRPr>
             </a:pPr>
             <a:r>
-              <a:t>How JammuKhoj Solves What Generic Travel Apps Miss</a:t>
+              <a:t>How JammuKhoj Outperforms Generic Travel Platforms</a:t>
             </a:r>
           </a:p>
         </p:txBody>
@@ -7051,8 +6847,8 @@
         </p:nvSpPr>
         <p:spPr>
           <a:xfrm>
-            <a:off x="731520" y="1298448"/>
-            <a:ext cx="10515600" cy="365760"/>
+            <a:off x="731520" y="1243584"/>
+            <a:ext cx="10698480" cy="365760"/>
           </a:xfrm>
           <a:prstGeom prst="rect">
             <a:avLst/>
@@ -7066,9 +6862,9 @@
           <a:lstStyle/>
           <a:p>
             <a:pPr>
-              <a:defRPr sz="1300">
-                <a:solidFill>
-                  <a:srgbClr val="64746C"/>
+              <a:defRPr sz="1150">
+                <a:solidFill>
+                  <a:srgbClr val="5F6E67"/>
                 </a:solidFill>
                 <a:latin typeface="Arial"/>
               </a:defRPr>
@@ -7088,8 +6884,8 @@
           <p:nvPr/>
         </p:nvGraphicFramePr>
         <p:xfrm>
-          <a:off x="731520" y="1737360"/>
-          <a:ext cx="10728655" cy="4297680"/>
+          <a:off x="731520" y="1691640"/>
+          <a:ext cx="7772400" cy="4480560"/>
         </p:xfrm>
         <a:graphic>
           <a:graphicData uri="http://schemas.openxmlformats.org/drawingml/2006/table">
@@ -7098,32 +6894,32 @@
                 <a:tableStyleId>{5C22544A-7EE6-4342-B048-85BDC9FD1C3A}</a:tableStyleId>
               </a:tblPr>
               <a:tblGrid>
-                <a:gridCol w="2560320"/>
-                <a:gridCol w="2560320"/>
-                <a:gridCol w="2560320"/>
-                <a:gridCol w="3047695"/>
+                <a:gridCol w="1737360"/>
+                <a:gridCol w="1920240"/>
+                <a:gridCol w="1920240"/>
+                <a:gridCol w="2194560"/>
               </a:tblGrid>
-              <a:tr h="716280">
+              <a:tr h="746760">
                 <a:tc>
                   <a:txBody>
                     <a:bodyPr/>
                     <a:lstStyle/>
                     <a:p>
                       <a:pPr>
-                        <a:defRPr sz="1200" b="1">
+                        <a:defRPr sz="1050" b="1">
                           <a:solidFill>
                             <a:srgbClr val="FFFFFF"/>
                           </a:solidFill>
                         </a:defRPr>
                       </a:pPr>
                       <a:r>
-                        <a:t>Feature Dimension</a:t>
+                        <a:t>Dimension</a:t>
                       </a:r>
                     </a:p>
                   </a:txBody>
                   <a:tcPr>
                     <a:solidFill>
-                      <a:srgbClr val="123E38"/>
+                      <a:srgbClr val="07241E"/>
                     </a:solidFill>
                   </a:tcPr>
                 </a:tc>
@@ -7133,7 +6929,7 @@
                     <a:lstStyle/>
                     <a:p>
                       <a:pPr>
-                        <a:defRPr sz="1200" b="1">
+                        <a:defRPr sz="1050" b="1">
                           <a:solidFill>
                             <a:srgbClr val="FFFFFF"/>
                           </a:solidFill>
@@ -7146,7 +6942,7 @@
                   </a:txBody>
                   <a:tcPr>
                     <a:solidFill>
-                      <a:srgbClr val="123E38"/>
+                      <a:srgbClr val="07241E"/>
                     </a:solidFill>
                   </a:tcPr>
                 </a:tc>
@@ -7156,20 +6952,20 @@
                     <a:lstStyle/>
                     <a:p>
                       <a:pPr>
-                        <a:defRPr sz="1200" b="1">
+                        <a:defRPr sz="1050" b="1">
                           <a:solidFill>
                             <a:srgbClr val="FFFFFF"/>
                           </a:solidFill>
                         </a:defRPr>
                       </a:pPr>
                       <a:r>
-                        <a:t>MakeMyTrip / OTA</a:t>
+                        <a:t>MakeMyTrip / OTAs</a:t>
                       </a:r>
                     </a:p>
                   </a:txBody>
                   <a:tcPr>
                     <a:solidFill>
-                      <a:srgbClr val="123E38"/>
+                      <a:srgbClr val="07241E"/>
                     </a:solidFill>
                   </a:tcPr>
                 </a:tc>
@@ -7179,34 +6975,34 @@
                     <a:lstStyle/>
                     <a:p>
                       <a:pPr>
-                        <a:defRPr sz="1200" b="1">
+                        <a:defRPr sz="1050" b="1">
                           <a:solidFill>
-                            <a:srgbClr val="D97706"/>
+                            <a:srgbClr val="D98210"/>
                           </a:solidFill>
                         </a:defRPr>
                       </a:pPr>
                       <a:r>
-                        <a:t>JammuKhoj (Our Solution)</a:t>
+                        <a:t>JammuKhoj (Our App)</a:t>
                       </a:r>
                     </a:p>
                   </a:txBody>
                   <a:tcPr>
                     <a:solidFill>
-                      <a:srgbClr val="085444"/>
+                      <a:srgbClr val="0B3D33"/>
                     </a:solidFill>
                   </a:tcPr>
                 </a:tc>
               </a:tr>
-              <a:tr h="716280">
+              <a:tr h="746760">
                 <a:tc>
                   <a:txBody>
                     <a:bodyPr/>
                     <a:lstStyle/>
                     <a:p>
                       <a:pPr>
-                        <a:defRPr sz="1000" b="1">
+                        <a:defRPr sz="950" b="1">
                           <a:solidFill>
-                            <a:srgbClr val="1C2923"/>
+                            <a:srgbClr val="18221E"/>
                           </a:solidFill>
                           <a:latin typeface="Arial"/>
                         </a:defRPr>
@@ -7228,15 +7024,15 @@
                     <a:lstStyle/>
                     <a:p>
                       <a:pPr>
-                        <a:defRPr sz="1000">
+                        <a:defRPr sz="950">
                           <a:solidFill>
-                            <a:srgbClr val="64746C"/>
+                            <a:srgbClr val="5F6E67"/>
                           </a:solidFill>
                           <a:latin typeface="Arial"/>
                         </a:defRPr>
                       </a:pPr>
                       <a:r>
-                        <a:t>Requires data for routes &amp; searches; fails in remote mountain spots</a:t>
+                        <a:t>Fails in mountain tunnels &amp; valleys</a:t>
                       </a:r>
                     </a:p>
                   </a:txBody>
@@ -7252,15 +7048,15 @@
                     <a:lstStyle/>
                     <a:p>
                       <a:pPr>
-                        <a:defRPr sz="1000">
+                        <a:defRPr sz="950">
                           <a:solidFill>
-                            <a:srgbClr val="64746C"/>
+                            <a:srgbClr val="5F6E67"/>
                           </a:solidFill>
                           <a:latin typeface="Arial"/>
                         </a:defRPr>
                       </a:pPr>
                       <a:r>
-                        <a:t>100% online; fails without mobile connectivity</a:t>
+                        <a:t>100% online only; unusable offline</a:t>
                       </a:r>
                     </a:p>
                   </a:txBody>
@@ -7276,47 +7072,47 @@
                     <a:lstStyle/>
                     <a:p>
                       <a:pPr>
-                        <a:defRPr sz="1000" b="1">
+                        <a:defRPr sz="950" b="1">
                           <a:solidFill>
-                            <a:srgbClr val="085444"/>
+                            <a:srgbClr val="0B3D33"/>
                           </a:solidFill>
                           <a:latin typeface="Arial"/>
                         </a:defRPr>
                       </a:pPr>
                       <a:r>
-                        <a:t>100% On-Device IndexedDB; full routing, cards &amp; search offline</a:t>
+                        <a:t>100% On-Device IndexedDB</a:t>
                       </a:r>
                     </a:p>
                   </a:txBody>
                   <a:tcPr>
                     <a:solidFill>
-                      <a:srgbClr val="FFFFFF"/>
+                      <a:srgbClr val="EEF7F2"/>
                     </a:solidFill>
                   </a:tcPr>
                 </a:tc>
               </a:tr>
-              <a:tr h="716280">
+              <a:tr h="746760">
                 <a:tc>
                   <a:txBody>
                     <a:bodyPr/>
                     <a:lstStyle/>
                     <a:p>
                       <a:pPr>
-                        <a:defRPr sz="1000" b="1">
+                        <a:defRPr sz="950" b="1">
                           <a:solidFill>
-                            <a:srgbClr val="1C2923"/>
+                            <a:srgbClr val="18221E"/>
                           </a:solidFill>
                           <a:latin typeface="Arial"/>
                         </a:defRPr>
                       </a:pPr>
                       <a:r>
-                        <a:t>Time-Budget Safe Planning</a:t>
+                        <a:t>Safe Buffer Planner</a:t>
                       </a:r>
                     </a:p>
                   </a:txBody>
                   <a:tcPr>
                     <a:solidFill>
-                      <a:srgbClr val="F3EFEA"/>
+                      <a:srgbClr val="F3EEE6"/>
                     </a:solidFill>
                   </a:tcPr>
                 </a:tc>
@@ -7326,21 +7122,21 @@
                     <a:lstStyle/>
                     <a:p>
                       <a:pPr>
-                        <a:defRPr sz="1000">
+                        <a:defRPr sz="950">
                           <a:solidFill>
-                            <a:srgbClr val="64746C"/>
+                            <a:srgbClr val="5F6E67"/>
                           </a:solidFill>
                           <a:latin typeface="Arial"/>
                         </a:defRPr>
                       </a:pPr>
                       <a:r>
-                        <a:t>Point-to-point only; ignores train/flight layover deadlines</a:t>
+                        <a:t>Ignores train layover deadlines</a:t>
                       </a:r>
                     </a:p>
                   </a:txBody>
                   <a:tcPr>
                     <a:solidFill>
-                      <a:srgbClr val="F3EFEA"/>
+                      <a:srgbClr val="F3EEE6"/>
                     </a:solidFill>
                   </a:tcPr>
                 </a:tc>
@@ -7350,21 +7146,21 @@
                     <a:lstStyle/>
                     <a:p>
                       <a:pPr>
-                        <a:defRPr sz="1000">
+                        <a:defRPr sz="950">
                           <a:solidFill>
-                            <a:srgbClr val="64746C"/>
+                            <a:srgbClr val="5F6E67"/>
                           </a:solidFill>
                           <a:latin typeface="Arial"/>
                         </a:defRPr>
                       </a:pPr>
                       <a:r>
-                        <a:t>Rigid tour packages; no layover customization</a:t>
+                        <a:t>Rigid commercial packages only</a:t>
                       </a:r>
                     </a:p>
                   </a:txBody>
                   <a:tcPr>
                     <a:solidFill>
-                      <a:srgbClr val="F3EFEA"/>
+                      <a:srgbClr val="F3EEE6"/>
                     </a:solidFill>
                   </a:tcPr>
                 </a:tc>
@@ -7374,41 +7170,41 @@
                     <a:lstStyle/>
                     <a:p>
                       <a:pPr>
-                        <a:defRPr sz="1000" b="1">
+                        <a:defRPr sz="950" b="1">
                           <a:solidFill>
-                            <a:srgbClr val="085444"/>
+                            <a:srgbClr val="0B3D33"/>
                           </a:solidFill>
                           <a:latin typeface="Arial"/>
                         </a:defRPr>
                       </a:pPr>
                       <a:r>
-                        <a:t>Dynamic 4h/8h/24h buffer engine; never misses your train</a:t>
+                        <a:t>45m rail &amp; 150m air locks</a:t>
                       </a:r>
                     </a:p>
                   </a:txBody>
                   <a:tcPr>
                     <a:solidFill>
-                      <a:srgbClr val="F3EFEA"/>
+                      <a:srgbClr val="EEF7F2"/>
                     </a:solidFill>
                   </a:tcPr>
                 </a:tc>
               </a:tr>
-              <a:tr h="716280">
+              <a:tr h="746760">
                 <a:tc>
                   <a:txBody>
                     <a:bodyPr/>
                     <a:lstStyle/>
                     <a:p>
                       <a:pPr>
-                        <a:defRPr sz="1000" b="1">
+                        <a:defRPr sz="950" b="1">
                           <a:solidFill>
-                            <a:srgbClr val="1C2923"/>
+                            <a:srgbClr val="18221E"/>
                           </a:solidFill>
                           <a:latin typeface="Arial"/>
                         </a:defRPr>
                       </a:pPr>
                       <a:r>
-                        <a:t>Local Transit Transparency</a:t>
+                        <a:t>Transit Tariffs</a:t>
                       </a:r>
                     </a:p>
                   </a:txBody>
@@ -7424,15 +7220,15 @@
                     <a:lstStyle/>
                     <a:p>
                       <a:pPr>
-                        <a:defRPr sz="1000">
+                        <a:defRPr sz="950">
                           <a:solidFill>
-                            <a:srgbClr val="64746C"/>
+                            <a:srgbClr val="5F6E67"/>
                           </a:solidFill>
                           <a:latin typeface="Arial"/>
                         </a:defRPr>
                       </a:pPr>
                       <a:r>
-                        <a:t>No Matador routes; no fare benchmarks</a:t>
+                        <a:t>No Matadors; no fare benchmarks</a:t>
                       </a:r>
                     </a:p>
                   </a:txBody>
@@ -7448,15 +7244,15 @@
                     <a:lstStyle/>
                     <a:p>
                       <a:pPr>
-                        <a:defRPr sz="1000">
+                        <a:defRPr sz="950">
                           <a:solidFill>
-                            <a:srgbClr val="64746C"/>
+                            <a:srgbClr val="5F6E67"/>
                           </a:solidFill>
                           <a:latin typeface="Arial"/>
                         </a:defRPr>
                       </a:pPr>
                       <a:r>
-                        <a:t>Only commercial prepaid cabs at high markup</a:t>
+                        <a:t>Commercial cabs at high markup</a:t>
                       </a:r>
                     </a:p>
                   </a:txBody>
@@ -7472,35 +7268,35 @@
                     <a:lstStyle/>
                     <a:p>
                       <a:pPr>
-                        <a:defRPr sz="1000" b="1">
+                        <a:defRPr sz="950" b="1">
                           <a:solidFill>
-                            <a:srgbClr val="085444"/>
+                            <a:srgbClr val="0B3D33"/>
                           </a:solidFill>
                           <a:latin typeface="Arial"/>
                         </a:defRPr>
                       </a:pPr>
                       <a:r>
-                        <a:t>Complete Matador route guide (₹10-25) + Auto &amp; Taxi Union benchmarks</a:t>
+                        <a:t>Matadors (₹10-25) + Taxi matrices</a:t>
                       </a:r>
                     </a:p>
                   </a:txBody>
                   <a:tcPr>
                     <a:solidFill>
-                      <a:srgbClr val="FFFFFF"/>
+                      <a:srgbClr val="EEF7F2"/>
                     </a:solidFill>
                   </a:tcPr>
                 </a:tc>
               </a:tr>
-              <a:tr h="716280">
+              <a:tr h="746760">
                 <a:tc>
                   <a:txBody>
                     <a:bodyPr/>
                     <a:lstStyle/>
                     <a:p>
                       <a:pPr>
-                        <a:defRPr sz="1000" b="1">
+                        <a:defRPr sz="950" b="1">
                           <a:solidFill>
-                            <a:srgbClr val="1C2923"/>
+                            <a:srgbClr val="18221E"/>
                           </a:solidFill>
                           <a:latin typeface="Arial"/>
                         </a:defRPr>
@@ -7512,7 +7308,7 @@
                   </a:txBody>
                   <a:tcPr>
                     <a:solidFill>
-                      <a:srgbClr val="F3EFEA"/>
+                      <a:srgbClr val="F3EEE6"/>
                     </a:solidFill>
                   </a:tcPr>
                 </a:tc>
@@ -7522,21 +7318,21 @@
                     <a:lstStyle/>
                     <a:p>
                       <a:pPr>
-                        <a:defRPr sz="1000">
+                        <a:defRPr sz="950">
                           <a:solidFill>
-                            <a:srgbClr val="64746C"/>
+                            <a:srgbClr val="5F6E67"/>
                           </a:solidFill>
                           <a:latin typeface="Arial"/>
                         </a:defRPr>
                       </a:pPr>
                       <a:r>
-                        <a:t>No walking load or step-free data for temples</a:t>
+                        <a:t>No stair counts or walking load</a:t>
                       </a:r>
                     </a:p>
                   </a:txBody>
                   <a:tcPr>
                     <a:solidFill>
-                      <a:srgbClr val="F3EFEA"/>
+                      <a:srgbClr val="F3EEE6"/>
                     </a:solidFill>
                   </a:tcPr>
                 </a:tc>
@@ -7546,21 +7342,21 @@
                     <a:lstStyle/>
                     <a:p>
                       <a:pPr>
-                        <a:defRPr sz="1000">
+                        <a:defRPr sz="950">
                           <a:solidFill>
-                            <a:srgbClr val="64746C"/>
+                            <a:srgbClr val="5F6E67"/>
                           </a:solidFill>
                           <a:latin typeface="Arial"/>
                         </a:defRPr>
                       </a:pPr>
                       <a:r>
-                        <a:t>Standard generic hotel packages</a:t>
+                        <a:t>Generic packages</a:t>
                       </a:r>
                     </a:p>
                   </a:txBody>
                   <a:tcPr>
                     <a:solidFill>
-                      <a:srgbClr val="F3EFEA"/>
+                      <a:srgbClr val="F3EEE6"/>
                     </a:solidFill>
                   </a:tcPr>
                 </a:tc>
@@ -7570,35 +7366,35 @@
                     <a:lstStyle/>
                     <a:p>
                       <a:pPr>
-                        <a:defRPr sz="1000" b="1">
+                        <a:defRPr sz="950" b="1">
                           <a:solidFill>
-                            <a:srgbClr val="085444"/>
+                            <a:srgbClr val="0B3D33"/>
                           </a:solidFill>
                           <a:latin typeface="Arial"/>
                         </a:defRPr>
                       </a:pPr>
                       <a:r>
-                        <a:t>Step-free badges, walking load (low/med/high), battery car rules</a:t>
+                        <a:t>Senior Ease Mode &amp; step-free tags</a:t>
                       </a:r>
                     </a:p>
                   </a:txBody>
                   <a:tcPr>
                     <a:solidFill>
-                      <a:srgbClr val="F3EFEA"/>
+                      <a:srgbClr val="EEF7F2"/>
                     </a:solidFill>
                   </a:tcPr>
                 </a:tc>
               </a:tr>
-              <a:tr h="716280">
+              <a:tr h="746760">
                 <a:tc>
                   <a:txBody>
                     <a:bodyPr/>
                     <a:lstStyle/>
                     <a:p>
                       <a:pPr>
-                        <a:defRPr sz="1000" b="1">
+                        <a:defRPr sz="950" b="1">
                           <a:solidFill>
-                            <a:srgbClr val="1C2923"/>
+                            <a:srgbClr val="18221E"/>
                           </a:solidFill>
                           <a:latin typeface="Arial"/>
                         </a:defRPr>
@@ -7620,15 +7416,15 @@
                     <a:lstStyle/>
                     <a:p>
                       <a:pPr>
-                        <a:defRPr sz="1000">
+                        <a:defRPr sz="950">
                           <a:solidFill>
-                            <a:srgbClr val="64746C"/>
+                            <a:srgbClr val="5F6E67"/>
                           </a:solidFill>
                           <a:latin typeface="Arial"/>
                         </a:defRPr>
                       </a:pPr>
                       <a:r>
-                        <a:t>Pervasive ad-tracking, profiling &amp; location logs</a:t>
+                        <a:t>Ad-tracking &amp; location profiling</a:t>
                       </a:r>
                     </a:p>
                   </a:txBody>
@@ -7644,15 +7440,15 @@
                     <a:lstStyle/>
                     <a:p>
                       <a:pPr>
-                        <a:defRPr sz="1000">
+                        <a:defRPr sz="950">
                           <a:solidFill>
-                            <a:srgbClr val="64746C"/>
+                            <a:srgbClr val="5F6E67"/>
                           </a:solidFill>
                           <a:latin typeface="Arial"/>
                         </a:defRPr>
                       </a:pPr>
                       <a:r>
-                        <a:t>Monetizes user data with aggressive ads</a:t>
+                        <a:t>Monetizes user contact data</a:t>
                       </a:r>
                     </a:p>
                   </a:txBody>
@@ -7668,21 +7464,21 @@
                     <a:lstStyle/>
                     <a:p>
                       <a:pPr>
-                        <a:defRPr sz="1000" b="1">
+                        <a:defRPr sz="950" b="1">
                           <a:solidFill>
-                            <a:srgbClr val="085444"/>
+                            <a:srgbClr val="0B3D33"/>
                           </a:solidFill>
                           <a:latin typeface="Arial"/>
                         </a:defRPr>
                       </a:pPr>
                       <a:r>
-                        <a:t>Zero cookies, zero surveillance, 100% client-side privacy</a:t>
+                        <a:t>Zero cookies, zero surveillance</a:t>
                       </a:r>
                     </a:p>
                   </a:txBody>
                   <a:tcPr>
                     <a:solidFill>
-                      <a:srgbClr val="FFFFFF"/>
+                      <a:srgbClr val="EEF7F2"/>
                     </a:solidFill>
                   </a:tcPr>
                 </a:tc>
@@ -7693,7 +7489,76 @@
       </p:graphicFrame>
       <p:sp>
         <p:nvSpPr>
-          <p:cNvPr id="7" name="TextBox 6"/>
+          <p:cNvPr id="7" name="Rounded Rectangle 6"/>
+          <p:cNvSpPr/>
+          <p:nvPr/>
+        </p:nvSpPr>
+        <p:spPr>
+          <a:xfrm>
+            <a:off x="8778240" y="1691640"/>
+            <a:ext cx="2681935" cy="4480560"/>
+          </a:xfrm>
+          <a:prstGeom prst="roundRect">
+            <a:avLst/>
+          </a:prstGeom>
+          <a:solidFill>
+            <a:srgbClr val="141A18"/>
+          </a:solidFill>
+          <a:ln w="19050">
+            <a:solidFill>
+              <a:srgbClr val="D98210"/>
+            </a:solidFill>
+          </a:ln>
+        </p:spPr>
+        <p:style>
+          <a:lnRef idx="1">
+            <a:schemeClr val="accent1"/>
+          </a:lnRef>
+          <a:fillRef idx="3">
+            <a:schemeClr val="accent1"/>
+          </a:fillRef>
+          <a:effectRef idx="2">
+            <a:schemeClr val="accent1"/>
+          </a:effectRef>
+          <a:fontRef idx="minor">
+            <a:schemeClr val="lt1"/>
+          </a:fontRef>
+        </p:style>
+        <p:txBody>
+          <a:bodyPr rtlCol="0" anchor="ctr"/>
+          <a:lstStyle/>
+          <a:p>
+            <a:pPr algn="ctr"/>
+          </a:p>
+        </p:txBody>
+      </p:sp>
+      <p:pic>
+        <p:nvPicPr>
+          <p:cNvPr id="8" name="Picture 7" descr="app_explore_screen.png"/>
+          <p:cNvPicPr>
+            <a:picLocks noChangeAspect="1"/>
+          </p:cNvPicPr>
+          <p:nvPr/>
+        </p:nvPicPr>
+        <p:blipFill>
+          <a:blip r:embed="rId2"/>
+          <a:stretch>
+            <a:fillRect/>
+          </a:stretch>
+        </p:blipFill>
+        <p:spPr>
+          <a:xfrm>
+            <a:off x="8851392" y="1764792"/>
+            <a:ext cx="2535631" cy="4334256"/>
+          </a:xfrm>
+          <a:prstGeom prst="rect">
+            <a:avLst/>
+          </a:prstGeom>
+        </p:spPr>
+      </p:pic>
+      <p:sp>
+        <p:nvSpPr>
+          <p:cNvPr id="9" name="TextBox 8"/>
           <p:cNvSpPr txBox="1"/>
           <p:nvPr/>
         </p:nvSpPr>
@@ -7714,15 +7579,15 @@
           <a:lstStyle/>
           <a:p>
             <a:pPr>
-              <a:defRPr sz="950">
-                <a:solidFill>
-                  <a:srgbClr val="64746C"/>
+              <a:defRPr sz="900">
+                <a:solidFill>
+                  <a:srgbClr val="5F6E67"/>
                 </a:solidFill>
                 <a:latin typeface="Arial"/>
               </a:defRPr>
             </a:pPr>
             <a:r>
-              <a:t>JammuKhoj • Smart Tourism &amp; Pilgrim Companion • https://jammukhoj.in</a:t>
+              <a:t>JammuKhoj • Smart Tourism &amp; Pilgrim Companion • Live App: https://jammukhoj.in</a:t>
             </a:r>
           </a:p>
         </p:txBody>
@@ -7760,7 +7625,7 @@
             <a:avLst/>
           </a:prstGeom>
           <a:solidFill>
-            <a:srgbClr val="FBF9F5"/>
+            <a:srgbClr val="FAF7F2"/>
           </a:solidFill>
           <a:ln>
             <a:noFill/>
@@ -7796,8 +7661,8 @@
         </p:nvSpPr>
         <p:spPr>
           <a:xfrm>
-            <a:off x="731520" y="411480"/>
-            <a:ext cx="9144000" cy="365760"/>
+            <a:off x="731520" y="384048"/>
+            <a:ext cx="9144000" cy="320040"/>
           </a:xfrm>
           <a:prstGeom prst="rect">
             <a:avLst/>
@@ -7811,15 +7676,15 @@
           <a:lstStyle/>
           <a:p>
             <a:pPr>
-              <a:defRPr sz="1100" b="1">
-                <a:solidFill>
-                  <a:srgbClr val="9E4A0C"/>
+              <a:defRPr sz="1050" b="1">
+                <a:solidFill>
+                  <a:srgbClr val="A84D0E"/>
                 </a:solidFill>
                 <a:latin typeface="Arial"/>
               </a:defRPr>
             </a:pPr>
             <a:r>
-              <a:t>07 | IMPACT &amp; METRICS</a:t>
+              <a:t>07 • IMPACT &amp; METRICS</a:t>
             </a:r>
           </a:p>
         </p:txBody>
@@ -7832,8 +7697,8 @@
         </p:nvSpPr>
         <p:spPr>
           <a:xfrm>
-            <a:off x="731520" y="731520"/>
-            <a:ext cx="10515600" cy="594360"/>
+            <a:off x="731520" y="676656"/>
+            <a:ext cx="10698480" cy="594360"/>
           </a:xfrm>
           <a:prstGeom prst="rect">
             <a:avLst/>
@@ -7847,9 +7712,9 @@
           <a:lstStyle/>
           <a:p>
             <a:pPr>
-              <a:defRPr sz="2400" b="1">
-                <a:solidFill>
-                  <a:srgbClr val="085444"/>
+              <a:defRPr sz="2300" b="1">
+                <a:solidFill>
+                  <a:srgbClr val="0B3D33"/>
                 </a:solidFill>
                 <a:latin typeface="Georgia"/>
               </a:defRPr>
@@ -7868,8 +7733,8 @@
         </p:nvSpPr>
         <p:spPr>
           <a:xfrm>
-            <a:off x="731520" y="1298448"/>
-            <a:ext cx="10515600" cy="365760"/>
+            <a:off x="731520" y="1243584"/>
+            <a:ext cx="10698480" cy="365760"/>
           </a:xfrm>
           <a:prstGeom prst="rect">
             <a:avLst/>
@@ -7883,15 +7748,15 @@
           <a:lstStyle/>
           <a:p>
             <a:pPr>
-              <a:defRPr sz="1300">
-                <a:solidFill>
-                  <a:srgbClr val="64746C"/>
+              <a:defRPr sz="1150">
+                <a:solidFill>
+                  <a:srgbClr val="5F6E67"/>
                 </a:solidFill>
                 <a:latin typeface="Arial"/>
               </a:defRPr>
             </a:pPr>
             <a:r>
-              <a:t>High-leverage impact for local artisans, transit riders, and pilgrim safety.</a:t>
+              <a:t>High-leverage socio-economic returns for pilgrims, local businesses, and municipal transit.</a:t>
             </a:r>
           </a:p>
         </p:txBody>
@@ -7904,18 +7769,18 @@
         </p:nvSpPr>
         <p:spPr>
           <a:xfrm>
-            <a:off x="731520" y="1737360"/>
-            <a:ext cx="2560320" cy="2011680"/>
+            <a:off x="731520" y="1691640"/>
+            <a:ext cx="2560320" cy="1783080"/>
           </a:xfrm>
           <a:prstGeom prst="roundRect">
             <a:avLst/>
           </a:prstGeom>
           <a:solidFill>
-            <a:srgbClr val="085444"/>
+            <a:srgbClr val="0B3D33"/>
           </a:solidFill>
           <a:ln w="12700">
             <a:solidFill>
-              <a:srgbClr val="EBE4DC"/>
+              <a:srgbClr val="E4DCD2"/>
             </a:solidFill>
           </a:ln>
         </p:spPr>
@@ -7949,8 +7814,8 @@
         </p:nvSpPr>
         <p:spPr>
           <a:xfrm>
-            <a:off x="868680" y="1874519"/>
-            <a:ext cx="2286000" cy="1737360"/>
+            <a:off x="841248" y="1783080"/>
+            <a:ext cx="2340864" cy="1600200"/>
           </a:xfrm>
           <a:prstGeom prst="rect">
             <a:avLst/>
@@ -7964,9 +7829,9 @@
           <a:lstStyle/>
           <a:p>
             <a:pPr>
-              <a:defRPr sz="3600" b="1">
-                <a:solidFill>
-                  <a:srgbClr val="D97706"/>
+              <a:defRPr sz="3200" b="1">
+                <a:solidFill>
+                  <a:srgbClr val="D98210"/>
                 </a:solidFill>
                 <a:latin typeface="Georgia"/>
               </a:defRPr>
@@ -7977,29 +7842,26 @@
           </a:p>
           <a:p>
             <a:pPr>
-              <a:spcAft>
-                <a:spcPts val="400"/>
-              </a:spcAft>
-              <a:defRPr sz="1200" b="1">
+              <a:defRPr sz="1100" b="1">
                 <a:solidFill>
                   <a:srgbClr val="FFFFFF"/>
                 </a:solidFill>
               </a:defRPr>
             </a:pPr>
             <a:r>
-              <a:t>Increase in Dwell Time</a:t>
-            </a:r>
-          </a:p>
-          <a:p>
-            <a:pPr>
-              <a:defRPr sz="950">
-                <a:solidFill>
-                  <a:srgbClr val="F3EFEA"/>
-                </a:solidFill>
-              </a:defRPr>
-            </a:pPr>
-            <a:r>
-              <a:t>Extending visitor stay from &lt;2 hours to 6-8 hours through safe, reliable layover circuits.</a:t>
+              <a:t>Dwell Multiplier</a:t>
+            </a:r>
+          </a:p>
+          <a:p>
+            <a:pPr>
+              <a:defRPr sz="850">
+                <a:solidFill>
+                  <a:srgbClr val="F3EEE6"/>
+                </a:solidFill>
+              </a:defRPr>
+            </a:pPr>
+            <a:r>
+              <a:t>Extending transit stay from &lt;2h to 6-8h through safe itineraries.</a:t>
             </a:r>
           </a:p>
         </p:txBody>
@@ -8012,18 +7874,18 @@
         </p:nvSpPr>
         <p:spPr>
           <a:xfrm>
-            <a:off x="3429000" y="1737360"/>
-            <a:ext cx="2560320" cy="2011680"/>
+            <a:off x="3429000" y="1691640"/>
+            <a:ext cx="2560320" cy="1783080"/>
           </a:xfrm>
           <a:prstGeom prst="roundRect">
             <a:avLst/>
           </a:prstGeom>
           <a:solidFill>
-            <a:srgbClr val="085444"/>
+            <a:srgbClr val="0B3D33"/>
           </a:solidFill>
           <a:ln w="12700">
             <a:solidFill>
-              <a:srgbClr val="EBE4DC"/>
+              <a:srgbClr val="E4DCD2"/>
             </a:solidFill>
           </a:ln>
         </p:spPr>
@@ -8057,8 +7919,8 @@
         </p:nvSpPr>
         <p:spPr>
           <a:xfrm>
-            <a:off x="3566160" y="1874519"/>
-            <a:ext cx="2286000" cy="1737360"/>
+            <a:off x="3538728" y="1783080"/>
+            <a:ext cx="2340864" cy="1600200"/>
           </a:xfrm>
           <a:prstGeom prst="rect">
             <a:avLst/>
@@ -8072,9 +7934,9 @@
           <a:lstStyle/>
           <a:p>
             <a:pPr>
-              <a:defRPr sz="3600" b="1">
-                <a:solidFill>
-                  <a:srgbClr val="D97706"/>
+              <a:defRPr sz="3200" b="1">
+                <a:solidFill>
+                  <a:srgbClr val="D98210"/>
                 </a:solidFill>
                 <a:latin typeface="Georgia"/>
               </a:defRPr>
@@ -8085,29 +7947,26 @@
           </a:p>
           <a:p>
             <a:pPr>
-              <a:spcAft>
-                <a:spcPts val="400"/>
-              </a:spcAft>
-              <a:defRPr sz="1200" b="1">
+              <a:defRPr sz="1100" b="1">
                 <a:solidFill>
                   <a:srgbClr val="FFFFFF"/>
                 </a:solidFill>
               </a:defRPr>
             </a:pPr>
             <a:r>
-              <a:t>Economic Unlock Target</a:t>
-            </a:r>
-          </a:p>
-          <a:p>
-            <a:pPr>
-              <a:defRPr sz="950">
-                <a:solidFill>
-                  <a:srgbClr val="F3EFEA"/>
-                </a:solidFill>
-              </a:defRPr>
-            </a:pPr>
-            <a:r>
-              <a:t>Direct injection of traveler expenditure into local Dogra food, crafts, and municipal transport.</a:t>
+              <a:t>Economic Target</a:t>
+            </a:r>
+          </a:p>
+          <a:p>
+            <a:pPr>
+              <a:defRPr sz="850">
+                <a:solidFill>
+                  <a:srgbClr val="F3EEE6"/>
+                </a:solidFill>
+              </a:defRPr>
+            </a:pPr>
+            <a:r>
+              <a:t>Direct injection into local Dogra food, crafts &amp; certified transit.</a:t>
             </a:r>
           </a:p>
         </p:txBody>
@@ -8120,18 +7979,18 @@
         </p:nvSpPr>
         <p:spPr>
           <a:xfrm>
-            <a:off x="6126480" y="1737360"/>
-            <a:ext cx="2560320" cy="2011680"/>
+            <a:off x="6126480" y="1691640"/>
+            <a:ext cx="2560320" cy="1783080"/>
           </a:xfrm>
           <a:prstGeom prst="roundRect">
             <a:avLst/>
           </a:prstGeom>
           <a:solidFill>
-            <a:srgbClr val="085444"/>
+            <a:srgbClr val="0B3D33"/>
           </a:solidFill>
           <a:ln w="12700">
             <a:solidFill>
-              <a:srgbClr val="EBE4DC"/>
+              <a:srgbClr val="E4DCD2"/>
             </a:solidFill>
           </a:ln>
         </p:spPr>
@@ -8165,8 +8024,8 @@
         </p:nvSpPr>
         <p:spPr>
           <a:xfrm>
-            <a:off x="6263640" y="1874519"/>
-            <a:ext cx="2286000" cy="1737360"/>
+            <a:off x="6236208" y="1783080"/>
+            <a:ext cx="2340864" cy="1600200"/>
           </a:xfrm>
           <a:prstGeom prst="rect">
             <a:avLst/>
@@ -8180,9 +8039,9 @@
           <a:lstStyle/>
           <a:p>
             <a:pPr>
-              <a:defRPr sz="3600" b="1">
-                <a:solidFill>
-                  <a:srgbClr val="D97706"/>
+              <a:defRPr sz="3200" b="1">
+                <a:solidFill>
+                  <a:srgbClr val="D98210"/>
                 </a:solidFill>
                 <a:latin typeface="Georgia"/>
               </a:defRPr>
@@ -8193,29 +8052,26 @@
           </a:p>
           <a:p>
             <a:pPr>
-              <a:spcAft>
-                <a:spcPts val="400"/>
-              </a:spcAft>
-              <a:defRPr sz="1200" b="1">
+              <a:defRPr sz="1100" b="1">
                 <a:solidFill>
                   <a:srgbClr val="FFFFFF"/>
                 </a:solidFill>
               </a:defRPr>
             </a:pPr>
             <a:r>
-              <a:t>Avg Savings per Family</a:t>
-            </a:r>
-          </a:p>
-          <a:p>
-            <a:pPr>
-              <a:defRPr sz="950">
-                <a:solidFill>
-                  <a:srgbClr val="F3EFEA"/>
-                </a:solidFill>
-              </a:defRPr>
-            </a:pPr>
-            <a:r>
-              <a:t>Preventing exploitative overcharging on local transit and authentic certified souvenirs.</a:t>
+              <a:t>Avg Family Savings</a:t>
+            </a:r>
+          </a:p>
+          <a:p>
+            <a:pPr>
+              <a:defRPr sz="850">
+                <a:solidFill>
+                  <a:srgbClr val="F3EEE6"/>
+                </a:solidFill>
+              </a:defRPr>
+            </a:pPr>
+            <a:r>
+              <a:t>Preventing exploitative cab fares and spurious roadside craft purchases.</a:t>
             </a:r>
           </a:p>
         </p:txBody>
@@ -8228,18 +8084,18 @@
         </p:nvSpPr>
         <p:spPr>
           <a:xfrm>
-            <a:off x="8823960" y="1737360"/>
-            <a:ext cx="2560320" cy="2011680"/>
+            <a:off x="8823960" y="1691640"/>
+            <a:ext cx="2560320" cy="1783080"/>
           </a:xfrm>
           <a:prstGeom prst="roundRect">
             <a:avLst/>
           </a:prstGeom>
           <a:solidFill>
-            <a:srgbClr val="085444"/>
+            <a:srgbClr val="0B3D33"/>
           </a:solidFill>
           <a:ln w="12700">
             <a:solidFill>
-              <a:srgbClr val="EBE4DC"/>
+              <a:srgbClr val="E4DCD2"/>
             </a:solidFill>
           </a:ln>
         </p:spPr>
@@ -8273,8 +8129,8 @@
         </p:nvSpPr>
         <p:spPr>
           <a:xfrm>
-            <a:off x="8961120" y="1874519"/>
-            <a:ext cx="2286000" cy="1737360"/>
+            <a:off x="8933688" y="1783080"/>
+            <a:ext cx="2340864" cy="1600200"/>
           </a:xfrm>
           <a:prstGeom prst="rect">
             <a:avLst/>
@@ -8288,9 +8144,9 @@
           <a:lstStyle/>
           <a:p>
             <a:pPr>
-              <a:defRPr sz="3600" b="1">
-                <a:solidFill>
-                  <a:srgbClr val="D97706"/>
+              <a:defRPr sz="3200" b="1">
+                <a:solidFill>
+                  <a:srgbClr val="D98210"/>
                 </a:solidFill>
                 <a:latin typeface="Georgia"/>
               </a:defRPr>
@@ -8301,29 +8157,26 @@
           </a:p>
           <a:p>
             <a:pPr>
-              <a:spcAft>
-                <a:spcPts val="400"/>
-              </a:spcAft>
-              <a:defRPr sz="1200" b="1">
+              <a:defRPr sz="1100" b="1">
                 <a:solidFill>
                   <a:srgbClr val="FFFFFF"/>
                 </a:solidFill>
               </a:defRPr>
             </a:pPr>
             <a:r>
-              <a:t>Missed Boarding Events</a:t>
-            </a:r>
-          </a:p>
-          <a:p>
-            <a:pPr>
-              <a:defRPr sz="950">
-                <a:solidFill>
-                  <a:srgbClr val="F3EFEA"/>
-                </a:solidFill>
-              </a:defRPr>
-            </a:pPr>
-            <a:r>
-              <a:t>100% adherence to safety return buffers (45-min rail / 150-min flight) across 1-tap itineraries.</a:t>
+              <a:t>Missed Departures</a:t>
+            </a:r>
+          </a:p>
+          <a:p>
+            <a:pPr>
+              <a:defRPr sz="850">
+                <a:solidFill>
+                  <a:srgbClr val="F3EEE6"/>
+                </a:solidFill>
+              </a:defRPr>
+            </a:pPr>
+            <a:r>
+              <a:t>100% adherence to conservative rail &amp; flight safety buffers.</a:t>
             </a:r>
           </a:p>
         </p:txBody>
@@ -8336,8 +8189,8 @@
         </p:nvSpPr>
         <p:spPr>
           <a:xfrm>
-            <a:off x="731520" y="3977639"/>
-            <a:ext cx="5257800" cy="2103120"/>
+            <a:off x="731520" y="3611880"/>
+            <a:ext cx="5257800" cy="2560320"/>
           </a:xfrm>
           <a:prstGeom prst="roundRect">
             <a:avLst/>
@@ -8347,7 +8200,7 @@
           </a:solidFill>
           <a:ln w="12700">
             <a:solidFill>
-              <a:srgbClr val="EBE4DC"/>
+              <a:srgbClr val="E4DCD2"/>
             </a:solidFill>
           </a:ln>
         </p:spPr>
@@ -8381,8 +8234,8 @@
         </p:nvSpPr>
         <p:spPr>
           <a:xfrm>
-            <a:off x="914400" y="4069080"/>
-            <a:ext cx="4892040" cy="1920240"/>
+            <a:off x="914400" y="3703320"/>
+            <a:ext cx="4892040" cy="2377440"/>
           </a:xfrm>
           <a:prstGeom prst="rect">
             <a:avLst/>
@@ -8399,9 +8252,9 @@
               <a:spcAft>
                 <a:spcPts val="400"/>
               </a:spcAft>
-              <a:defRPr sz="1400" b="1">
-                <a:solidFill>
-                  <a:srgbClr val="085444"/>
+              <a:defRPr sz="1300" b="1">
+                <a:solidFill>
+                  <a:srgbClr val="0B3D33"/>
                 </a:solidFill>
                 <a:latin typeface="Georgia"/>
               </a:defRPr>
@@ -8412,14 +8265,14 @@
           </a:p>
           <a:p>
             <a:pPr>
-              <a:defRPr sz="1050">
-                <a:solidFill>
-                  <a:srgbClr val="64746C"/>
-                </a:solidFill>
-              </a:defRPr>
-            </a:pPr>
-            <a:r>
-              <a:t>Empowering Basohli painters, Pashmina weavers, and Bhaderwah farmers with verified outlet discovery and fake-identification guides. Pilgrims purchase authentic GI certified heritage at fair benchmark prices directly supporting cottage industries.</a:t>
+              <a:defRPr sz="1000">
+                <a:solidFill>
+                  <a:srgbClr val="5F6E67"/>
+                </a:solidFill>
+              </a:defRPr>
+            </a:pPr>
+            <a:r>
+              <a:t>Empowers Basohli miniature painters, Pashmina weavers, and Bhaderwah Rajmash farmers with verified outlet discovery and fake-identification guides. Pilgrims purchase authentic GI certified heritage at fair benchmark prices directly supporting traditional craft families.</a:t>
             </a:r>
           </a:p>
         </p:txBody>
@@ -8432,8 +8285,8 @@
         </p:nvSpPr>
         <p:spPr>
           <a:xfrm>
-            <a:off x="6172200" y="3977639"/>
-            <a:ext cx="5257800" cy="2103120"/>
+            <a:off x="6202375" y="3611880"/>
+            <a:ext cx="5257800" cy="2560320"/>
           </a:xfrm>
           <a:prstGeom prst="roundRect">
             <a:avLst/>
@@ -8443,7 +8296,7 @@
           </a:solidFill>
           <a:ln w="12700">
             <a:solidFill>
-              <a:srgbClr val="EBE4DC"/>
+              <a:srgbClr val="E4DCD2"/>
             </a:solidFill>
           </a:ln>
         </p:spPr>
@@ -8477,8 +8330,8 @@
         </p:nvSpPr>
         <p:spPr>
           <a:xfrm>
-            <a:off x="6355080" y="4069080"/>
-            <a:ext cx="4892040" cy="1920240"/>
+            <a:off x="6385255" y="3703320"/>
+            <a:ext cx="4892040" cy="2377440"/>
           </a:xfrm>
           <a:prstGeom prst="rect">
             <a:avLst/>
@@ -8495,9 +8348,9 @@
               <a:spcAft>
                 <a:spcPts val="400"/>
               </a:spcAft>
-              <a:defRPr sz="1400" b="1">
-                <a:solidFill>
-                  <a:srgbClr val="085444"/>
+              <a:defRPr sz="1300" b="1">
+                <a:solidFill>
+                  <a:srgbClr val="0B3D33"/>
                 </a:solidFill>
                 <a:latin typeface="Georgia"/>
               </a:defRPr>
@@ -8508,9 +8361,9 @@
           </a:p>
           <a:p>
             <a:pPr>
-              <a:defRPr sz="1050">
-                <a:solidFill>
-                  <a:srgbClr val="64746C"/>
+              <a:defRPr sz="1000">
+                <a:solidFill>
+                  <a:srgbClr val="5F6E67"/>
                 </a:solidFill>
               </a:defRPr>
             </a:pPr>
@@ -8543,15 +8396,15 @@
           <a:lstStyle/>
           <a:p>
             <a:pPr>
-              <a:defRPr sz="950">
-                <a:solidFill>
-                  <a:srgbClr val="64746C"/>
+              <a:defRPr sz="900">
+                <a:solidFill>
+                  <a:srgbClr val="5F6E67"/>
                 </a:solidFill>
                 <a:latin typeface="Arial"/>
               </a:defRPr>
             </a:pPr>
             <a:r>
-              <a:t>JammuKhoj • Smart Tourism &amp; Pilgrim Companion • https://jammukhoj.in</a:t>
+              <a:t>JammuKhoj • Smart Tourism &amp; Pilgrim Companion • Live App: https://jammukhoj.in</a:t>
             </a:r>
           </a:p>
         </p:txBody>
@@ -8589,7 +8442,7 @@
             <a:avLst/>
           </a:prstGeom>
           <a:solidFill>
-            <a:srgbClr val="FBF9F5"/>
+            <a:srgbClr val="FAF7F2"/>
           </a:solidFill>
           <a:ln>
             <a:noFill/>
@@ -8625,8 +8478,8 @@
         </p:nvSpPr>
         <p:spPr>
           <a:xfrm>
-            <a:off x="731520" y="411480"/>
-            <a:ext cx="9144000" cy="365760"/>
+            <a:off x="731520" y="384048"/>
+            <a:ext cx="9144000" cy="320040"/>
           </a:xfrm>
           <a:prstGeom prst="rect">
             <a:avLst/>
@@ -8640,15 +8493,15 @@
           <a:lstStyle/>
           <a:p>
             <a:pPr>
-              <a:defRPr sz="1100" b="1">
-                <a:solidFill>
-                  <a:srgbClr val="9E4A0C"/>
+              <a:defRPr sz="1050" b="1">
+                <a:solidFill>
+                  <a:srgbClr val="A84D0E"/>
                 </a:solidFill>
                 <a:latin typeface="Arial"/>
               </a:defRPr>
             </a:pPr>
             <a:r>
-              <a:t>08 | EXECUTION ROADMAP</a:t>
+              <a:t>08 • EXECUTION ROADMAP</a:t>
             </a:r>
           </a:p>
         </p:txBody>
@@ -8661,8 +8514,8 @@
         </p:nvSpPr>
         <p:spPr>
           <a:xfrm>
-            <a:off x="731520" y="731520"/>
-            <a:ext cx="10515600" cy="594360"/>
+            <a:off x="731520" y="676656"/>
+            <a:ext cx="10698480" cy="594360"/>
           </a:xfrm>
           <a:prstGeom prst="rect">
             <a:avLst/>
@@ -8676,15 +8529,15 @@
           <a:lstStyle/>
           <a:p>
             <a:pPr>
-              <a:defRPr sz="2400" b="1">
-                <a:solidFill>
-                  <a:srgbClr val="085444"/>
+              <a:defRPr sz="2300" b="1">
+                <a:solidFill>
+                  <a:srgbClr val="0B3D33"/>
                 </a:solidFill>
                 <a:latin typeface="Georgia"/>
               </a:defRPr>
             </a:pPr>
             <a:r>
-              <a:t>4-Stage Scalable Deployment Plan (2026 - 2027)</a:t>
+              <a:t>4-Stage Scalable Deployment Plan (2026 – 2027)</a:t>
             </a:r>
           </a:p>
         </p:txBody>
@@ -8697,8 +8550,8 @@
         </p:nvSpPr>
         <p:spPr>
           <a:xfrm>
-            <a:off x="731520" y="1298448"/>
-            <a:ext cx="10515600" cy="365760"/>
+            <a:off x="731520" y="1243584"/>
+            <a:ext cx="10698480" cy="365760"/>
           </a:xfrm>
           <a:prstGeom prst="rect">
             <a:avLst/>
@@ -8712,15 +8565,15 @@
           <a:lstStyle/>
           <a:p>
             <a:pPr>
-              <a:defRPr sz="1300">
-                <a:solidFill>
-                  <a:srgbClr val="64746C"/>
+              <a:defRPr sz="1150">
+                <a:solidFill>
+                  <a:srgbClr val="5F6E67"/>
                 </a:solidFill>
                 <a:latin typeface="Arial"/>
               </a:defRPr>
             </a:pPr>
             <a:r>
-              <a:t>From hackathon proof-of-concept to institutional state-wide deployment.</a:t>
+              <a:t>From proven progressive web app &amp; Android build to institutional statewide rollout.</a:t>
             </a:r>
           </a:p>
         </p:txBody>
@@ -8733,8 +8586,8 @@
         </p:nvSpPr>
         <p:spPr>
           <a:xfrm>
-            <a:off x="731520" y="1737360"/>
-            <a:ext cx="2560320" cy="4297680"/>
+            <a:off x="731520" y="1691640"/>
+            <a:ext cx="2560320" cy="4480560"/>
           </a:xfrm>
           <a:prstGeom prst="roundRect">
             <a:avLst/>
@@ -8744,7 +8597,7 @@
           </a:solidFill>
           <a:ln w="12700">
             <a:solidFill>
-              <a:srgbClr val="EBE4DC"/>
+              <a:srgbClr val="E4DCD2"/>
             </a:solidFill>
           </a:ln>
         </p:spPr>
@@ -8778,14 +8631,14 @@
         </p:nvSpPr>
         <p:spPr>
           <a:xfrm>
-            <a:off x="868680" y="1920240"/>
-            <a:ext cx="2286000" cy="548640"/>
+            <a:off x="868680" y="1874520"/>
+            <a:ext cx="2286000" cy="365760"/>
           </a:xfrm>
           <a:prstGeom prst="roundRect">
             <a:avLst/>
           </a:prstGeom>
           <a:solidFill>
-            <a:srgbClr val="15803D"/>
+            <a:srgbClr val="0B3D33"/>
           </a:solidFill>
           <a:ln>
             <a:noFill/>
@@ -8810,26 +8663,14 @@
           <a:lstStyle/>
           <a:p>
             <a:pPr algn="ctr">
-              <a:defRPr sz="1100" b="1">
+              <a:defRPr sz="900" b="1">
                 <a:solidFill>
                   <a:srgbClr val="FFFFFF"/>
                 </a:solidFill>
               </a:defRPr>
             </a:pPr>
             <a:r>
-              <a:t>Phase 1: Foundation</a:t>
-            </a:r>
-          </a:p>
-          <a:p>
-            <a:pPr algn="ctr">
-              <a:defRPr sz="900">
-                <a:solidFill>
-                  <a:srgbClr val="D97706"/>
-                </a:solidFill>
-              </a:defRPr>
-            </a:pPr>
-            <a:r>
-              <a:t>CURRENT • COMPLETED</a:t>
+              <a:t>LIVE IN PRODUCTION</a:t>
             </a:r>
           </a:p>
         </p:txBody>
@@ -8842,8 +8683,8 @@
         </p:nvSpPr>
         <p:spPr>
           <a:xfrm>
-            <a:off x="868680" y="2606040"/>
-            <a:ext cx="2286000" cy="3291840"/>
+            <a:off x="868680" y="2331720"/>
+            <a:ext cx="2286000" cy="3657600"/>
           </a:xfrm>
           <a:prstGeom prst="rect">
             <a:avLst/>
@@ -8855,69 +8696,95 @@
             <a:spAutoFit/>
           </a:bodyPr>
           <a:lstStyle/>
-          <a:p/>
           <a:p>
             <a:pPr>
               <a:spcAft>
-                <a:spcPts val="800"/>
+                <a:spcPts val="1000"/>
               </a:spcAft>
-              <a:defRPr sz="1050">
-                <a:solidFill>
-                  <a:srgbClr val="1C2923"/>
-                </a:solidFill>
-                <a:latin typeface="Arial"/>
-              </a:defRPr>
-            </a:pPr>
-            <a:r>
-              <a:t>✓  100% offline-ready PWA &amp; Android app live.</a:t>
+              <a:defRPr sz="1200" b="1">
+                <a:solidFill>
+                  <a:srgbClr val="0B3D33"/>
+                </a:solidFill>
+                <a:latin typeface="Georgia"/>
+              </a:defRPr>
+            </a:pPr>
+            <a:r>
+              <a:t>Phase 1: Foundation</a:t>
             </a:r>
           </a:p>
           <a:p>
             <a:pPr>
               <a:spcAft>
-                <a:spcPts val="800"/>
+                <a:spcPts val="500"/>
               </a:spcAft>
-              <a:defRPr sz="1050">
-                <a:solidFill>
-                  <a:srgbClr val="1C2923"/>
-                </a:solidFill>
-                <a:latin typeface="Arial"/>
-              </a:defRPr>
-            </a:pPr>
-            <a:r>
-              <a:t>✓  Custom domain jammukhoj.in &amp; Schema.org SEO.</a:t>
+              <a:defRPr sz="919">
+                <a:solidFill>
+                  <a:srgbClr val="18221E"/>
+                </a:solidFill>
+              </a:defRPr>
+            </a:pPr>
+            <a:r>
+              <a:t>✔ Live on jammukhoj.in domain</a:t>
             </a:r>
           </a:p>
           <a:p>
             <a:pPr>
               <a:spcAft>
-                <a:spcPts val="800"/>
+                <a:spcPts val="500"/>
               </a:spcAft>
-              <a:defRPr sz="1050">
-                <a:solidFill>
-                  <a:srgbClr val="1C2923"/>
-                </a:solidFill>
-                <a:latin typeface="Arial"/>
-              </a:defRPr>
-            </a:pPr>
-            <a:r>
-              <a:t>✓  36+ curated attractions &amp; 44/44 test suite passed.</a:t>
+              <a:defRPr sz="919">
+                <a:solidFill>
+                  <a:srgbClr val="18221E"/>
+                </a:solidFill>
+              </a:defRPr>
+            </a:pPr>
+            <a:r>
+              <a:t>✔ 100% offline PWA &amp; Android APK</a:t>
             </a:r>
           </a:p>
           <a:p>
             <a:pPr>
               <a:spcAft>
-                <a:spcPts val="800"/>
+                <a:spcPts val="500"/>
               </a:spcAft>
-              <a:defRPr sz="1050">
-                <a:solidFill>
-                  <a:srgbClr val="1C2923"/>
-                </a:solidFill>
-                <a:latin typeface="Arial"/>
-              </a:defRPr>
-            </a:pPr>
-            <a:r>
-              <a:t>✓  1-Tap buffer-safe planner &amp; transit matrix.</a:t>
+              <a:defRPr sz="919">
+                <a:solidFill>
+                  <a:srgbClr val="18221E"/>
+                </a:solidFill>
+              </a:defRPr>
+            </a:pPr>
+            <a:r>
+              <a:t>✔ 36+ curated attractions &amp; maps</a:t>
+            </a:r>
+          </a:p>
+          <a:p>
+            <a:pPr>
+              <a:spcAft>
+                <a:spcPts val="500"/>
+              </a:spcAft>
+              <a:defRPr sz="919">
+                <a:solidFill>
+                  <a:srgbClr val="18221E"/>
+                </a:solidFill>
+              </a:defRPr>
+            </a:pPr>
+            <a:r>
+              <a:t>✔ 44 automated unit &amp; E2E tests passing</a:t>
+            </a:r>
+          </a:p>
+          <a:p>
+            <a:pPr>
+              <a:spcAft>
+                <a:spcPts val="500"/>
+              </a:spcAft>
+              <a:defRPr sz="919">
+                <a:solidFill>
+                  <a:srgbClr val="18221E"/>
+                </a:solidFill>
+              </a:defRPr>
+            </a:pPr>
+            <a:r>
+              <a:t>✔ 1-Tap buffer planner &amp; transit matrix</a:t>
             </a:r>
           </a:p>
         </p:txBody>
@@ -8930,8 +8797,8 @@
         </p:nvSpPr>
         <p:spPr>
           <a:xfrm>
-            <a:off x="3429000" y="1737360"/>
-            <a:ext cx="2560320" cy="4297680"/>
+            <a:off x="3429000" y="1691640"/>
+            <a:ext cx="2560320" cy="4480560"/>
           </a:xfrm>
           <a:prstGeom prst="roundRect">
             <a:avLst/>
@@ -8941,7 +8808,7 @@
           </a:solidFill>
           <a:ln w="12700">
             <a:solidFill>
-              <a:srgbClr val="EBE4DC"/>
+              <a:srgbClr val="E4DCD2"/>
             </a:solidFill>
           </a:ln>
         </p:spPr>
@@ -8975,14 +8842,14 @@
         </p:nvSpPr>
         <p:spPr>
           <a:xfrm>
-            <a:off x="3566160" y="1920240"/>
-            <a:ext cx="2286000" cy="548640"/>
+            <a:off x="3566160" y="1874520"/>
+            <a:ext cx="2286000" cy="365760"/>
           </a:xfrm>
           <a:prstGeom prst="roundRect">
             <a:avLst/>
           </a:prstGeom>
           <a:solidFill>
-            <a:srgbClr val="085444"/>
+            <a:srgbClr val="A84D0E"/>
           </a:solidFill>
           <a:ln>
             <a:noFill/>
@@ -9007,26 +8874,14 @@
           <a:lstStyle/>
           <a:p>
             <a:pPr algn="ctr">
-              <a:defRPr sz="1100" b="1">
+              <a:defRPr sz="900" b="1">
                 <a:solidFill>
                   <a:srgbClr val="FFFFFF"/>
                 </a:solidFill>
               </a:defRPr>
             </a:pPr>
             <a:r>
-              <a:t>Phase 2: Station Pilot</a:t>
-            </a:r>
-          </a:p>
-          <a:p>
-            <a:pPr algn="ctr">
-              <a:defRPr sz="900">
-                <a:solidFill>
-                  <a:srgbClr val="D97706"/>
-                </a:solidFill>
-              </a:defRPr>
-            </a:pPr>
-            <a:r>
-              <a:t>Q1 - Q2 2027</a:t>
+              <a:t>Q1-Q2 2027</a:t>
             </a:r>
           </a:p>
         </p:txBody>
@@ -9039,8 +8894,8 @@
         </p:nvSpPr>
         <p:spPr>
           <a:xfrm>
-            <a:off x="3566160" y="2606040"/>
-            <a:ext cx="2286000" cy="3291840"/>
+            <a:off x="3566160" y="2331720"/>
+            <a:ext cx="2286000" cy="3657600"/>
           </a:xfrm>
           <a:prstGeom prst="rect">
             <a:avLst/>
@@ -9052,69 +8907,80 @@
             <a:spAutoFit/>
           </a:bodyPr>
           <a:lstStyle/>
-          <a:p/>
           <a:p>
             <a:pPr>
               <a:spcAft>
-                <a:spcPts val="800"/>
+                <a:spcPts val="1000"/>
               </a:spcAft>
-              <a:defRPr sz="1050">
-                <a:solidFill>
-                  <a:srgbClr val="1C2923"/>
-                </a:solidFill>
-                <a:latin typeface="Arial"/>
-              </a:defRPr>
-            </a:pPr>
-            <a:r>
-              <a:t>✓  Physical QR kiosks at Jammu Tawi &amp; SVDK Katra.</a:t>
+              <a:defRPr sz="1200" b="1">
+                <a:solidFill>
+                  <a:srgbClr val="0B3D33"/>
+                </a:solidFill>
+                <a:latin typeface="Georgia"/>
+              </a:defRPr>
+            </a:pPr>
+            <a:r>
+              <a:t>Phase 2: Transit Node Pilot</a:t>
             </a:r>
           </a:p>
           <a:p>
             <a:pPr>
               <a:spcAft>
-                <a:spcPts val="800"/>
+                <a:spcPts val="500"/>
               </a:spcAft>
-              <a:defRPr sz="1050">
-                <a:solidFill>
-                  <a:srgbClr val="1C2923"/>
-                </a:solidFill>
-                <a:latin typeface="Arial"/>
-              </a:defRPr>
-            </a:pPr>
-            <a:r>
-              <a:t>✓  Collaboration with J&amp;K RTC for live e-bus tracking.</a:t>
+              <a:defRPr sz="919">
+                <a:solidFill>
+                  <a:srgbClr val="5F6E67"/>
+                </a:solidFill>
+              </a:defRPr>
+            </a:pPr>
+            <a:r>
+              <a:t>• QR kiosks at Jammu Tawi &amp; Katra concourses</a:t>
             </a:r>
           </a:p>
           <a:p>
             <a:pPr>
               <a:spcAft>
-                <a:spcPts val="800"/>
+                <a:spcPts val="500"/>
               </a:spcAft>
-              <a:defRPr sz="1050">
-                <a:solidFill>
-                  <a:srgbClr val="1C2923"/>
-                </a:solidFill>
-                <a:latin typeface="Arial"/>
-              </a:defRPr>
-            </a:pPr>
-            <a:r>
-              <a:t>✓  Pilot onboardings with 50+ verified local merchants.</a:t>
+              <a:defRPr sz="919">
+                <a:solidFill>
+                  <a:srgbClr val="5F6E67"/>
+                </a:solidFill>
+              </a:defRPr>
+            </a:pPr>
+            <a:r>
+              <a:t>• J&amp;K Smart City e-bus live GPS sync</a:t>
             </a:r>
           </a:p>
           <a:p>
             <a:pPr>
               <a:spcAft>
-                <a:spcPts val="800"/>
+                <a:spcPts val="500"/>
               </a:spcAft>
-              <a:defRPr sz="1050">
-                <a:solidFill>
-                  <a:srgbClr val="1C2923"/>
-                </a:solidFill>
-                <a:latin typeface="Arial"/>
-              </a:defRPr>
-            </a:pPr>
-            <a:r>
-              <a:t>✓  Target: 50,000 active pilgrim sessions.</a:t>
+              <a:defRPr sz="919">
+                <a:solidFill>
+                  <a:srgbClr val="5F6E67"/>
+                </a:solidFill>
+              </a:defRPr>
+            </a:pPr>
+            <a:r>
+              <a:t>• Onboard 50+ verified local dhabas &amp; GI shops</a:t>
+            </a:r>
+          </a:p>
+          <a:p>
+            <a:pPr>
+              <a:spcAft>
+                <a:spcPts val="500"/>
+              </a:spcAft>
+              <a:defRPr sz="919">
+                <a:solidFill>
+                  <a:srgbClr val="5F6E67"/>
+                </a:solidFill>
+              </a:defRPr>
+            </a:pPr>
+            <a:r>
+              <a:t>• Target: 50,000 monthly active yatris</a:t>
             </a:r>
           </a:p>
         </p:txBody>
@@ -9127,8 +8993,8 @@
         </p:nvSpPr>
         <p:spPr>
           <a:xfrm>
-            <a:off x="6126480" y="1737360"/>
-            <a:ext cx="2560320" cy="4297680"/>
+            <a:off x="6126480" y="1691640"/>
+            <a:ext cx="2560320" cy="4480560"/>
           </a:xfrm>
           <a:prstGeom prst="roundRect">
             <a:avLst/>
@@ -9138,7 +9004,7 @@
           </a:solidFill>
           <a:ln w="12700">
             <a:solidFill>
-              <a:srgbClr val="EBE4DC"/>
+              <a:srgbClr val="E4DCD2"/>
             </a:solidFill>
           </a:ln>
         </p:spPr>
@@ -9172,14 +9038,14 @@
         </p:nvSpPr>
         <p:spPr>
           <a:xfrm>
-            <a:off x="6263640" y="1920240"/>
-            <a:ext cx="2286000" cy="548640"/>
+            <a:off x="6263640" y="1874520"/>
+            <a:ext cx="2286000" cy="365760"/>
           </a:xfrm>
           <a:prstGeom prst="roundRect">
             <a:avLst/>
           </a:prstGeom>
           <a:solidFill>
-            <a:srgbClr val="9E4A0C"/>
+            <a:srgbClr val="0B3D33"/>
           </a:solidFill>
           <a:ln>
             <a:noFill/>
@@ -9204,19 +9070,7 @@
           <a:lstStyle/>
           <a:p>
             <a:pPr algn="ctr">
-              <a:defRPr sz="1100" b="1">
-                <a:solidFill>
-                  <a:srgbClr val="FFFFFF"/>
-                </a:solidFill>
-              </a:defRPr>
-            </a:pPr>
-            <a:r>
-              <a:t>Phase 3: Institutional Tie-up</a:t>
-            </a:r>
-          </a:p>
-          <a:p>
-            <a:pPr algn="ctr">
-              <a:defRPr sz="900">
+              <a:defRPr sz="900" b="1">
                 <a:solidFill>
                   <a:srgbClr val="FFFFFF"/>
                 </a:solidFill>
@@ -9236,8 +9090,8 @@
         </p:nvSpPr>
         <p:spPr>
           <a:xfrm>
-            <a:off x="6263640" y="2606040"/>
-            <a:ext cx="2286000" cy="3291840"/>
+            <a:off x="6263640" y="2331720"/>
+            <a:ext cx="2286000" cy="3657600"/>
           </a:xfrm>
           <a:prstGeom prst="rect">
             <a:avLst/>
@@ -9249,69 +9103,80 @@
             <a:spAutoFit/>
           </a:bodyPr>
           <a:lstStyle/>
-          <a:p/>
           <a:p>
             <a:pPr>
               <a:spcAft>
-                <a:spcPts val="800"/>
+                <a:spcPts val="1000"/>
               </a:spcAft>
-              <a:defRPr sz="1050">
-                <a:solidFill>
-                  <a:srgbClr val="1C2923"/>
-                </a:solidFill>
-                <a:latin typeface="Arial"/>
-              </a:defRPr>
-            </a:pPr>
-            <a:r>
-              <a:t>✓  Integration with SMVDSB Shrine Board RFID counters.</a:t>
+              <a:defRPr sz="1200" b="1">
+                <a:solidFill>
+                  <a:srgbClr val="0B3D33"/>
+                </a:solidFill>
+                <a:latin typeface="Georgia"/>
+              </a:defRPr>
+            </a:pPr>
+            <a:r>
+              <a:t>Phase 3: Institutional Sync</a:t>
             </a:r>
           </a:p>
           <a:p>
             <a:pPr>
               <a:spcAft>
-                <a:spcPts val="800"/>
+                <a:spcPts val="500"/>
               </a:spcAft>
-              <a:defRPr sz="1050">
-                <a:solidFill>
-                  <a:srgbClr val="1C2923"/>
-                </a:solidFill>
-                <a:latin typeface="Arial"/>
-              </a:defRPr>
-            </a:pPr>
-            <a:r>
-              <a:t>✓  Official endorsement by J&amp;K Directorate of Tourism.</a:t>
+              <a:defRPr sz="919">
+                <a:solidFill>
+                  <a:srgbClr val="5F6E67"/>
+                </a:solidFill>
+              </a:defRPr>
+            </a:pPr>
+            <a:r>
+              <a:t>• Official J&amp;K Tourism Directorate endorsement</a:t>
             </a:r>
           </a:p>
           <a:p>
             <a:pPr>
               <a:spcAft>
-                <a:spcPts val="800"/>
+                <a:spcPts val="500"/>
               </a:spcAft>
-              <a:defRPr sz="1050">
-                <a:solidFill>
-                  <a:srgbClr val="1C2923"/>
-                </a:solidFill>
-                <a:latin typeface="Arial"/>
-              </a:defRPr>
-            </a:pPr>
-            <a:r>
-              <a:t>✓  Battery car live queue advisory in Katra.</a:t>
+              <a:defRPr sz="919">
+                <a:solidFill>
+                  <a:srgbClr val="5F6E67"/>
+                </a:solidFill>
+              </a:defRPr>
+            </a:pPr>
+            <a:r>
+              <a:t>• SMVDSB Katra battery-car &amp; RFID tie-in</a:t>
             </a:r>
           </a:p>
           <a:p>
             <a:pPr>
               <a:spcAft>
-                <a:spcPts val="800"/>
+                <a:spcPts val="500"/>
               </a:spcAft>
-              <a:defRPr sz="1050">
-                <a:solidFill>
-                  <a:srgbClr val="1C2923"/>
-                </a:solidFill>
-                <a:latin typeface="Arial"/>
-              </a:defRPr>
-            </a:pPr>
-            <a:r>
-              <a:t>✓  Target: 250,000 active monthly yatris.</a:t>
+              <a:defRPr sz="919">
+                <a:solidFill>
+                  <a:srgbClr val="5F6E67"/>
+                </a:solidFill>
+              </a:defRPr>
+            </a:pPr>
+            <a:r>
+              <a:t>• Northern Railway Yatri Niwas booking cross-links</a:t>
+            </a:r>
+          </a:p>
+          <a:p>
+            <a:pPr>
+              <a:spcAft>
+                <a:spcPts val="500"/>
+              </a:spcAft>
+              <a:defRPr sz="919">
+                <a:solidFill>
+                  <a:srgbClr val="5F6E67"/>
+                </a:solidFill>
+              </a:defRPr>
+            </a:pPr>
+            <a:r>
+              <a:t>• Target: 250,000 active pilgrim users</a:t>
             </a:r>
           </a:p>
         </p:txBody>
@@ -9324,8 +9189,8 @@
         </p:nvSpPr>
         <p:spPr>
           <a:xfrm>
-            <a:off x="8823960" y="1737360"/>
-            <a:ext cx="2560320" cy="4297680"/>
+            <a:off x="8823960" y="1691640"/>
+            <a:ext cx="2560320" cy="4480560"/>
           </a:xfrm>
           <a:prstGeom prst="roundRect">
             <a:avLst/>
@@ -9335,7 +9200,7 @@
           </a:solidFill>
           <a:ln w="12700">
             <a:solidFill>
-              <a:srgbClr val="EBE4DC"/>
+              <a:srgbClr val="E4DCD2"/>
             </a:solidFill>
           </a:ln>
         </p:spPr>
@@ -9369,14 +9234,14 @@
         </p:nvSpPr>
         <p:spPr>
           <a:xfrm>
-            <a:off x="8961120" y="1920240"/>
-            <a:ext cx="2286000" cy="548640"/>
+            <a:off x="8961120" y="1874520"/>
+            <a:ext cx="2286000" cy="365760"/>
           </a:xfrm>
           <a:prstGeom prst="roundRect">
             <a:avLst/>
           </a:prstGeom>
           <a:solidFill>
-            <a:srgbClr val="123E38"/>
+            <a:srgbClr val="D98210"/>
           </a:solidFill>
           <a:ln>
             <a:noFill/>
@@ -9401,21 +9266,9 @@
           <a:lstStyle/>
           <a:p>
             <a:pPr algn="ctr">
-              <a:defRPr sz="1100" b="1">
+              <a:defRPr sz="900" b="1">
                 <a:solidFill>
                   <a:srgbClr val="FFFFFF"/>
-                </a:solidFill>
-              </a:defRPr>
-            </a:pPr>
-            <a:r>
-              <a:t>Phase 4: Ecosystem Scale</a:t>
-            </a:r>
-          </a:p>
-          <a:p>
-            <a:pPr algn="ctr">
-              <a:defRPr sz="900">
-                <a:solidFill>
-                  <a:srgbClr val="D97706"/>
                 </a:solidFill>
               </a:defRPr>
             </a:pPr>
@@ -9433,8 +9286,8 @@
         </p:nvSpPr>
         <p:spPr>
           <a:xfrm>
-            <a:off x="8961120" y="2606040"/>
-            <a:ext cx="2286000" cy="3291840"/>
+            <a:off x="8961120" y="2331720"/>
+            <a:ext cx="2286000" cy="3657600"/>
           </a:xfrm>
           <a:prstGeom prst="rect">
             <a:avLst/>
@@ -9446,69 +9299,80 @@
             <a:spAutoFit/>
           </a:bodyPr>
           <a:lstStyle/>
-          <a:p/>
           <a:p>
             <a:pPr>
               <a:spcAft>
-                <a:spcPts val="800"/>
+                <a:spcPts val="1000"/>
               </a:spcAft>
-              <a:defRPr sz="1050">
-                <a:solidFill>
-                  <a:srgbClr val="1C2923"/>
-                </a:solidFill>
-                <a:latin typeface="Arial"/>
-              </a:defRPr>
-            </a:pPr>
-            <a:r>
-              <a:t>✓  Expansion to Bhaderwah, Kishtwar, Poonch &amp; Rajouri.</a:t>
+              <a:defRPr sz="1200" b="1">
+                <a:solidFill>
+                  <a:srgbClr val="0B3D33"/>
+                </a:solidFill>
+                <a:latin typeface="Georgia"/>
+              </a:defRPr>
+            </a:pPr>
+            <a:r>
+              <a:t>Phase 4: Ecosystem Scale</a:t>
             </a:r>
           </a:p>
           <a:p>
             <a:pPr>
               <a:spcAft>
-                <a:spcPts val="800"/>
+                <a:spcPts val="500"/>
               </a:spcAft>
-              <a:defRPr sz="1050">
-                <a:solidFill>
-                  <a:srgbClr val="1C2923"/>
-                </a:solidFill>
-                <a:latin typeface="Arial"/>
-              </a:defRPr>
-            </a:pPr>
-            <a:r>
-              <a:t>✓  Audio heritage trails in Dogri, Hindi &amp; English.</a:t>
+              <a:defRPr sz="919">
+                <a:solidFill>
+                  <a:srgbClr val="5F6E67"/>
+                </a:solidFill>
+              </a:defRPr>
+            </a:pPr>
+            <a:r>
+              <a:t>• Expansion to Bhaderwah, Kishtwar, Poonch &amp; Rajouri</a:t>
             </a:r>
           </a:p>
           <a:p>
             <a:pPr>
               <a:spcAft>
-                <a:spcPts val="800"/>
+                <a:spcPts val="500"/>
               </a:spcAft>
-              <a:defRPr sz="1050">
-                <a:solidFill>
-                  <a:srgbClr val="1C2923"/>
-                </a:solidFill>
-                <a:latin typeface="Arial"/>
-              </a:defRPr>
-            </a:pPr>
-            <a:r>
-              <a:t>✓  Crowdsourced community fare update mechanisms.</a:t>
+              <a:defRPr sz="919">
+                <a:solidFill>
+                  <a:srgbClr val="5F6E67"/>
+                </a:solidFill>
+              </a:defRPr>
+            </a:pPr>
+            <a:r>
+              <a:t>• Audio heritage guides in Dogri, Hindi &amp; English</a:t>
             </a:r>
           </a:p>
           <a:p>
             <a:pPr>
               <a:spcAft>
-                <a:spcPts val="800"/>
+                <a:spcPts val="500"/>
               </a:spcAft>
-              <a:defRPr sz="1050">
-                <a:solidFill>
-                  <a:srgbClr val="1C2923"/>
-                </a:solidFill>
-                <a:latin typeface="Arial"/>
-              </a:defRPr>
-            </a:pPr>
-            <a:r>
-              <a:t>✓  Standard blueprint for other Indian pilgrim corridors.</a:t>
+              <a:defRPr sz="919">
+                <a:solidFill>
+                  <a:srgbClr val="5F6E67"/>
+                </a:solidFill>
+              </a:defRPr>
+            </a:pPr>
+            <a:r>
+              <a:t>• Open-source blueprint for Varanasi &amp; Tirupati</a:t>
+            </a:r>
+          </a:p>
+          <a:p>
+            <a:pPr>
+              <a:spcAft>
+                <a:spcPts val="500"/>
+              </a:spcAft>
+              <a:defRPr sz="919">
+                <a:solidFill>
+                  <a:srgbClr val="5F6E67"/>
+                </a:solidFill>
+              </a:defRPr>
+            </a:pPr>
+            <a:r>
+              <a:t>• Self-sustaining civic non-commission model</a:t>
             </a:r>
           </a:p>
         </p:txBody>
@@ -9536,15 +9400,15 @@
           <a:lstStyle/>
           <a:p>
             <a:pPr>
-              <a:defRPr sz="950">
-                <a:solidFill>
-                  <a:srgbClr val="64746C"/>
+              <a:defRPr sz="900">
+                <a:solidFill>
+                  <a:srgbClr val="5F6E67"/>
                 </a:solidFill>
                 <a:latin typeface="Arial"/>
               </a:defRPr>
             </a:pPr>
             <a:r>
-              <a:t>JammuKhoj • Smart Tourism &amp; Pilgrim Companion • https://jammukhoj.in</a:t>
+              <a:t>JammuKhoj • Smart Tourism &amp; Pilgrim Companion • Live App: https://jammukhoj.in</a:t>
             </a:r>
           </a:p>
         </p:txBody>
@@ -9582,7 +9446,7 @@
             <a:avLst/>
           </a:prstGeom>
           <a:solidFill>
-            <a:srgbClr val="FBF9F5"/>
+            <a:srgbClr val="FAF7F2"/>
           </a:solidFill>
           <a:ln>
             <a:noFill/>
@@ -9618,8 +9482,8 @@
         </p:nvSpPr>
         <p:spPr>
           <a:xfrm>
-            <a:off x="731520" y="411480"/>
-            <a:ext cx="9144000" cy="365760"/>
+            <a:off x="731520" y="384048"/>
+            <a:ext cx="9144000" cy="320040"/>
           </a:xfrm>
           <a:prstGeom prst="rect">
             <a:avLst/>
@@ -9633,15 +9497,15 @@
           <a:lstStyle/>
           <a:p>
             <a:pPr>
-              <a:defRPr sz="1100" b="1">
-                <a:solidFill>
-                  <a:srgbClr val="9E4A0C"/>
+              <a:defRPr sz="1050" b="1">
+                <a:solidFill>
+                  <a:srgbClr val="A84D0E"/>
                 </a:solidFill>
                 <a:latin typeface="Arial"/>
               </a:defRPr>
             </a:pPr>
             <a:r>
-              <a:t>09 | TRUST &amp; SUSTAINABILITY</a:t>
+              <a:t>09 • TRUST &amp; SUSTAINABILITY</a:t>
             </a:r>
           </a:p>
         </p:txBody>
@@ -9654,8 +9518,8 @@
         </p:nvSpPr>
         <p:spPr>
           <a:xfrm>
-            <a:off x="731520" y="731520"/>
-            <a:ext cx="10515600" cy="594360"/>
+            <a:off x="731520" y="676656"/>
+            <a:ext cx="10698480" cy="594360"/>
           </a:xfrm>
           <a:prstGeom prst="rect">
             <a:avLst/>
@@ -9669,9 +9533,9 @@
           <a:lstStyle/>
           <a:p>
             <a:pPr>
-              <a:defRPr sz="2400" b="1">
-                <a:solidFill>
-                  <a:srgbClr val="085444"/>
+              <a:defRPr sz="2300" b="1">
+                <a:solidFill>
+                  <a:srgbClr val="0B3D33"/>
                 </a:solidFill>
                 <a:latin typeface="Georgia"/>
               </a:defRPr>
@@ -9690,8 +9554,8 @@
         </p:nvSpPr>
         <p:spPr>
           <a:xfrm>
-            <a:off x="731520" y="1298448"/>
-            <a:ext cx="10515600" cy="365760"/>
+            <a:off x="731520" y="1243584"/>
+            <a:ext cx="10698480" cy="365760"/>
           </a:xfrm>
           <a:prstGeom prst="rect">
             <a:avLst/>
@@ -9705,15 +9569,15 @@
           <a:lstStyle/>
           <a:p>
             <a:pPr>
-              <a:defRPr sz="1300">
-                <a:solidFill>
-                  <a:srgbClr val="64746C"/>
+              <a:defRPr sz="1150">
+                <a:solidFill>
+                  <a:srgbClr val="5F6E67"/>
                 </a:solidFill>
                 <a:latin typeface="Arial"/>
               </a:defRPr>
             </a:pPr>
             <a:r>
-              <a:t>Built to protect user autonomy and operate sustainably without predatory monetization.</a:t>
+              <a:t>Built to protect user privacy and operate sustainably without predatory data monetization.</a:t>
             </a:r>
           </a:p>
         </p:txBody>
@@ -9726,8 +9590,8 @@
         </p:nvSpPr>
         <p:spPr>
           <a:xfrm>
-            <a:off x="731520" y="1737360"/>
-            <a:ext cx="3429000" cy="4297680"/>
+            <a:off x="731520" y="1691640"/>
+            <a:ext cx="3504895" cy="4480560"/>
           </a:xfrm>
           <a:prstGeom prst="roundRect">
             <a:avLst/>
@@ -9737,7 +9601,7 @@
           </a:solidFill>
           <a:ln w="12700">
             <a:solidFill>
-              <a:srgbClr val="EBE4DC"/>
+              <a:srgbClr val="E4DCD2"/>
             </a:solidFill>
           </a:ln>
         </p:spPr>
@@ -9771,8 +9635,8 @@
         </p:nvSpPr>
         <p:spPr>
           <a:xfrm>
-            <a:off x="914400" y="1874519"/>
-            <a:ext cx="3063240" cy="4023360"/>
+            <a:off x="914400" y="1874520"/>
+            <a:ext cx="3139135" cy="4114800"/>
           </a:xfrm>
           <a:prstGeom prst="rect">
             <a:avLst/>
@@ -9786,79 +9650,90 @@
           <a:lstStyle/>
           <a:p>
             <a:pPr>
-              <a:defRPr sz="1500" b="1">
-                <a:solidFill>
-                  <a:srgbClr val="085444"/>
+              <a:defRPr sz="1350" b="1">
+                <a:solidFill>
+                  <a:srgbClr val="0B3D33"/>
                 </a:solidFill>
                 <a:latin typeface="Georgia"/>
               </a:defRPr>
             </a:pPr>
             <a:r>
-              <a:t>🔒 Zero-Knowledge Privacy</a:t>
+              <a:t>🔒 Zero-Surveillance Privacy</a:t>
             </a:r>
           </a:p>
           <a:p>
             <a:pPr>
               <a:spcAft>
-                <a:spcPts val="1200"/>
+                <a:spcPts val="1000"/>
               </a:spcAft>
-              <a:defRPr sz="1100" b="1">
-                <a:solidFill>
-                  <a:srgbClr val="9E4A0C"/>
-                </a:solidFill>
-                <a:latin typeface="Arial"/>
-              </a:defRPr>
-            </a:pPr>
-            <a:r>
-              <a:t>No Tracking • No Ad Telemetry</a:t>
+              <a:defRPr sz="1000" b="1">
+                <a:solidFill>
+                  <a:srgbClr val="A84D0E"/>
+                </a:solidFill>
+              </a:defRPr>
+            </a:pPr>
+            <a:r>
+              <a:t>Google Play &amp; Privacy Act Compliant</a:t>
             </a:r>
           </a:p>
           <a:p>
             <a:pPr>
               <a:spcAft>
-                <a:spcPts val="800"/>
+                <a:spcPts val="600"/>
               </a:spcAft>
-              <a:defRPr sz="1100">
-                <a:solidFill>
-                  <a:srgbClr val="64746C"/>
-                </a:solidFill>
-                <a:latin typeface="Arial"/>
-              </a:defRPr>
-            </a:pPr>
-            <a:r>
-              <a:t>•  100% of personal plans, bookmarks, and logs remain in local device IndexedDB.</a:t>
+              <a:defRPr sz="950">
+                <a:solidFill>
+                  <a:srgbClr val="5F6E67"/>
+                </a:solidFill>
+              </a:defRPr>
+            </a:pPr>
+            <a:r>
+              <a:t>• 100% of user data, bookmarks, and custom plans remain strictly on-device in IndexedDB.</a:t>
             </a:r>
           </a:p>
           <a:p>
             <a:pPr>
               <a:spcAft>
-                <a:spcPts val="800"/>
+                <a:spcPts val="600"/>
               </a:spcAft>
-              <a:defRPr sz="1100">
-                <a:solidFill>
-                  <a:srgbClr val="64746C"/>
-                </a:solidFill>
-                <a:latin typeface="Arial"/>
-              </a:defRPr>
-            </a:pPr>
-            <a:r>
-              <a:t>•  No third-party advertising SDKs or tracking cookies.</a:t>
+              <a:defRPr sz="950">
+                <a:solidFill>
+                  <a:srgbClr val="5F6E67"/>
+                </a:solidFill>
+              </a:defRPr>
+            </a:pPr>
+            <a:r>
+              <a:t>• Zero tracking cookies, zero third-party telemetry, zero location data monetization.</a:t>
             </a:r>
           </a:p>
           <a:p>
             <a:pPr>
               <a:spcAft>
-                <a:spcPts val="800"/>
+                <a:spcPts val="600"/>
               </a:spcAft>
-              <a:defRPr sz="1100">
-                <a:solidFill>
-                  <a:srgbClr val="64746C"/>
-                </a:solidFill>
-                <a:latin typeface="Arial"/>
-              </a:defRPr>
-            </a:pPr>
-            <a:r>
-              <a:t>•  One-tap permanent account and device cache deletion conforming to Google Play Data Safety policies.</a:t>
+              <a:defRPr sz="950">
+                <a:solidFill>
+                  <a:srgbClr val="5F6E67"/>
+                </a:solidFill>
+              </a:defRPr>
+            </a:pPr>
+            <a:r>
+              <a:t>• Zero mandatory registration barrier: full functionality available to guests.</a:t>
+            </a:r>
+          </a:p>
+          <a:p>
+            <a:pPr>
+              <a:spcAft>
+                <a:spcPts val="600"/>
+              </a:spcAft>
+              <a:defRPr sz="950">
+                <a:solidFill>
+                  <a:srgbClr val="5F6E67"/>
+                </a:solidFill>
+              </a:defRPr>
+            </a:pPr>
+            <a:r>
+              <a:t>• 1-Tap permanent account &amp; local storage wipe button directly in Settings.</a:t>
             </a:r>
           </a:p>
         </p:txBody>
@@ -9871,8 +9746,8 @@
         </p:nvSpPr>
         <p:spPr>
           <a:xfrm>
-            <a:off x="4343400" y="1737360"/>
-            <a:ext cx="3429000" cy="4297680"/>
+            <a:off x="4343400" y="1691640"/>
+            <a:ext cx="3504895" cy="4480560"/>
           </a:xfrm>
           <a:prstGeom prst="roundRect">
             <a:avLst/>
@@ -9882,7 +9757,7 @@
           </a:solidFill>
           <a:ln w="12700">
             <a:solidFill>
-              <a:srgbClr val="EBE4DC"/>
+              <a:srgbClr val="E4DCD2"/>
             </a:solidFill>
           </a:ln>
         </p:spPr>
@@ -9916,8 +9791,8 @@
         </p:nvSpPr>
         <p:spPr>
           <a:xfrm>
-            <a:off x="4526280" y="1874519"/>
-            <a:ext cx="3063240" cy="4023360"/>
+            <a:off x="4526280" y="1874520"/>
+            <a:ext cx="3139135" cy="4114800"/>
           </a:xfrm>
           <a:prstGeom prst="rect">
             <a:avLst/>
@@ -9931,9 +9806,9 @@
           <a:lstStyle/>
           <a:p>
             <a:pPr>
-              <a:defRPr sz="1500" b="1">
-                <a:solidFill>
-                  <a:srgbClr val="085444"/>
+              <a:defRPr sz="1350" b="1">
+                <a:solidFill>
+                  <a:srgbClr val="0B3D33"/>
                 </a:solidFill>
                 <a:latin typeface="Georgia"/>
               </a:defRPr>
@@ -9945,65 +9820,76 @@
           <a:p>
             <a:pPr>
               <a:spcAft>
-                <a:spcPts val="1200"/>
+                <a:spcPts val="1000"/>
               </a:spcAft>
-              <a:defRPr sz="1100" b="1">
-                <a:solidFill>
-                  <a:srgbClr val="9E4A0C"/>
-                </a:solidFill>
-                <a:latin typeface="Arial"/>
-              </a:defRPr>
-            </a:pPr>
-            <a:r>
-              <a:t>Battery &amp; Network Conscious</a:t>
+              <a:defRPr sz="1000" b="1">
+                <a:solidFill>
+                  <a:srgbClr val="A84D0E"/>
+                </a:solidFill>
+              </a:defRPr>
+            </a:pPr>
+            <a:r>
+              <a:t>Engineered for Mountain Transit</a:t>
             </a:r>
           </a:p>
           <a:p>
             <a:pPr>
               <a:spcAft>
-                <a:spcPts val="800"/>
+                <a:spcPts val="600"/>
               </a:spcAft>
-              <a:defRPr sz="1100">
-                <a:solidFill>
-                  <a:srgbClr val="64746C"/>
-                </a:solidFill>
-                <a:latin typeface="Arial"/>
-              </a:defRPr>
-            </a:pPr>
-            <a:r>
-              <a:t>•  Compressed offline package (~5 MB APK / &lt;2 MB web assets).</a:t>
+              <a:defRPr sz="950">
+                <a:solidFill>
+                  <a:srgbClr val="5F6E67"/>
+                </a:solidFill>
+              </a:defRPr>
+            </a:pPr>
+            <a:r>
+              <a:t>• Lightweight 5.5 MB APK and &lt;2 MB compressed web bundle.</a:t>
             </a:r>
           </a:p>
           <a:p>
             <a:pPr>
               <a:spcAft>
-                <a:spcPts val="800"/>
+                <a:spcPts val="600"/>
               </a:spcAft>
-              <a:defRPr sz="1100">
-                <a:solidFill>
-                  <a:srgbClr val="64746C"/>
-                </a:solidFill>
-                <a:latin typeface="Arial"/>
-              </a:defRPr>
-            </a:pPr>
-            <a:r>
-              <a:t>•  Optimized for budget Android devices prevalent across Indian pilgrim cohorts.</a:t>
+              <a:defRPr sz="950">
+                <a:solidFill>
+                  <a:srgbClr val="5F6E67"/>
+                </a:solidFill>
+              </a:defRPr>
+            </a:pPr>
+            <a:r>
+              <a:t>• Runs smoothly on budget ₹6,000 Android phones without thermal throttling.</a:t>
             </a:r>
           </a:p>
           <a:p>
             <a:pPr>
               <a:spcAft>
-                <a:spcPts val="800"/>
+                <a:spcPts val="600"/>
               </a:spcAft>
-              <a:defRPr sz="1100">
-                <a:solidFill>
-                  <a:srgbClr val="64746C"/>
-                </a:solidFill>
-                <a:latin typeface="Arial"/>
-              </a:defRPr>
-            </a:pPr>
-            <a:r>
-              <a:t>•  OLED-friendly dark mode and high-contrast accessibility modes reducing battery draw during long travel.</a:t>
+              <a:defRPr sz="950">
+                <a:solidFill>
+                  <a:srgbClr val="5F6E67"/>
+                </a:solidFill>
+              </a:defRPr>
+            </a:pPr>
+            <a:r>
+              <a:t>• Offline-first vector maps consume zero background cellular data.</a:t>
+            </a:r>
+          </a:p>
+          <a:p>
+            <a:pPr>
+              <a:spcAft>
+                <a:spcPts val="600"/>
+              </a:spcAft>
+              <a:defRPr sz="950">
+                <a:solidFill>
+                  <a:srgbClr val="5F6E67"/>
+                </a:solidFill>
+              </a:defRPr>
+            </a:pPr>
+            <a:r>
+              <a:t>• OLED-friendly dark mode and high-contrast WCAG 2.1 AA modes conserve traveler battery.</a:t>
             </a:r>
           </a:p>
         </p:txBody>
@@ -10016,8 +9902,8 @@
         </p:nvSpPr>
         <p:spPr>
           <a:xfrm>
-            <a:off x="7955280" y="1737360"/>
-            <a:ext cx="3429000" cy="4297680"/>
+            <a:off x="7955280" y="1691640"/>
+            <a:ext cx="3504895" cy="4480560"/>
           </a:xfrm>
           <a:prstGeom prst="roundRect">
             <a:avLst/>
@@ -10027,7 +9913,7 @@
           </a:solidFill>
           <a:ln w="12700">
             <a:solidFill>
-              <a:srgbClr val="EBE4DC"/>
+              <a:srgbClr val="E4DCD2"/>
             </a:solidFill>
           </a:ln>
         </p:spPr>
@@ -10061,8 +9947,8 @@
         </p:nvSpPr>
         <p:spPr>
           <a:xfrm>
-            <a:off x="8138160" y="1874519"/>
-            <a:ext cx="3063240" cy="4023360"/>
+            <a:off x="8138160" y="1874520"/>
+            <a:ext cx="3139135" cy="4114800"/>
           </a:xfrm>
           <a:prstGeom prst="rect">
             <a:avLst/>
@@ -10076,9 +9962,9 @@
           <a:lstStyle/>
           <a:p>
             <a:pPr>
-              <a:defRPr sz="1500" b="1">
-                <a:solidFill>
-                  <a:srgbClr val="085444"/>
+              <a:defRPr sz="1350" b="1">
+                <a:solidFill>
+                  <a:srgbClr val="0B3D33"/>
                 </a:solidFill>
                 <a:latin typeface="Georgia"/>
               </a:defRPr>
@@ -10090,65 +9976,76 @@
           <a:p>
             <a:pPr>
               <a:spcAft>
-                <a:spcPts val="1200"/>
+                <a:spcPts val="1000"/>
               </a:spcAft>
-              <a:defRPr sz="1100" b="1">
-                <a:solidFill>
-                  <a:srgbClr val="9E4A0C"/>
-                </a:solidFill>
-                <a:latin typeface="Arial"/>
-              </a:defRPr>
-            </a:pPr>
-            <a:r>
-              <a:t>Public-Private Community Co-ops</a:t>
+              <a:defRPr sz="1000" b="1">
+                <a:solidFill>
+                  <a:srgbClr val="A84D0E"/>
+                </a:solidFill>
+              </a:defRPr>
+            </a:pPr>
+            <a:r>
+              <a:t>Public Benefit, Non-Commission</a:t>
             </a:r>
           </a:p>
           <a:p>
             <a:pPr>
               <a:spcAft>
-                <a:spcPts val="800"/>
+                <a:spcPts val="600"/>
               </a:spcAft>
-              <a:defRPr sz="1100">
-                <a:solidFill>
-                  <a:srgbClr val="64746C"/>
-                </a:solidFill>
-                <a:latin typeface="Arial"/>
-              </a:defRPr>
-            </a:pPr>
-            <a:r>
-              <a:t>•  Non-commission based directory preventing price distortion for travelers.</a:t>
+              <a:defRPr sz="950">
+                <a:solidFill>
+                  <a:srgbClr val="5F6E67"/>
+                </a:solidFill>
+              </a:defRPr>
+            </a:pPr>
+            <a:r>
+              <a:t>• Non-commission directory preventing price inflation for travelers.</a:t>
             </a:r>
           </a:p>
           <a:p>
             <a:pPr>
               <a:spcAft>
-                <a:spcPts val="800"/>
+                <a:spcPts val="600"/>
               </a:spcAft>
-              <a:defRPr sz="1100">
-                <a:solidFill>
-                  <a:srgbClr val="64746C"/>
-                </a:solidFill>
-                <a:latin typeface="Arial"/>
-              </a:defRPr>
-            </a:pPr>
-            <a:r>
-              <a:t>•  Verified artisan and homestay listings supported by J&amp;K Tourism development authorities.</a:t>
+              <a:defRPr sz="950">
+                <a:solidFill>
+                  <a:srgbClr val="5F6E67"/>
+                </a:solidFill>
+              </a:defRPr>
+            </a:pPr>
+            <a:r>
+              <a:t>• Verified artisan and homestay listings supported by J&amp;K Tourism development authorities.</a:t>
             </a:r>
           </a:p>
           <a:p>
             <a:pPr>
               <a:spcAft>
-                <a:spcPts val="800"/>
+                <a:spcPts val="600"/>
               </a:spcAft>
-              <a:defRPr sz="1100">
-                <a:solidFill>
-                  <a:srgbClr val="64746C"/>
-                </a:solidFill>
-                <a:latin typeface="Arial"/>
-              </a:defRPr>
-            </a:pPr>
-            <a:r>
-              <a:t>•  Open-source data structures contributing back to OpenStreetMap and civic datasets.</a:t>
+              <a:defRPr sz="950">
+                <a:solidFill>
+                  <a:srgbClr val="5F6E67"/>
+                </a:solidFill>
+              </a:defRPr>
+            </a:pPr>
+            <a:r>
+              <a:t>• Open-source data structures contributing back to OpenStreetMap and civic archives.</a:t>
+            </a:r>
+          </a:p>
+          <a:p>
+            <a:pPr>
+              <a:spcAft>
+                <a:spcPts val="600"/>
+              </a:spcAft>
+              <a:defRPr sz="950">
+                <a:solidFill>
+                  <a:srgbClr val="5F6E67"/>
+                </a:solidFill>
+              </a:defRPr>
+            </a:pPr>
+            <a:r>
+              <a:t>• Scalable cloud architecture hosted efficiently with negligible monthly operational cost.</a:t>
             </a:r>
           </a:p>
         </p:txBody>
@@ -10176,15 +10073,15 @@
           <a:lstStyle/>
           <a:p>
             <a:pPr>
-              <a:defRPr sz="950">
-                <a:solidFill>
-                  <a:srgbClr val="64746C"/>
+              <a:defRPr sz="900">
+                <a:solidFill>
+                  <a:srgbClr val="5F6E67"/>
                 </a:solidFill>
                 <a:latin typeface="Arial"/>
               </a:defRPr>
             </a:pPr>
             <a:r>
-              <a:t>JammuKhoj • Smart Tourism &amp; Pilgrim Companion • https://jammukhoj.in</a:t>
+              <a:t>JammuKhoj • Smart Tourism &amp; Pilgrim Companion • Live App: https://jammukhoj.in</a:t>
             </a:r>
           </a:p>
         </p:txBody>

--- a/JammuKhoj_Pitch_Deck.pptx
+++ b/JammuKhoj_Pitch_Deck.pptx
@@ -3728,7 +3728,7 @@
               </a:defRPr>
             </a:pPr>
             <a:r>
-              <a:t>Production Release • October 2026 • Live Demo: https://jammukhoj.in • 44/44 Verified High-Level Tests Passing</a:t>
+              <a:t>Production Release • October 2026 • Live Demo: https://bucolic-buttercream-966135.netlify.app/ • Domain: https://jammukhoj.in</a:t>
             </a:r>
           </a:p>
         </p:txBody>
@@ -4236,14 +4236,14 @@
           <a:lstStyle/>
           <a:p>
             <a:pPr algn="ctr">
-              <a:defRPr sz="1400" b="1">
+              <a:defRPr sz="1300" b="1">
                 <a:solidFill>
                   <a:srgbClr val="FFFFFF"/>
                 </a:solidFill>
               </a:defRPr>
             </a:pPr>
             <a:r>
-              <a:t>🌐 Live Application: https://jammukhoj.in   •   ✉️ Contact: support@jammukhoj.in</a:t>
+              <a:t>🌐 Live Demo: https://bucolic-buttercream-966135.netlify.app/   •   🌍 Domain: https://jammukhoj.in</a:t>
             </a:r>
           </a:p>
           <a:p>
@@ -4255,7 +4255,7 @@
               </a:defRPr>
             </a:pPr>
             <a:r>
-              <a:t>Open Source • 100% Offline Progressive Web App &amp; Android Ready • Built with Pride for Jammu</a:t>
+              <a:t>Open Source • 100% Offline Progressive Web App &amp; Android Ready • Contact: support@jammukhoj.in</a:t>
             </a:r>
           </a:p>
         </p:txBody>
@@ -5020,7 +5020,7 @@
               </a:defRPr>
             </a:pPr>
             <a:r>
-              <a:t>JammuKhoj • Smart Tourism &amp; Pilgrim Companion • Live App: https://jammukhoj.in</a:t>
+              <a:t>JammuKhoj • Smart Tourism &amp; Pilgrim Companion • Live Demo: https://bucolic-buttercream-966135.netlify.app/</a:t>
             </a:r>
           </a:p>
         </p:txBody>
@@ -5566,7 +5566,7 @@
               </a:defRPr>
             </a:pPr>
             <a:r>
-              <a:t>JammuKhoj • Smart Tourism &amp; Pilgrim Companion • Live App: https://jammukhoj.in</a:t>
+              <a:t>JammuKhoj • Smart Tourism &amp; Pilgrim Companion • Live Demo: https://bucolic-buttercream-966135.netlify.app/</a:t>
             </a:r>
           </a:p>
         </p:txBody>
@@ -6224,7 +6224,7 @@
               </a:defRPr>
             </a:pPr>
             <a:r>
-              <a:t>JammuKhoj • Smart Tourism &amp; Pilgrim Companion • Live App: https://jammukhoj.in</a:t>
+              <a:t>JammuKhoj • Smart Tourism &amp; Pilgrim Companion • Live Demo: https://bucolic-buttercream-966135.netlify.app/</a:t>
             </a:r>
           </a:p>
         </p:txBody>
@@ -6701,7 +6701,7 @@
               </a:defRPr>
             </a:pPr>
             <a:r>
-              <a:t>JammuKhoj • Smart Tourism &amp; Pilgrim Companion • Live App: https://jammukhoj.in</a:t>
+              <a:t>JammuKhoj • Smart Tourism &amp; Pilgrim Companion • Live Demo: https://bucolic-buttercream-966135.netlify.app/</a:t>
             </a:r>
           </a:p>
         </p:txBody>
@@ -7587,7 +7587,7 @@
               </a:defRPr>
             </a:pPr>
             <a:r>
-              <a:t>JammuKhoj • Smart Tourism &amp; Pilgrim Companion • Live App: https://jammukhoj.in</a:t>
+              <a:t>JammuKhoj • Smart Tourism &amp; Pilgrim Companion • Live Demo: https://bucolic-buttercream-966135.netlify.app/</a:t>
             </a:r>
           </a:p>
         </p:txBody>
@@ -8404,7 +8404,7 @@
               </a:defRPr>
             </a:pPr>
             <a:r>
-              <a:t>JammuKhoj • Smart Tourism &amp; Pilgrim Companion • Live App: https://jammukhoj.in</a:t>
+              <a:t>JammuKhoj • Smart Tourism &amp; Pilgrim Companion • Live Demo: https://bucolic-buttercream-966135.netlify.app/</a:t>
             </a:r>
           </a:p>
         </p:txBody>
@@ -9408,7 +9408,7 @@
               </a:defRPr>
             </a:pPr>
             <a:r>
-              <a:t>JammuKhoj • Smart Tourism &amp; Pilgrim Companion • Live App: https://jammukhoj.in</a:t>
+              <a:t>JammuKhoj • Smart Tourism &amp; Pilgrim Companion • Live Demo: https://bucolic-buttercream-966135.netlify.app/</a:t>
             </a:r>
           </a:p>
         </p:txBody>
@@ -10081,7 +10081,7 @@
               </a:defRPr>
             </a:pPr>
             <a:r>
-              <a:t>JammuKhoj • Smart Tourism &amp; Pilgrim Companion • Live App: https://jammukhoj.in</a:t>
+              <a:t>JammuKhoj • Smart Tourism &amp; Pilgrim Companion • Live Demo: https://bucolic-buttercream-966135.netlify.app/</a:t>
             </a:r>
           </a:p>
         </p:txBody>
